--- a/slides/datasets-in-10-minutes-eurlexsum.pptx
+++ b/slides/datasets-in-10-minutes-eurlexsum.pptx
@@ -34,8 +34,6 @@
     <p:sldId id="282" r:id="rId32"/>
     <p:sldId id="283" r:id="rId33"/>
     <p:sldId id="284" r:id="rId34"/>
-    <p:sldId id="285" r:id="rId35"/>
-    <p:sldId id="286" r:id="rId36"/>
     <p:sldId id="287" r:id="rId37"/>
     <p:sldId id="288" r:id="rId38"/>
     <p:sldId id="289" r:id="rId39"/>
@@ -63,7 +61,6 @@
     <p:sldId id="311" r:id="rId61"/>
     <p:sldId id="312" r:id="rId62"/>
     <p:sldId id="313" r:id="rId63"/>
-    <p:sldId id="314" r:id="rId64"/>
     <p:sldId id="315" r:id="rId65"/>
     <p:sldId id="316" r:id="rId66"/>
     <p:sldId id="317" r:id="rId67"/>
@@ -7939,22 +7936,8 @@
                 <a:ea typeface="Noto Sans CJK JP"/>
                 <a:cs typeface="Noto Sans"/>
               </a:rPr>
-              <a:t>[1] Aumiller et al., EUR-Lex-Sum. 固定HF revision 33ecb2d、test実レコード。 32013R1260 ／ german ／ test row 143（0始まり）</a:t>
-            </a:r>
-          </a:p>
-          <a:p>
-            <a:pPr>
-              <a:lnSpc>
-                <a:spcPts val="940"/>
-              </a:lnSpc>
-              <a:buNone/>
-              <a:defRPr sz="810" b="0">
-                <a:solidFill>
-                  <a:srgbClr val="303437"/>
-                </a:solidFill>
-                <a:latin typeface="Noto Sans"/>
-              </a:defRPr>
-            </a:pPr>
+              <a:t>[1] Aumiller et al. EUR-Lex-Sum. 32013R1260 ／ german  </a:t>
+            </a:r>
             <a:r>
               <a:rPr sz="810" b="0" lang="ja-JP" altLang="en-US">
                 <a:solidFill>
@@ -8117,36 +8100,6 @@
               <a:t>参照要約では、出生と死亡という具体例を添え、どのデータをそろえる制度なのかを説明する。</a:t>
             </a:r>
           </a:p>
-          <a:p>
-            <a:pPr marL="457200" indent="-355600">
-              <a:lnSpc>
-                <a:spcPts val="2558"/>
-              </a:lnSpc>
-              <a:spcAft>
-                <a:spcPts val="0"/>
-              </a:spcAft>
-              <a:buSzPct val="61860"/>
-              <a:buFont typeface="Noto Sans CJK JP"/>
-              <a:buChar char="●"/>
-              <a:defRPr sz="2150" b="0">
-                <a:solidFill>
-                  <a:srgbClr val="303437"/>
-                </a:solidFill>
-                <a:latin typeface="Noto Sans"/>
-              </a:defRPr>
-            </a:pPr>
-            <a:r>
-              <a:rPr sz="2150" b="0" lang="ja-JP" altLang="en-US">
-                <a:solidFill>
-                  <a:srgbClr val="303437"/>
-                </a:solidFill>
-                <a:latin typeface="Noto Sans"/>
-                <a:ea typeface="Noto Sans CJK JP"/>
-                <a:cs typeface="Noto Sans"/>
-              </a:rPr>
-              <a:t>これはドイツ語から日本語への翻訳課題ではない。日本語は、この資料で原文を読むために添えた訳である。</a:t>
-            </a:r>
-          </a:p>
         </p:txBody>
       </p:sp>
       <p:sp>
@@ -8246,18 +8199,7 @@
                 <a:ea typeface="Noto Sans CJK JP"/>
                 <a:cs typeface="Noto Sans"/>
               </a:rPr>
-              <a:t>[1] Aumiller et al., EUR-Lex-Sum. 固定HF revision 33ecb2d、test実レコード。</a:t>
-            </a:r>
-            <a:r>
-              <a:rPr sz="810" b="0" lang="ja-JP" altLang="en-US">
-                <a:solidFill>
-                  <a:srgbClr val="626669"/>
-                </a:solidFill>
-                <a:latin typeface="Noto Sans"/>
-                <a:ea typeface="Noto Sans CJK JP"/>
-                <a:cs typeface="Noto Sans"/>
-              </a:rPr>
-              <a:t>  </a:t>
+              <a:t>[1] Aumiller et al. EUR-Lex-Sum. </a:t>
             </a:r>
             <a:r>
               <a:rPr sz="810" b="0" lang="ja-JP" altLang="en-US">
@@ -8639,22 +8581,8 @@
                 <a:ea typeface="Noto Sans CJK JP"/>
                 <a:cs typeface="Noto Sans"/>
               </a:rPr>
-              <a:t>[1] Aumiller et al., EUR-Lex-Sum. 固定HF revision 33ecb2d、test実レコード。 32012R1026 ／ spanish ／ test row 107（0始まり）</a:t>
-            </a:r>
-          </a:p>
-          <a:p>
-            <a:pPr>
-              <a:lnSpc>
-                <a:spcPts val="940"/>
-              </a:lnSpc>
-              <a:buNone/>
-              <a:defRPr sz="810" b="0">
-                <a:solidFill>
-                  <a:srgbClr val="303437"/>
-                </a:solidFill>
-                <a:latin typeface="Noto Sans"/>
-              </a:defRPr>
-            </a:pPr>
+              <a:t>[1] Aumiller et al. EUR-Lex-Sum. 32012R1026 ／ spanish  </a:t>
+            </a:r>
             <a:r>
               <a:rPr sz="810" b="0" lang="ja-JP" altLang="en-US">
                 <a:solidFill>
@@ -9035,22 +8963,8 @@
                 <a:ea typeface="Noto Sans CJK JP"/>
                 <a:cs typeface="Noto Sans"/>
               </a:rPr>
-              <a:t>[1] Aumiller et al., EUR-Lex-Sum. 固定HF revision 33ecb2d、test実レコード。 32012R1026 ／ spanish ／ test row 107（0始まり）</a:t>
-            </a:r>
-          </a:p>
-          <a:p>
-            <a:pPr>
-              <a:lnSpc>
-                <a:spcPts val="940"/>
-              </a:lnSpc>
-              <a:buNone/>
-              <a:defRPr sz="810" b="0">
-                <a:solidFill>
-                  <a:srgbClr val="303437"/>
-                </a:solidFill>
-                <a:latin typeface="Noto Sans"/>
-              </a:defRPr>
-            </a:pPr>
+              <a:t>[1] Aumiller et al. EUR-Lex-Sum. 32012R1026 ／ spanish  </a:t>
+            </a:r>
             <a:r>
               <a:rPr sz="810" b="0" lang="ja-JP" altLang="en-US">
                 <a:solidFill>
@@ -9213,36 +9127,6 @@
               <a:t>同じCelex IDを使えば、他言語の同じ法令と参照要約へ対応させられる。</a:t>
             </a:r>
           </a:p>
-          <a:p>
-            <a:pPr marL="457200" indent="-355600">
-              <a:lnSpc>
-                <a:spcPts val="2558"/>
-              </a:lnSpc>
-              <a:spcAft>
-                <a:spcPts val="0"/>
-              </a:spcAft>
-              <a:buSzPct val="61860"/>
-              <a:buFont typeface="Noto Sans CJK JP"/>
-              <a:buChar char="●"/>
-              <a:defRPr sz="2150" b="0">
-                <a:solidFill>
-                  <a:srgbClr val="303437"/>
-                </a:solidFill>
-                <a:latin typeface="Noto Sans"/>
-              </a:defRPr>
-            </a:pPr>
-            <a:r>
-              <a:rPr sz="2150" b="0" lang="ja-JP" altLang="en-US">
-                <a:solidFill>
-                  <a:srgbClr val="303437"/>
-                </a:solidFill>
-                <a:latin typeface="Noto Sans"/>
-                <a:ea typeface="Noto Sans CJK JP"/>
-                <a:cs typeface="Noto Sans"/>
-              </a:rPr>
-              <a:t>以下では、言語ごとに量が異なる学習集合と、24言語で対応する評価集合の作り方を見る。</a:t>
-            </a:r>
-          </a:p>
         </p:txBody>
       </p:sp>
       <p:sp>
@@ -9342,18 +9226,7 @@
                 <a:ea typeface="Noto Sans CJK JP"/>
                 <a:cs typeface="Noto Sans"/>
               </a:rPr>
-              <a:t>[1] Aumiller et al., EUR-Lex-Sum. 固定HF revision 33ecb2d、test実レコード。</a:t>
-            </a:r>
-            <a:r>
-              <a:rPr sz="810" b="0" lang="ja-JP" altLang="en-US">
-                <a:solidFill>
-                  <a:srgbClr val="626669"/>
-                </a:solidFill>
-                <a:latin typeface="Noto Sans"/>
-                <a:ea typeface="Noto Sans CJK JP"/>
-                <a:cs typeface="Noto Sans"/>
-              </a:rPr>
-              <a:t>  </a:t>
+              <a:t>[1] Aumiller et al. EUR-Lex-Sum. </a:t>
             </a:r>
             <a:r>
               <a:rPr sz="810" b="0" lang="ja-JP" altLang="en-US">
@@ -9658,7 +9531,7 @@
                 <a:ea typeface="Noto Sans CJK JP"/>
                 <a:cs typeface="Noto Sans"/>
               </a:rPr>
-              <a:t>要約と訳文はEUが契約する専門家が作成。データ構築者が全要約を新たに書いたものではない。</a:t>
+              <a:t>EUが契約する専門家が、法令の要約と各言語の訳文を作成した。</a:t>
             </a:r>
           </a:p>
         </p:txBody>
@@ -9965,7 +9838,7 @@
                 <a:ea typeface="Noto Sans CJK JP"/>
                 <a:cs typeface="Noto Sans"/>
               </a:rPr>
-              <a:t>最終的に31,987の言語別ペアを収録。これは31,987件の別々の法令という意味ではない。</a:t>
+              <a:t>同じ法令を複数言語で対応付け、合計31,987組の言語別ペアを収録した。</a:t>
             </a:r>
           </a:p>
         </p:txBody>
@@ -11466,36 +11339,6 @@
               <a:t>残りは言語ごとのtrain。Celex IDの分割を共有するため、同じ評価対象を言語間で比較できる。</a:t>
             </a:r>
           </a:p>
-          <a:p>
-            <a:pPr marL="457200" indent="-355600">
-              <a:lnSpc>
-                <a:spcPts val="2618"/>
-              </a:lnSpc>
-              <a:spcAft>
-                <a:spcPts val="0"/>
-              </a:spcAft>
-              <a:buSzPct val="60455"/>
-              <a:buFont typeface="Noto Sans CJK JP"/>
-              <a:buChar char="●"/>
-              <a:defRPr sz="2200" b="0">
-                <a:solidFill>
-                  <a:srgbClr val="303437"/>
-                </a:solidFill>
-                <a:latin typeface="Noto Sans"/>
-              </a:defRPr>
-            </a:pPr>
-            <a:r>
-              <a:rPr sz="2200" b="0" lang="ja-JP" altLang="en-US">
-                <a:solidFill>
-                  <a:srgbClr val="303437"/>
-                </a:solidFill>
-                <a:latin typeface="Noto Sans"/>
-                <a:ea typeface="Noto Sans CJK JP"/>
-                <a:cs typeface="Noto Sans"/>
-              </a:rPr>
-              <a:t>今回取得した8言語のtestは、188個のIDと並び順が全件一致した。英語の3分割には共通IDがなかった。</a:t>
-            </a:r>
-          </a:p>
         </p:txBody>
       </p:sp>
       <p:sp>
@@ -11595,18 +11438,7 @@
                 <a:ea typeface="Noto Sans CJK JP"/>
                 <a:cs typeface="Noto Sans"/>
               </a:rPr>
-              <a:t>[1] Aumiller et al., EUR-Lex-Sum. 固定HF revision 33ecb2d、test実レコード。</a:t>
-            </a:r>
-            <a:r>
-              <a:rPr sz="810" b="0" lang="ja-JP" altLang="en-US">
-                <a:solidFill>
-                  <a:srgbClr val="626669"/>
-                </a:solidFill>
-                <a:latin typeface="Noto Sans"/>
-                <a:ea typeface="Noto Sans CJK JP"/>
-                <a:cs typeface="Noto Sans"/>
-              </a:rPr>
-              <a:t>  </a:t>
+              <a:t>[1] Aumiller et al. EUR-Lex-Sum. </a:t>
             </a:r>
             <a:r>
               <a:rPr sz="810" b="0" lang="ja-JP" altLang="en-US">
@@ -11810,22 +11642,8 @@
                 <a:ea typeface="Noto Sans CJK JP"/>
                 <a:cs typeface="Noto Sans"/>
               </a:rPr>
-              <a:t>[1] Aumiller et al., EUR-Lex-Sum. 固定HF revision 33ecb2d、test実レコード。 公式配布のトップ画面。法令本文・参照要約・Celex IDをJSONLで公開。</a:t>
-            </a:r>
-          </a:p>
-          <a:p>
-            <a:pPr>
-              <a:lnSpc>
-                <a:spcPts val="940"/>
-              </a:lnSpc>
-              <a:buNone/>
-              <a:defRPr sz="810" b="0">
-                <a:solidFill>
-                  <a:srgbClr val="303437"/>
-                </a:solidFill>
-                <a:latin typeface="Noto Sans"/>
-              </a:defRPr>
-            </a:pPr>
+              <a:t>[1] Aumiller et al. EUR-Lex-Sum. </a:t>
+            </a:r>
             <a:r>
               <a:rPr sz="810" b="0" lang="ja-JP" altLang="en-US">
                 <a:solidFill>
@@ -12673,7 +12491,7 @@
                 <a:ea typeface="Noto Sans CJK JP"/>
                 <a:cs typeface="Noto Sans"/>
               </a:rPr>
-              <a:t>固定HF配布を空白区切りstr.split()で実測。2022年の論文集計とは区別する。</a:t>
+              <a:t>公開されている英語trainを、空白区切りの語数で集計。</a:t>
             </a:r>
           </a:p>
         </p:txBody>
@@ -12727,18 +12545,7 @@
                 <a:ea typeface="Noto Sans CJK JP"/>
                 <a:cs typeface="Noto Sans"/>
               </a:rPr>
-              <a:t>[1] Aumiller et al., EUR-Lex-Sum. 固定HF revision 33ecb2d、test実レコード。</a:t>
-            </a:r>
-            <a:r>
-              <a:rPr sz="810" b="0" lang="ja-JP" altLang="en-US">
-                <a:solidFill>
-                  <a:srgbClr val="626669"/>
-                </a:solidFill>
-                <a:latin typeface="Noto Sans"/>
-                <a:ea typeface="Noto Sans CJK JP"/>
-                <a:cs typeface="Noto Sans"/>
-              </a:rPr>
-              <a:t>  </a:t>
+              <a:t>[1] Aumiller et al. EUR-Lex-Sum. </a:t>
             </a:r>
             <a:r>
               <a:rPr sz="810" b="0" lang="ja-JP" altLang="en-US">
@@ -12816,7 +12623,7 @@
                 <a:ea typeface="Noto Sans CJK JP"/>
                 <a:cs typeface="Noto Sans"/>
               </a:rPr>
-              <a:t>多くの文書と、非常に長い裾を一緒に見る</a:t>
+              <a:t>多くの法令と、100万語を超える長い文書</a:t>
             </a:r>
           </a:p>
         </p:txBody>
@@ -12990,18 +12797,7 @@
                 <a:ea typeface="Noto Sans CJK JP"/>
                 <a:cs typeface="Noto Sans"/>
               </a:rPr>
-              <a:t>[1] Aumiller et al., EUR-Lex-Sum. 固定HF revision 33ecb2d、test実レコード。</a:t>
-            </a:r>
-            <a:r>
-              <a:rPr sz="810" b="0" lang="ja-JP" altLang="en-US">
-                <a:solidFill>
-                  <a:srgbClr val="626669"/>
-                </a:solidFill>
-                <a:latin typeface="Noto Sans"/>
-                <a:ea typeface="Noto Sans CJK JP"/>
-                <a:cs typeface="Noto Sans"/>
-              </a:rPr>
-              <a:t>  </a:t>
+              <a:t>[1] Aumiller et al. EUR-Lex-Sum. </a:t>
             </a:r>
             <a:r>
               <a:rPr sz="810" b="0" lang="ja-JP" altLang="en-US">
@@ -13276,7 +13072,7 @@
                 <a:ea typeface="Noto Sans CJK JP"/>
                 <a:cs typeface="Noto Sans"/>
               </a:rPr>
-              <a:t>ここで示す2022年の成績はF1。参照をどれだけ含むかと、生成文にどれだけ重なりがあるかを合わせて測る。</a:t>
+              <a:t>ここで示す2022年の成績はF1。参照要約の語をどれだけ拾えたかと、生成要約の語がどれだけ参照要約と重なるかを合わせて測る。</a:t>
             </a:r>
           </a:p>
           <a:p>
@@ -14832,7 +14628,7 @@
                 <a:ea typeface="Noto Sans CJK JP"/>
                 <a:cs typeface="Noto Sans"/>
               </a:rPr>
-              <a:t>段落の中心性を使い、要約の長さを決める</a:t>
+              <a:t>段落の中心性を使い、本文から要約を作る</a:t>
             </a:r>
           </a:p>
         </p:txBody>
@@ -16471,7 +16267,7 @@
                 <a:ea typeface="Noto Sans CJK JP"/>
                 <a:cs typeface="Noto Sans"/>
               </a:rPr>
-              <a:t>要約してから訳す手順と、参照を使う条件</a:t>
+              <a:t>英語で要約し、スペイン語へ翻訳する</a:t>
             </a:r>
           </a:p>
         </p:txBody>
@@ -16554,7 +16350,7 @@
                 <a:ea typeface="Noto Sans CJK JP"/>
                 <a:cs typeface="Noto Sans"/>
               </a:rPr>
-              <a:t>別の条件では、英語LexRankの出力を翻訳する。公開コードでも、英語要約を読んでから翻訳器へ渡している。</a:t>
+              <a:t>英語LexRankの要約をOPUS-MTで翻訳する方法も比較した。</a:t>
             </a:r>
           </a:p>
           <a:p>
@@ -16584,7 +16380,7 @@
                 <a:ea typeface="Noto Sans CJK JP"/>
                 <a:cs typeface="Noto Sans"/>
               </a:rPr>
-              <a:t>人手の英語参照要約を翻訳する条件は、入力法令だけから要約を作る方式とは利用できる情報が異なる。</a:t>
+              <a:t>人手の英語参照要約を翻訳する条件は、要約の情報選択を人に任せ、翻訳だけを行う比較である。</a:t>
             </a:r>
           </a:p>
         </p:txBody>
@@ -17082,7 +16878,7 @@
                 <a:ea typeface="Noto Sans CJK JP"/>
                 <a:cs typeface="Noto Sans"/>
               </a:rPr>
-              <a:t>HELMでの範囲と入手</a:t>
+              <a:t>公開配布と利用条件</a:t>
             </a:r>
           </a:p>
         </p:txBody>
@@ -17130,7 +16926,7 @@
                 <a:ea typeface="Noto Sans CJK JP"/>
                 <a:cs typeface="Noto Sans"/>
               </a:rPr>
-              <a:t>4. HELMでの範囲と入手</a:t>
+              <a:t>4. 公開配布と利用条件</a:t>
             </a:r>
           </a:p>
         </p:txBody>
@@ -17339,7 +17135,7 @@
                 <a:ea typeface="Noto Sans CJK JP"/>
                 <a:cs typeface="Noto Sans"/>
               </a:rPr>
-              <a:t>HELMでの範囲と入手</a:t>
+              <a:t>公開配布と利用条件</a:t>
             </a:r>
           </a:p>
         </p:txBody>
@@ -17388,313 +17184,6 @@
                 <a:cs typeface="Noto Sans"/>
               </a:rPr>
               <a:t>目次</a:t>
-            </a:r>
-          </a:p>
-        </p:txBody>
-      </p:sp>
-    </p:spTree>
-  </p:cSld>
-  <p:clrMapOvr>
-    <a:masterClrMapping/>
-  </p:clrMapOvr>
-</p:sld>
-</file>
-
-<file path=ppt/slides/slide30.xml><?xml version="1.0" encoding="utf-8"?>
-<p:sld xmlns:a="http://schemas.openxmlformats.org/drawingml/2006/main" xmlns:p="http://schemas.openxmlformats.org/presentationml/2006/main" xmlns:r="http://schemas.openxmlformats.org/officeDocument/2006/relationships">
-  <p:cSld>
-    <p:spTree>
-      <p:nvGrpSpPr>
-        <p:cNvPr id="1" name=""/>
-        <p:cNvGrpSpPr/>
-        <p:nvPr/>
-      </p:nvGrpSpPr>
-      <p:grpSpPr/>
-      <p:sp>
-        <p:nvSpPr>
-          <p:cNvPr id="2" name="Title 1"/>
-          <p:cNvSpPr>
-            <a:spLocks noGrp="1"/>
-          </p:cNvSpPr>
-          <p:nvPr>
-            <p:ph type="title"/>
-          </p:nvPr>
-        </p:nvSpPr>
-        <p:spPr>
-          <a:xfrm>
-            <a:off x="468172" y="650138"/>
-            <a:ext cx="8206740" cy="616305"/>
-          </a:xfrm>
-        </p:spPr>
-        <p:txBody>
-          <a:bodyPr wrap="square" lIns="0" rIns="0" tIns="0" bIns="0">
-            <a:noAutofit/>
-          </a:bodyPr>
-          <a:lstStyle/>
-          <a:p>
-            <a:pPr algn="l">
-              <a:lnSpc>
-                <a:spcPct val="110000"/>
-              </a:lnSpc>
-              <a:buNone/>
-              <a:defRPr sz="2800" b="0">
-                <a:solidFill>
-                  <a:srgbClr val="303437"/>
-                </a:solidFill>
-                <a:latin typeface="Noto Sans"/>
-              </a:defRPr>
-            </a:pPr>
-            <a:r>
-              <a:rPr sz="2800" b="1" lang="ja-JP" altLang="en-US">
-                <a:solidFill>
-                  <a:srgbClr val="303437"/>
-                </a:solidFill>
-                <a:latin typeface="Noto Sans"/>
-                <a:ea typeface="Noto Sans CJK JP"/>
-                <a:cs typeface="Noto Sans"/>
-              </a:rPr>
-              <a:t>HELMは英語の本文→要約を実装する</a:t>
-            </a:r>
-          </a:p>
-        </p:txBody>
-      </p:sp>
-      <p:sp>
-        <p:nvSpPr>
-          <p:cNvPr id="3" name="Text Placeholder 2"/>
-          <p:cNvSpPr>
-            <a:spLocks noGrp="1"/>
-          </p:cNvSpPr>
-          <p:nvPr>
-            <p:ph type="body" idx="1"/>
-          </p:nvPr>
-        </p:nvSpPr>
-        <p:spPr>
-          <a:xfrm>
-            <a:off x="594360" y="1463040"/>
-            <a:ext cx="7955279" cy="3044952"/>
-          </a:xfrm>
-        </p:spPr>
-        <p:txBody>
-          <a:bodyPr wrap="square" tIns="91440" bIns="91440">
-            <a:noAutofit/>
-          </a:bodyPr>
-          <a:lstStyle/>
-          <a:p>
-            <a:pPr marL="457200" indent="-355600">
-              <a:lnSpc>
-                <a:spcPts val="2558"/>
-              </a:lnSpc>
-              <a:spcAft>
-                <a:spcPts val="700"/>
-              </a:spcAft>
-              <a:buSzPct val="61860"/>
-              <a:buFont typeface="Noto Sans CJK JP"/>
-              <a:buChar char="●"/>
-              <a:defRPr sz="2150" b="0">
-                <a:solidFill>
-                  <a:srgbClr val="303437"/>
-                </a:solidFill>
-                <a:latin typeface="Noto Sans"/>
-              </a:defRPr>
-            </a:pPr>
-            <a:r>
-              <a:rPr sz="2150" b="0" lang="ja-JP" altLang="en-US">
-                <a:solidFill>
-                  <a:srgbClr val="303437"/>
-                </a:solidFill>
-                <a:latin typeface="Noto Sans"/>
-                <a:ea typeface="Noto Sans CJK JP"/>
-                <a:cs typeface="Noto Sans"/>
-              </a:rPr>
-              <a:t>HELM v0.4.0のLegalSummarizationScenarioは、EurLexSumのenglish設定を読み、reference欄を入力、summary欄を参照にする。</a:t>
-            </a:r>
-          </a:p>
-          <a:p>
-            <a:pPr marL="457200" indent="-355600">
-              <a:lnSpc>
-                <a:spcPts val="2558"/>
-              </a:lnSpc>
-              <a:spcAft>
-                <a:spcPts val="700"/>
-              </a:spcAft>
-              <a:buSzPct val="61860"/>
-              <a:buFont typeface="Noto Sans CJK JP"/>
-              <a:buChar char="●"/>
-              <a:defRPr sz="2150" b="0">
-                <a:solidFill>
-                  <a:srgbClr val="303437"/>
-                </a:solidFill>
-                <a:latin typeface="Noto Sans"/>
-              </a:defRPr>
-            </a:pPr>
-            <a:r>
-              <a:rPr sz="2150" b="0" lang="ja-JP" altLang="en-US">
-                <a:solidFill>
-                  <a:srgbClr val="303437"/>
-                </a:solidFill>
-                <a:latin typeface="Noto Sans"/>
-                <a:ea typeface="Noto Sans CJK JP"/>
-                <a:cs typeface="Noto Sans"/>
-              </a:rPr>
-              <a:t>改行を空白に直し、空白区切りで整形する。doc_max_lengthを指定した場合は、本文の先頭をその語数まで残す。</a:t>
-            </a:r>
-          </a:p>
-          <a:p>
-            <a:pPr marL="457200" indent="-355600">
-              <a:lnSpc>
-                <a:spcPts val="2558"/>
-              </a:lnSpc>
-              <a:spcAft>
-                <a:spcPts val="0"/>
-              </a:spcAft>
-              <a:buSzPct val="61860"/>
-              <a:buFont typeface="Noto Sans CJK JP"/>
-              <a:buChar char="●"/>
-              <a:defRPr sz="2150" b="0">
-                <a:solidFill>
-                  <a:srgbClr val="303437"/>
-                </a:solidFill>
-                <a:latin typeface="Noto Sans"/>
-              </a:defRPr>
-            </a:pPr>
-            <a:r>
-              <a:rPr sz="2150" b="0" lang="ja-JP" altLang="en-US">
-                <a:solidFill>
-                  <a:srgbClr val="303437"/>
-                </a:solidFill>
-                <a:latin typeface="Noto Sans"/>
-                <a:ea typeface="Noto Sans CJK JP"/>
-                <a:cs typeface="Noto Sans"/>
-              </a:rPr>
-              <a:t>同じデータで可能な24言語の評価と、HELMが実装している英語の範囲を対応させて読む。</a:t>
-            </a:r>
-          </a:p>
-        </p:txBody>
-      </p:sp>
-      <p:sp>
-        <p:nvSpPr>
-          <p:cNvPr id="4" name="Title 3"/>
-          <p:cNvSpPr>
-            <a:spLocks noGrp="1"/>
-          </p:cNvSpPr>
-          <p:nvPr>
-            <p:ph type="title" idx="2"/>
-          </p:nvPr>
-        </p:nvSpPr>
-        <p:spPr>
-          <a:xfrm>
-            <a:off x="75895" y="0"/>
-            <a:ext cx="8115300" cy="480060"/>
-          </a:xfrm>
-        </p:spPr>
-        <p:txBody>
-          <a:bodyPr wrap="square" lIns="0" rIns="0" tIns="0" bIns="0" anchor="ctr">
-            <a:noAutofit/>
-          </a:bodyPr>
-          <a:lstStyle/>
-          <a:p>
-            <a:pPr algn="l">
-              <a:lnSpc>
-                <a:spcPct val="110000"/>
-              </a:lnSpc>
-              <a:buNone/>
-              <a:defRPr sz="1400" b="0">
-                <a:solidFill>
-                  <a:srgbClr val="303437"/>
-                </a:solidFill>
-                <a:latin typeface="Noto Sans"/>
-              </a:defRPr>
-            </a:pPr>
-            <a:r>
-              <a:rPr sz="1400" b="1" lang="ja-JP" altLang="en-US">
-                <a:solidFill>
-                  <a:srgbClr val="FFFEF8"/>
-                </a:solidFill>
-                <a:latin typeface="Noto Sans"/>
-                <a:ea typeface="Noto Sans CJK JP"/>
-                <a:cs typeface="Noto Sans"/>
-              </a:rPr>
-              <a:t>4. HELMでの範囲と入手</a:t>
-            </a:r>
-          </a:p>
-        </p:txBody>
-      </p:sp>
-      <p:sp>
-        <p:nvSpPr>
-          <p:cNvPr id="5" name="sources"/>
-          <p:cNvSpPr txBox="1"/>
-          <p:nvPr/>
-        </p:nvSpPr>
-        <p:spPr>
-          <a:xfrm>
-            <a:off x="502920" y="4700016"/>
-            <a:ext cx="8183879" cy="530352"/>
-          </a:xfrm>
-          <a:prstGeom prst="rect">
-            <a:avLst/>
-          </a:prstGeom>
-          <a:noFill/>
-        </p:spPr>
-        <p:txBody>
-          <a:bodyPr wrap="square" lIns="0" rIns="0" tIns="0" bIns="0">
-            <a:noAutofit/>
-          </a:bodyPr>
-          <a:lstStyle/>
-          <a:p>
-            <a:pPr algn="l">
-              <a:lnSpc>
-                <a:spcPts val="940"/>
-              </a:lnSpc>
-              <a:spcBef>
-                <a:spcPts val="0"/>
-              </a:spcBef>
-              <a:spcAft>
-                <a:spcPts val="140"/>
-              </a:spcAft>
-              <a:buNone/>
-              <a:defRPr sz="810" b="0">
-                <a:solidFill>
-                  <a:srgbClr val="303437"/>
-                </a:solidFill>
-                <a:latin typeface="Noto Sans"/>
-              </a:defRPr>
-            </a:pPr>
-            <a:r>
-              <a:rPr sz="810" b="0" lang="ja-JP" altLang="en-US">
-                <a:solidFill>
-                  <a:srgbClr val="626669"/>
-                </a:solidFill>
-                <a:latin typeface="Noto Sans"/>
-                <a:ea typeface="Noto Sans CJK JP"/>
-                <a:cs typeface="Noto Sans"/>
-              </a:rPr>
-              <a:t>[1] Stanford CRFM, HELM v0.4.0. LegalSummarizationScenario.</a:t>
-            </a:r>
-          </a:p>
-          <a:p>
-            <a:pPr>
-              <a:lnSpc>
-                <a:spcPts val="940"/>
-              </a:lnSpc>
-              <a:buNone/>
-              <a:defRPr sz="810" b="0">
-                <a:solidFill>
-                  <a:srgbClr val="303437"/>
-                </a:solidFill>
-                <a:latin typeface="Noto Sans"/>
-              </a:defRPr>
-            </a:pPr>
-            <a:r>
-              <a:rPr sz="810" b="0" lang="ja-JP" altLang="en-US">
-                <a:solidFill>
-                  <a:srgbClr val="626669"/>
-                </a:solidFill>
-                <a:latin typeface="Noto Sans"/>
-                <a:ea typeface="Noto Sans CJK JP"/>
-                <a:cs typeface="Noto Sans"/>
-                <a:hlinkClick r:id="rId2"/>
-              </a:rPr>
-              <a:t>https://github.com/stanford-crfm/helm/blob/v0.4.0/src/helm/benchmark/scenarios/legal_summarization_scenario.py</a:t>
             </a:r>
           </a:p>
         </p:txBody>
@@ -17760,7 +17249,7 @@
                 <a:ea typeface="Noto Sans CJK JP"/>
                 <a:cs typeface="Noto Sans"/>
               </a:rPr>
-              <a:t>固定Classic版に、公開実行はなかった</a:t>
+              <a:t>言語ごとのJSONLから、本文と要約を入手する</a:t>
             </a:r>
           </a:p>
         </p:txBody>
@@ -17789,91 +17278,91 @@
           <a:p>
             <a:pPr marL="457200" indent="-355600">
               <a:lnSpc>
-                <a:spcPts val="2618"/>
+                <a:spcPts val="2558"/>
               </a:lnSpc>
               <a:spcAft>
                 <a:spcPts val="700"/>
               </a:spcAft>
-              <a:buSzPct val="60455"/>
+              <a:buSzPct val="61860"/>
               <a:buFont typeface="Noto Sans CJK JP"/>
               <a:buChar char="●"/>
-              <a:defRPr sz="2200" b="0">
-                <a:solidFill>
-                  <a:srgbClr val="303437"/>
-                </a:solidFill>
-                <a:latin typeface="Noto Sans"/>
-              </a:defRPr>
-            </a:pPr>
-            <a:r>
-              <a:rPr sz="2200" b="0" lang="ja-JP" altLang="en-US">
-                <a:solidFill>
-                  <a:srgbClr val="303437"/>
-                </a:solidFill>
-                <a:latin typeface="Noto Sans"/>
-                <a:ea typeface="Noto Sans CJK JP"/>
-                <a:cs typeface="Noto Sans"/>
-              </a:rPr>
-              <a:t>Classic v0.4.0の公開run_specs全8,526件を、データ名とシナリオ指定から照合したところ、EurLexSumの実行は0件だった。</a:t>
+              <a:defRPr sz="2150" b="0">
+                <a:solidFill>
+                  <a:srgbClr val="303437"/>
+                </a:solidFill>
+                <a:latin typeface="Noto Sans"/>
+              </a:defRPr>
+            </a:pPr>
+            <a:r>
+              <a:rPr sz="2150" b="0" lang="ja-JP" altLang="en-US">
+                <a:solidFill>
+                  <a:srgbClr val="303437"/>
+                </a:solidFill>
+                <a:latin typeface="Noto Sans"/>
+                <a:ea typeface="Noto Sans CJK JP"/>
+                <a:cs typeface="Noto Sans"/>
+              </a:rPr>
+              <a:t>Hugging Faceに言語別のtrain・validation・testを公開。各行はcelex_id、reference、summaryを持つ。</a:t>
             </a:r>
           </a:p>
           <a:p>
             <a:pPr marL="457200" indent="-355600">
               <a:lnSpc>
-                <a:spcPts val="2618"/>
+                <a:spcPts val="2558"/>
               </a:lnSpc>
               <a:spcAft>
                 <a:spcPts val="700"/>
               </a:spcAft>
-              <a:buSzPct val="60455"/>
+              <a:buSzPct val="61860"/>
               <a:buFont typeface="Noto Sans CJK JP"/>
               <a:buChar char="●"/>
-              <a:defRPr sz="2200" b="0">
-                <a:solidFill>
-                  <a:srgbClr val="303437"/>
-                </a:solidFill>
-                <a:latin typeface="Noto Sans"/>
-              </a:defRPr>
-            </a:pPr>
-            <a:r>
-              <a:rPr sz="2200" b="0" lang="ja-JP" altLang="en-US">
-                <a:solidFill>
-                  <a:srgbClr val="303437"/>
-                </a:solidFill>
-                <a:latin typeface="Noto Sans"/>
-                <a:ea typeface="Noto Sans CJK JP"/>
-                <a:cs typeface="Noto Sans"/>
-              </a:rPr>
-              <a:t>この資料のモデル値は2022年の研究で報告されたbaseline。HELMで再実行した値としては扱わない。</a:t>
+              <a:defRPr sz="2150" b="0">
+                <a:solidFill>
+                  <a:srgbClr val="303437"/>
+                </a:solidFill>
+                <a:latin typeface="Noto Sans"/>
+              </a:defRPr>
+            </a:pPr>
+            <a:r>
+              <a:rPr sz="2150" b="0" lang="ja-JP" altLang="en-US">
+                <a:solidFill>
+                  <a:srgbClr val="303437"/>
+                </a:solidFill>
+                <a:latin typeface="Noto Sans"/>
+                <a:ea typeface="Noto Sans CJK JP"/>
+                <a:cs typeface="Noto Sans"/>
+              </a:rPr>
+              <a:t>referenceは法令本文、summaryは人手要約、celex_idは同じ法令を言語間で結ぶ識別子である。</a:t>
             </a:r>
           </a:p>
           <a:p>
             <a:pPr marL="457200" indent="-355600">
               <a:lnSpc>
-                <a:spcPts val="2618"/>
-              </a:lnSpc>
-              <a:spcAft>
-                <a:spcPts val="0"/>
-              </a:spcAft>
-              <a:buSzPct val="60455"/>
+                <a:spcPts val="2558"/>
+              </a:lnSpc>
+              <a:spcAft>
+                <a:spcPts val="0"/>
+              </a:spcAft>
+              <a:buSzPct val="61860"/>
               <a:buFont typeface="Noto Sans CJK JP"/>
               <a:buChar char="●"/>
-              <a:defRPr sz="2200" b="0">
-                <a:solidFill>
-                  <a:srgbClr val="303437"/>
-                </a:solidFill>
-                <a:latin typeface="Noto Sans"/>
-              </a:defRPr>
-            </a:pPr>
-            <a:r>
-              <a:rPr sz="2200" b="0" lang="ja-JP" altLang="en-US">
-                <a:solidFill>
-                  <a:srgbClr val="303437"/>
-                </a:solidFill>
-                <a:latin typeface="Noto Sans"/>
-                <a:ea typeface="Noto Sans CJK JP"/>
-                <a:cs typeface="Noto Sans"/>
-              </a:rPr>
-              <a:t>実装を利用するときは、本文の最大長、学習例の長さによる選別、出力長を設定とともに残す。</a:t>
+              <a:defRPr sz="2150" b="0">
+                <a:solidFill>
+                  <a:srgbClr val="303437"/>
+                </a:solidFill>
+                <a:latin typeface="Noto Sans"/>
+              </a:defRPr>
+            </a:pPr>
+            <a:r>
+              <a:rPr sz="2150" b="0" lang="ja-JP" altLang="en-US">
+                <a:solidFill>
+                  <a:srgbClr val="303437"/>
+                </a:solidFill>
+                <a:latin typeface="Noto Sans"/>
+                <a:ea typeface="Noto Sans CJK JP"/>
+                <a:cs typeface="Noto Sans"/>
+              </a:rPr>
+              <a:t>公式GitHubでは、収集・分析・要約モデルのコードも公開している。</a:t>
             </a:r>
           </a:p>
         </p:txBody>
@@ -17921,7 +17410,7 @@
                 <a:ea typeface="Noto Sans CJK JP"/>
                 <a:cs typeface="Noto Sans"/>
               </a:rPr>
-              <a:t>4. HELMでの範囲と入手</a:t>
+              <a:t>4. 公開配布と利用条件</a:t>
             </a:r>
           </a:p>
         </p:txBody>
@@ -17975,7 +17464,7 @@
                 <a:ea typeface="Noto Sans CJK JP"/>
                 <a:cs typeface="Noto Sans"/>
               </a:rPr>
-              <a:t>[1] HELM Classic v0.4.0、2023-11-17固定版。公開run_specs全8,526件を検索。</a:t>
+              <a:t>[1] Aumiller et al. EUR-Lex-Sum. </a:t>
             </a:r>
             <a:r>
               <a:rPr sz="810" b="0" lang="ja-JP" altLang="en-US">
@@ -17985,20 +17474,9 @@
                 <a:latin typeface="Noto Sans"/>
                 <a:ea typeface="Noto Sans CJK JP"/>
                 <a:cs typeface="Noto Sans"/>
-              </a:rPr>
-              <a:t>  </a:t>
-            </a:r>
-            <a:r>
-              <a:rPr sz="810" b="0" lang="ja-JP" altLang="en-US">
-                <a:solidFill>
-                  <a:srgbClr val="626669"/>
-                </a:solidFill>
-                <a:latin typeface="Noto Sans"/>
-                <a:ea typeface="Noto Sans CJK JP"/>
-                <a:cs typeface="Noto Sans"/>
                 <a:hlinkClick r:id="rId2"/>
               </a:rPr>
-              <a:t>https://crfm.stanford.edu/helm/classic/v0.4.0/</a:t>
+              <a:t>https://huggingface.co/datasets/dennlinger/eur-lex-sum</a:t>
             </a:r>
           </a:p>
         </p:txBody>
@@ -18064,7 +17542,7 @@
                 <a:ea typeface="Noto Sans CJK JP"/>
                 <a:cs typeface="Noto Sans"/>
               </a:rPr>
-              <a:t>現在は、固定したJSONLを直接取得できる</a:t>
+              <a:t>公式READMEに、データとコードの利用条件</a:t>
             </a:r>
           </a:p>
         </p:txBody>
@@ -18117,7 +17595,7 @@
                 <a:ea typeface="Noto Sans CJK JP"/>
                 <a:cs typeface="Noto Sans"/>
               </a:rPr>
-              <a:t>Hugging Faceに言語別のtrain・validation・testを公開。各行はcelex_id、reference、summaryを持つ。</a:t>
+              <a:t>現在の公式READMEは、データをCC BY 4.0、ソフトウェアをMITで案内している。</a:t>
             </a:r>
           </a:p>
           <a:p>
@@ -18147,7 +17625,7 @@
                 <a:ea typeface="Noto Sans CJK JP"/>
                 <a:cs typeface="Noto Sans"/>
               </a:rPr>
-              <a:t>今回の実例と集計は、配布revision 33ecb2dを固定して取得した。13例の原行と抜粋位置、原文・訳を記録している。</a:t>
+              <a:t>Hugging Faceの先頭メタデータはCC BY 4.0だが、カード本文はCC BY-SA、旧ローダーはCC BY-NC-SAと表記が異なる。</a:t>
             </a:r>
           </a:p>
           <a:p>
@@ -18177,7 +17655,7 @@
                 <a:ea typeface="Noto Sans CJK JP"/>
                 <a:cs typeface="Noto Sans"/>
               </a:rPr>
-              <a:t>公式GitHubは収集・分析・baselineコードを公開し、2024年まで依存関係の更新が確認できた。</a:t>
+              <a:t>利用する配布版の表記と、公式README・EUR-Lexの利用条件を合わせて確認する。</a:t>
             </a:r>
           </a:p>
         </p:txBody>
@@ -18225,7 +17703,7 @@
                 <a:ea typeface="Noto Sans CJK JP"/>
                 <a:cs typeface="Noto Sans"/>
               </a:rPr>
-              <a:t>4. HELMでの範囲と入手</a:t>
+              <a:t>4. 公開配布と利用条件</a:t>
             </a:r>
           </a:p>
         </p:txBody>
@@ -18279,7 +17757,7 @@
                 <a:ea typeface="Noto Sans CJK JP"/>
                 <a:cs typeface="Noto Sans"/>
               </a:rPr>
-              <a:t>[1] Aumiller et al., EUR-Lex-Sum. 固定HF revision 33ecb2d、test実レコード。</a:t>
+              <a:t>[1] Aumiller et al., EUR-Lex-Sum. 公式コード・データ・baseline。</a:t>
             </a:r>
             <a:r>
               <a:rPr sz="810" b="0" lang="ja-JP" altLang="en-US">
@@ -18302,7 +17780,7 @@
                 <a:cs typeface="Noto Sans"/>
                 <a:hlinkClick r:id="rId2"/>
               </a:rPr>
-              <a:t>https://huggingface.co/datasets/dennlinger/eur-lex-sum</a:t>
+              <a:t>https://github.com/achouhan93/eur-lex-sum</a:t>
             </a:r>
           </a:p>
         </p:txBody>
@@ -18368,7 +17846,7 @@
                 <a:ea typeface="Noto Sans CJK JP"/>
                 <a:cs typeface="Noto Sans"/>
               </a:rPr>
-              <a:t>データとコードの利用条件を分けて読む</a:t>
+              <a:t>長さ・言語・参照の作り方が評価を決める</a:t>
             </a:r>
           </a:p>
         </p:txBody>
@@ -18397,91 +17875,91 @@
           <a:p>
             <a:pPr marL="457200" indent="-355600">
               <a:lnSpc>
-                <a:spcPts val="2558"/>
+                <a:spcPts val="2618"/>
               </a:lnSpc>
               <a:spcAft>
                 <a:spcPts val="700"/>
               </a:spcAft>
-              <a:buSzPct val="61860"/>
+              <a:buSzPct val="60455"/>
               <a:buFont typeface="Noto Sans CJK JP"/>
               <a:buChar char="●"/>
-              <a:defRPr sz="2150" b="0">
-                <a:solidFill>
-                  <a:srgbClr val="303437"/>
-                </a:solidFill>
-                <a:latin typeface="Noto Sans"/>
-              </a:defRPr>
-            </a:pPr>
-            <a:r>
-              <a:rPr sz="2150" b="0" lang="ja-JP" altLang="en-US">
-                <a:solidFill>
-                  <a:srgbClr val="303437"/>
-                </a:solidFill>
-                <a:latin typeface="Noto Sans"/>
-                <a:ea typeface="Noto Sans CJK JP"/>
-                <a:cs typeface="Noto Sans"/>
-              </a:rPr>
-              <a:t>現在の公式READMEは、データをCC BY 4.0、ソフトウェアをMITと記載する。EUR-Lexの現行利用条件も確認した。</a:t>
+              <a:defRPr sz="2200" b="0">
+                <a:solidFill>
+                  <a:srgbClr val="303437"/>
+                </a:solidFill>
+                <a:latin typeface="Noto Sans"/>
+              </a:defRPr>
+            </a:pPr>
+            <a:r>
+              <a:rPr sz="2200" b="0" lang="ja-JP" altLang="en-US">
+                <a:solidFill>
+                  <a:srgbClr val="303437"/>
+                </a:solidFill>
+                <a:latin typeface="Noto Sans"/>
+                <a:ea typeface="Noto Sans CJK JP"/>
+                <a:cs typeface="Noto Sans"/>
+              </a:rPr>
+              <a:t>EU法令と専門家の要約を、最大24言語で同じIDへ対応付けたデータセット。</a:t>
             </a:r>
           </a:p>
           <a:p>
             <a:pPr marL="457200" indent="-355600">
               <a:lnSpc>
-                <a:spcPts val="2558"/>
+                <a:spcPts val="2618"/>
               </a:lnSpc>
               <a:spcAft>
                 <a:spcPts val="700"/>
               </a:spcAft>
-              <a:buSzPct val="61860"/>
+              <a:buSzPct val="60455"/>
               <a:buFont typeface="Noto Sans CJK JP"/>
               <a:buChar char="●"/>
-              <a:defRPr sz="2150" b="0">
-                <a:solidFill>
-                  <a:srgbClr val="303437"/>
-                </a:solidFill>
-                <a:latin typeface="Noto Sans"/>
-              </a:defRPr>
-            </a:pPr>
-            <a:r>
-              <a:rPr sz="2150" b="0" lang="ja-JP" altLang="en-US">
-                <a:solidFill>
-                  <a:srgbClr val="303437"/>
-                </a:solidFill>
-                <a:latin typeface="Noto Sans"/>
-                <a:ea typeface="Noto Sans CJK JP"/>
-                <a:cs typeface="Noto Sans"/>
-              </a:rPr>
-              <a:t>Hugging Faceの先頭メタデータはCC BY 4.0だが、カード本文はCC BY-SA、旧ローダーはCC BY-NC-SAと表記が異なる。</a:t>
+              <a:defRPr sz="2200" b="0">
+                <a:solidFill>
+                  <a:srgbClr val="303437"/>
+                </a:solidFill>
+                <a:latin typeface="Noto Sans"/>
+              </a:defRPr>
+            </a:pPr>
+            <a:r>
+              <a:rPr sz="2200" b="0" lang="ja-JP" altLang="en-US">
+                <a:solidFill>
+                  <a:srgbClr val="303437"/>
+                </a:solidFill>
+                <a:latin typeface="Noto Sans"/>
+                <a:ea typeface="Noto Sans CJK JP"/>
+                <a:cs typeface="Noto Sans"/>
+              </a:rPr>
+              <a:t>学習量が少ない言語でも共通の評価対象を持ち、長い本文から長い要約を作る課題を比較できる。</a:t>
             </a:r>
           </a:p>
           <a:p>
             <a:pPr marL="457200" indent="-355600">
               <a:lnSpc>
-                <a:spcPts val="2558"/>
-              </a:lnSpc>
-              <a:spcAft>
-                <a:spcPts val="0"/>
-              </a:spcAft>
-              <a:buSzPct val="61860"/>
+                <a:spcPts val="2618"/>
+              </a:lnSpc>
+              <a:spcAft>
+                <a:spcPts val="0"/>
+              </a:spcAft>
+              <a:buSzPct val="60455"/>
               <a:buFont typeface="Noto Sans CJK JP"/>
               <a:buChar char="●"/>
-              <a:defRPr sz="2150" b="0">
-                <a:solidFill>
-                  <a:srgbClr val="303437"/>
-                </a:solidFill>
-                <a:latin typeface="Noto Sans"/>
-              </a:defRPr>
-            </a:pPr>
-            <a:r>
-              <a:rPr sz="2150" b="0" lang="ja-JP" altLang="en-US">
-                <a:solidFill>
-                  <a:srgbClr val="303437"/>
-                </a:solidFill>
-                <a:latin typeface="Noto Sans"/>
-                <a:ea typeface="Noto Sans CJK JP"/>
-                <a:cs typeface="Noto Sans"/>
-              </a:rPr>
-              <a:t>利用時点の公式READMEと元のEUR-Lexの条件、取得した版の表記を合わせて確認する。</a:t>
+              <a:defRPr sz="2200" b="0">
+                <a:solidFill>
+                  <a:srgbClr val="303437"/>
+                </a:solidFill>
+                <a:latin typeface="Noto Sans"/>
+              </a:defRPr>
+            </a:pPr>
+            <a:r>
+              <a:rPr sz="2200" b="0" lang="ja-JP" altLang="en-US">
+                <a:solidFill>
+                  <a:srgbClr val="303437"/>
+                </a:solidFill>
+                <a:latin typeface="Noto Sans"/>
+                <a:ea typeface="Noto Sans CJK JP"/>
+                <a:cs typeface="Noto Sans"/>
+              </a:rPr>
+              <a:t>同じ言語での要約に加え、英語で要約してから別言語へ翻訳する方法も評価されている。</a:t>
             </a:r>
           </a:p>
         </p:txBody>
@@ -18529,7 +18007,7 @@
                 <a:ea typeface="Noto Sans CJK JP"/>
                 <a:cs typeface="Noto Sans"/>
               </a:rPr>
-              <a:t>4. HELMでの範囲と入手</a:t>
+              <a:t>4. 公開配布と利用条件</a:t>
             </a:r>
           </a:p>
         </p:txBody>
@@ -18583,8 +18061,22 @@
                 <a:ea typeface="Noto Sans CJK JP"/>
                 <a:cs typeface="Noto Sans"/>
               </a:rPr>
-              <a:t>[1] Aumiller et al., EUR-Lex-Sum. 公式コード・データ・baseline。</a:t>
-            </a:r>
+              <a:t>[1] Aumiller, Chouhan &amp; Gertz (2022), EUR-Lex-Sum: A Multi- and Cross-lingual Dataset for Long-form Summarization in the Legal Domain. EMNLP.</a:t>
+            </a:r>
+          </a:p>
+          <a:p>
+            <a:pPr>
+              <a:lnSpc>
+                <a:spcPts val="940"/>
+              </a:lnSpc>
+              <a:buNone/>
+              <a:defRPr sz="810" b="0">
+                <a:solidFill>
+                  <a:srgbClr val="303437"/>
+                </a:solidFill>
+                <a:latin typeface="Noto Sans"/>
+              </a:defRPr>
+            </a:pPr>
             <a:r>
               <a:rPr sz="810" b="0" lang="ja-JP" altLang="en-US">
                 <a:solidFill>
@@ -18593,20 +18085,9 @@
                 <a:latin typeface="Noto Sans"/>
                 <a:ea typeface="Noto Sans CJK JP"/>
                 <a:cs typeface="Noto Sans"/>
-              </a:rPr>
-              <a:t>  </a:t>
-            </a:r>
-            <a:r>
-              <a:rPr sz="810" b="0" lang="ja-JP" altLang="en-US">
-                <a:solidFill>
-                  <a:srgbClr val="626669"/>
-                </a:solidFill>
-                <a:latin typeface="Noto Sans"/>
-                <a:ea typeface="Noto Sans CJK JP"/>
-                <a:cs typeface="Noto Sans"/>
                 <a:hlinkClick r:id="rId2"/>
               </a:rPr>
-              <a:t>https://github.com/achouhan93/eur-lex-sum</a:t>
+              <a:t>https://aclanthology.org/2022.emnlp-main.519/</a:t>
             </a:r>
           </a:p>
         </p:txBody>
@@ -18641,158 +18122,45 @@
         </p:nvSpPr>
         <p:spPr>
           <a:xfrm>
-            <a:off x="468172" y="650138"/>
-            <a:ext cx="8206740" cy="616305"/>
+            <a:off x="548640" y="2484835"/>
+            <a:ext cx="8046720" cy="585216"/>
           </a:xfrm>
         </p:spPr>
         <p:txBody>
-          <a:bodyPr wrap="square" lIns="0" rIns="0" tIns="0" bIns="0">
+          <a:bodyPr wrap="square" lIns="0" rIns="0" tIns="0" bIns="0" anchor="ctr">
             <a:noAutofit/>
           </a:bodyPr>
           <a:lstStyle/>
           <a:p>
-            <a:pPr algn="l">
+            <a:pPr algn="ctr">
               <a:lnSpc>
                 <a:spcPct val="110000"/>
               </a:lnSpc>
               <a:buNone/>
-              <a:defRPr sz="2800" b="0">
-                <a:solidFill>
-                  <a:srgbClr val="303437"/>
-                </a:solidFill>
-                <a:latin typeface="Noto Sans"/>
-              </a:defRPr>
-            </a:pPr>
-            <a:r>
-              <a:rPr sz="2800" b="1" lang="ja-JP" altLang="en-US">
-                <a:solidFill>
-                  <a:srgbClr val="303437"/>
-                </a:solidFill>
-                <a:latin typeface="Noto Sans"/>
-                <a:ea typeface="Noto Sans CJK JP"/>
-                <a:cs typeface="Noto Sans"/>
-              </a:rPr>
-              <a:t>長さ・言語・参照の作り方が評価を決める</a:t>
+              <a:defRPr sz="3600" b="0">
+                <a:solidFill>
+                  <a:srgbClr val="303437"/>
+                </a:solidFill>
+                <a:latin typeface="Noto Sans"/>
+              </a:defRPr>
+            </a:pPr>
+            <a:r>
+              <a:rPr sz="3600" b="1" lang="ja-JP" altLang="en-US">
+                <a:solidFill>
+                  <a:srgbClr val="303437"/>
+                </a:solidFill>
+                <a:latin typeface="Noto Sans"/>
+                <a:ea typeface="Noto Sans CJK JP"/>
+                <a:cs typeface="Noto Sans"/>
+              </a:rPr>
+              <a:t>Appendix</a:t>
             </a:r>
           </a:p>
         </p:txBody>
       </p:sp>
       <p:sp>
         <p:nvSpPr>
-          <p:cNvPr id="3" name="Text Placeholder 2"/>
-          <p:cNvSpPr>
-            <a:spLocks noGrp="1"/>
-          </p:cNvSpPr>
-          <p:nvPr>
-            <p:ph type="body" idx="1"/>
-          </p:nvPr>
-        </p:nvSpPr>
-        <p:spPr>
-          <a:xfrm>
-            <a:off x="594360" y="1463040"/>
-            <a:ext cx="7955279" cy="3044952"/>
-          </a:xfrm>
-        </p:spPr>
-        <p:txBody>
-          <a:bodyPr wrap="square" tIns="91440" bIns="91440">
-            <a:noAutofit/>
-          </a:bodyPr>
-          <a:lstStyle/>
-          <a:p>
-            <a:pPr marL="457200" indent="-355600">
-              <a:lnSpc>
-                <a:spcPts val="2618"/>
-              </a:lnSpc>
-              <a:spcAft>
-                <a:spcPts val="700"/>
-              </a:spcAft>
-              <a:buSzPct val="60455"/>
-              <a:buFont typeface="Noto Sans CJK JP"/>
-              <a:buChar char="●"/>
-              <a:defRPr sz="2200" b="0">
-                <a:solidFill>
-                  <a:srgbClr val="303437"/>
-                </a:solidFill>
-                <a:latin typeface="Noto Sans"/>
-              </a:defRPr>
-            </a:pPr>
-            <a:r>
-              <a:rPr sz="2200" b="0" lang="ja-JP" altLang="en-US">
-                <a:solidFill>
-                  <a:srgbClr val="303437"/>
-                </a:solidFill>
-                <a:latin typeface="Noto Sans"/>
-                <a:ea typeface="Noto Sans CJK JP"/>
-                <a:cs typeface="Noto Sans"/>
-              </a:rPr>
-              <a:t>EU法令の専門家による説明を、最大24言語で同じIDへ対応させることが、このデータの特徴。</a:t>
-            </a:r>
-          </a:p>
-          <a:p>
-            <a:pPr marL="457200" indent="-355600">
-              <a:lnSpc>
-                <a:spcPts val="2618"/>
-              </a:lnSpc>
-              <a:spcAft>
-                <a:spcPts val="700"/>
-              </a:spcAft>
-              <a:buSzPct val="60455"/>
-              <a:buFont typeface="Noto Sans CJK JP"/>
-              <a:buChar char="●"/>
-              <a:defRPr sz="2200" b="0">
-                <a:solidFill>
-                  <a:srgbClr val="303437"/>
-                </a:solidFill>
-                <a:latin typeface="Noto Sans"/>
-              </a:defRPr>
-            </a:pPr>
-            <a:r>
-              <a:rPr sz="2200" b="0" lang="ja-JP" altLang="en-US">
-                <a:solidFill>
-                  <a:srgbClr val="303437"/>
-                </a:solidFill>
-                <a:latin typeface="Noto Sans"/>
-                <a:ea typeface="Noto Sans CJK JP"/>
-                <a:cs typeface="Noto Sans"/>
-              </a:rPr>
-              <a:t>学習量が少ない言語でも共通の評価対象を持ち、長い本文から長い要約を作る課題を比較できる。</a:t>
-            </a:r>
-          </a:p>
-          <a:p>
-            <a:pPr marL="457200" indent="-355600">
-              <a:lnSpc>
-                <a:spcPts val="2618"/>
-              </a:lnSpc>
-              <a:spcAft>
-                <a:spcPts val="0"/>
-              </a:spcAft>
-              <a:buSzPct val="60455"/>
-              <a:buFont typeface="Noto Sans CJK JP"/>
-              <a:buChar char="●"/>
-              <a:defRPr sz="2200" b="0">
-                <a:solidFill>
-                  <a:srgbClr val="303437"/>
-                </a:solidFill>
-                <a:latin typeface="Noto Sans"/>
-              </a:defRPr>
-            </a:pPr>
-            <a:r>
-              <a:rPr sz="2200" b="0" lang="ja-JP" altLang="en-US">
-                <a:solidFill>
-                  <a:srgbClr val="303437"/>
-                </a:solidFill>
-                <a:latin typeface="Noto Sans"/>
-                <a:ea typeface="Noto Sans CJK JP"/>
-                <a:cs typeface="Noto Sans"/>
-              </a:rPr>
-              <a:t>入力に残した法令、出力の言語、本文の分割・切り詰めをそろえ、同じ条件の結果を比べる。</a:t>
-            </a:r>
-          </a:p>
-        </p:txBody>
-      </p:sp>
-      <p:sp>
-        <p:nvSpPr>
-          <p:cNvPr id="4" name="Title 3"/>
+          <p:cNvPr id="3" name="Title 2"/>
           <p:cNvSpPr>
             <a:spLocks noGrp="1"/>
           </p:cNvSpPr>
@@ -18833,87 +18201,7 @@
                 <a:ea typeface="Noto Sans CJK JP"/>
                 <a:cs typeface="Noto Sans"/>
               </a:rPr>
-              <a:t>4. HELMでの範囲と入手</a:t>
-            </a:r>
-          </a:p>
-        </p:txBody>
-      </p:sp>
-      <p:sp>
-        <p:nvSpPr>
-          <p:cNvPr id="5" name="sources"/>
-          <p:cNvSpPr txBox="1"/>
-          <p:nvPr/>
-        </p:nvSpPr>
-        <p:spPr>
-          <a:xfrm>
-            <a:off x="502920" y="4700016"/>
-            <a:ext cx="8183879" cy="530352"/>
-          </a:xfrm>
-          <a:prstGeom prst="rect">
-            <a:avLst/>
-          </a:prstGeom>
-          <a:noFill/>
-        </p:spPr>
-        <p:txBody>
-          <a:bodyPr wrap="square" lIns="0" rIns="0" tIns="0" bIns="0">
-            <a:noAutofit/>
-          </a:bodyPr>
-          <a:lstStyle/>
-          <a:p>
-            <a:pPr algn="l">
-              <a:lnSpc>
-                <a:spcPts val="940"/>
-              </a:lnSpc>
-              <a:spcBef>
-                <a:spcPts val="0"/>
-              </a:spcBef>
-              <a:spcAft>
-                <a:spcPts val="140"/>
-              </a:spcAft>
-              <a:buNone/>
-              <a:defRPr sz="810" b="0">
-                <a:solidFill>
-                  <a:srgbClr val="303437"/>
-                </a:solidFill>
-                <a:latin typeface="Noto Sans"/>
-              </a:defRPr>
-            </a:pPr>
-            <a:r>
-              <a:rPr sz="810" b="0" lang="ja-JP" altLang="en-US">
-                <a:solidFill>
-                  <a:srgbClr val="626669"/>
-                </a:solidFill>
-                <a:latin typeface="Noto Sans"/>
-                <a:ea typeface="Noto Sans CJK JP"/>
-                <a:cs typeface="Noto Sans"/>
-              </a:rPr>
-              <a:t>[1] Aumiller, Chouhan &amp; Gertz (2022), EUR-Lex-Sum: A Multi- and Cross-lingual Dataset for Long-form Summarization in the Legal Domain. EMNLP.</a:t>
-            </a:r>
-          </a:p>
-          <a:p>
-            <a:pPr>
-              <a:lnSpc>
-                <a:spcPts val="940"/>
-              </a:lnSpc>
-              <a:buNone/>
-              <a:defRPr sz="810" b="0">
-                <a:solidFill>
-                  <a:srgbClr val="303437"/>
-                </a:solidFill>
-                <a:latin typeface="Noto Sans"/>
-              </a:defRPr>
-            </a:pPr>
-            <a:r>
-              <a:rPr sz="810" b="0" lang="ja-JP" altLang="en-US">
-                <a:solidFill>
-                  <a:srgbClr val="626669"/>
-                </a:solidFill>
-                <a:latin typeface="Noto Sans"/>
-                <a:ea typeface="Noto Sans CJK JP"/>
-                <a:cs typeface="Noto Sans"/>
-                <a:hlinkClick r:id="rId2"/>
-              </a:rPr>
-              <a:t>https://aclanthology.org/2022.emnlp-main.519/</a:t>
+              <a:t>Appendix</a:t>
             </a:r>
           </a:p>
         </p:txBody>
@@ -18948,45 +18236,158 @@
         </p:nvSpPr>
         <p:spPr>
           <a:xfrm>
-            <a:off x="548640" y="2484835"/>
-            <a:ext cx="8046720" cy="585216"/>
+            <a:off x="468172" y="650138"/>
+            <a:ext cx="8206740" cy="616305"/>
           </a:xfrm>
         </p:spPr>
         <p:txBody>
-          <a:bodyPr wrap="square" lIns="0" rIns="0" tIns="0" bIns="0" anchor="ctr">
+          <a:bodyPr wrap="square" lIns="0" rIns="0" tIns="0" bIns="0">
             <a:noAutofit/>
           </a:bodyPr>
           <a:lstStyle/>
           <a:p>
-            <a:pPr algn="ctr">
+            <a:pPr algn="l">
               <a:lnSpc>
                 <a:spcPct val="110000"/>
               </a:lnSpc>
               <a:buNone/>
-              <a:defRPr sz="3600" b="0">
-                <a:solidFill>
-                  <a:srgbClr val="303437"/>
-                </a:solidFill>
-                <a:latin typeface="Noto Sans"/>
-              </a:defRPr>
-            </a:pPr>
-            <a:r>
-              <a:rPr sz="3600" b="1" lang="ja-JP" altLang="en-US">
-                <a:solidFill>
-                  <a:srgbClr val="303437"/>
-                </a:solidFill>
-                <a:latin typeface="Noto Sans"/>
-                <a:ea typeface="Noto Sans CJK JP"/>
-                <a:cs typeface="Noto Sans"/>
-              </a:rPr>
-              <a:t>Appendix</a:t>
+              <a:defRPr sz="2800" b="0">
+                <a:solidFill>
+                  <a:srgbClr val="303437"/>
+                </a:solidFill>
+                <a:latin typeface="Noto Sans"/>
+              </a:defRPr>
+            </a:pPr>
+            <a:r>
+              <a:rPr sz="2800" b="1" lang="ja-JP" altLang="en-US">
+                <a:solidFill>
+                  <a:srgbClr val="303437"/>
+                </a:solidFill>
+                <a:latin typeface="Noto Sans"/>
+                <a:ea typeface="Noto Sans CJK JP"/>
+                <a:cs typeface="Noto Sans"/>
+              </a:rPr>
+              <a:t/>
             </a:r>
           </a:p>
         </p:txBody>
       </p:sp>
       <p:sp>
         <p:nvSpPr>
-          <p:cNvPr id="3" name="Title 2"/>
+          <p:cNvPr id="3" name="Text Placeholder 2"/>
+          <p:cNvSpPr>
+            <a:spLocks noGrp="1"/>
+          </p:cNvSpPr>
+          <p:nvPr>
+            <p:ph type="body" idx="1"/>
+          </p:nvPr>
+        </p:nvSpPr>
+        <p:spPr>
+          <a:xfrm>
+            <a:off x="640080" y="1972511"/>
+            <a:ext cx="7863840" cy="1744980"/>
+          </a:xfrm>
+        </p:spPr>
+        <p:txBody>
+          <a:bodyPr lIns="0" rIns="0" tIns="0" bIns="0">
+            <a:noAutofit/>
+          </a:bodyPr>
+          <a:lstStyle/>
+          <a:p>
+            <a:pPr marL="457200" indent="-457200">
+              <a:lnSpc>
+                <a:spcPts val="3660"/>
+              </a:lnSpc>
+              <a:spcAft>
+                <a:spcPts val="1200"/>
+              </a:spcAft>
+              <a:buSzPct val="100000"/>
+              <a:buFont typeface="Noto Sans CJK JP"/>
+              <a:buAutoNum type="arabicPeriod" startAt="1"/>
+              <a:defRPr sz="3000" b="1">
+                <a:solidFill>
+                  <a:srgbClr val="303437"/>
+                </a:solidFill>
+                <a:latin typeface="Noto Sans"/>
+              </a:defRPr>
+            </a:pPr>
+            <a:r>
+              <a:rPr sz="3000" b="1" lang="ja-JP" altLang="en-US">
+                <a:solidFill>
+                  <a:srgbClr val="303437"/>
+                </a:solidFill>
+                <a:latin typeface="Noto Sans"/>
+                <a:ea typeface="Noto Sans CJK JP"/>
+                <a:cs typeface="Noto Sans"/>
+              </a:rPr>
+              <a:t>追加の実例</a:t>
+            </a:r>
+          </a:p>
+          <a:p>
+            <a:pPr marL="457200" indent="-457200">
+              <a:lnSpc>
+                <a:spcPts val="3660"/>
+              </a:lnSpc>
+              <a:spcAft>
+                <a:spcPts val="1200"/>
+              </a:spcAft>
+              <a:buSzPct val="100000"/>
+              <a:buFont typeface="Noto Sans CJK JP"/>
+              <a:buAutoNum type="arabicPeriod" startAt="2"/>
+              <a:defRPr sz="3000" b="1">
+                <a:solidFill>
+                  <a:srgbClr val="303437"/>
+                </a:solidFill>
+                <a:latin typeface="Noto Sans"/>
+              </a:defRPr>
+            </a:pPr>
+            <a:r>
+              <a:rPr sz="3000" b="1" lang="ja-JP" altLang="en-US">
+                <a:solidFill>
+                  <a:srgbClr val="303437"/>
+                </a:solidFill>
+                <a:latin typeface="Noto Sans"/>
+                <a:ea typeface="Noto Sans CJK JP"/>
+                <a:cs typeface="Noto Sans"/>
+              </a:rPr>
+              <a:t>言語と統計の補足</a:t>
+            </a:r>
+          </a:p>
+          <a:p>
+            <a:pPr marL="457200" indent="-457200">
+              <a:lnSpc>
+                <a:spcPts val="3660"/>
+              </a:lnSpc>
+              <a:spcAft>
+                <a:spcPts val="0"/>
+              </a:spcAft>
+              <a:buSzPct val="100000"/>
+              <a:buFont typeface="Noto Sans CJK JP"/>
+              <a:buAutoNum type="arabicPeriod" startAt="3"/>
+              <a:defRPr sz="3000" b="1">
+                <a:solidFill>
+                  <a:srgbClr val="303437"/>
+                </a:solidFill>
+                <a:latin typeface="Noto Sans"/>
+              </a:defRPr>
+            </a:pPr>
+            <a:r>
+              <a:rPr sz="3000" b="1" lang="ja-JP" altLang="en-US">
+                <a:solidFill>
+                  <a:srgbClr val="303437"/>
+                </a:solidFill>
+                <a:latin typeface="Noto Sans"/>
+                <a:ea typeface="Noto Sans CJK JP"/>
+                <a:cs typeface="Noto Sans"/>
+              </a:rPr>
+              <a:t>研究と参考文献</a:t>
+            </a:r>
+          </a:p>
+        </p:txBody>
+      </p:sp>
+      <p:sp>
+        <p:nvSpPr>
+          <p:cNvPr id="4" name="Title 3"/>
           <p:cNvSpPr>
             <a:spLocks noGrp="1"/>
           </p:cNvSpPr>
@@ -19027,7 +18428,7 @@
                 <a:ea typeface="Noto Sans CJK JP"/>
                 <a:cs typeface="Noto Sans"/>
               </a:rPr>
-              <a:t>Appendix</a:t>
+              <a:t>Appendix: 目次</a:t>
             </a:r>
           </a:p>
         </p:txBody>
@@ -19062,233 +18463,6 @@
         </p:nvSpPr>
         <p:spPr>
           <a:xfrm>
-            <a:off x="468172" y="650138"/>
-            <a:ext cx="8206740" cy="616305"/>
-          </a:xfrm>
-        </p:spPr>
-        <p:txBody>
-          <a:bodyPr wrap="square" lIns="0" rIns="0" tIns="0" bIns="0">
-            <a:noAutofit/>
-          </a:bodyPr>
-          <a:lstStyle/>
-          <a:p>
-            <a:pPr algn="l">
-              <a:lnSpc>
-                <a:spcPct val="110000"/>
-              </a:lnSpc>
-              <a:buNone/>
-              <a:defRPr sz="2800" b="0">
-                <a:solidFill>
-                  <a:srgbClr val="303437"/>
-                </a:solidFill>
-                <a:latin typeface="Noto Sans"/>
-              </a:defRPr>
-            </a:pPr>
-            <a:r>
-              <a:rPr sz="2800" b="1" lang="ja-JP" altLang="en-US">
-                <a:solidFill>
-                  <a:srgbClr val="303437"/>
-                </a:solidFill>
-                <a:latin typeface="Noto Sans"/>
-                <a:ea typeface="Noto Sans CJK JP"/>
-                <a:cs typeface="Noto Sans"/>
-              </a:rPr>
-              <a:t/>
-            </a:r>
-          </a:p>
-        </p:txBody>
-      </p:sp>
-      <p:sp>
-        <p:nvSpPr>
-          <p:cNvPr id="3" name="Text Placeholder 2"/>
-          <p:cNvSpPr>
-            <a:spLocks noGrp="1"/>
-          </p:cNvSpPr>
-          <p:nvPr>
-            <p:ph type="body" idx="1"/>
-          </p:nvPr>
-        </p:nvSpPr>
-        <p:spPr>
-          <a:xfrm>
-            <a:off x="640080" y="1972511"/>
-            <a:ext cx="7863840" cy="1744980"/>
-          </a:xfrm>
-        </p:spPr>
-        <p:txBody>
-          <a:bodyPr lIns="0" rIns="0" tIns="0" bIns="0">
-            <a:noAutofit/>
-          </a:bodyPr>
-          <a:lstStyle/>
-          <a:p>
-            <a:pPr marL="457200" indent="-457200">
-              <a:lnSpc>
-                <a:spcPts val="3660"/>
-              </a:lnSpc>
-              <a:spcAft>
-                <a:spcPts val="1200"/>
-              </a:spcAft>
-              <a:buSzPct val="100000"/>
-              <a:buFont typeface="Noto Sans CJK JP"/>
-              <a:buAutoNum type="arabicPeriod" startAt="1"/>
-              <a:defRPr sz="3000" b="1">
-                <a:solidFill>
-                  <a:srgbClr val="303437"/>
-                </a:solidFill>
-                <a:latin typeface="Noto Sans"/>
-              </a:defRPr>
-            </a:pPr>
-            <a:r>
-              <a:rPr sz="3000" b="1" lang="ja-JP" altLang="en-US">
-                <a:solidFill>
-                  <a:srgbClr val="303437"/>
-                </a:solidFill>
-                <a:latin typeface="Noto Sans"/>
-                <a:ea typeface="Noto Sans CJK JP"/>
-                <a:cs typeface="Noto Sans"/>
-              </a:rPr>
-              <a:t>追加の実例</a:t>
-            </a:r>
-          </a:p>
-          <a:p>
-            <a:pPr marL="457200" indent="-457200">
-              <a:lnSpc>
-                <a:spcPts val="3660"/>
-              </a:lnSpc>
-              <a:spcAft>
-                <a:spcPts val="1200"/>
-              </a:spcAft>
-              <a:buSzPct val="100000"/>
-              <a:buFont typeface="Noto Sans CJK JP"/>
-              <a:buAutoNum type="arabicPeriod" startAt="2"/>
-              <a:defRPr sz="3000" b="1">
-                <a:solidFill>
-                  <a:srgbClr val="303437"/>
-                </a:solidFill>
-                <a:latin typeface="Noto Sans"/>
-              </a:defRPr>
-            </a:pPr>
-            <a:r>
-              <a:rPr sz="3000" b="1" lang="ja-JP" altLang="en-US">
-                <a:solidFill>
-                  <a:srgbClr val="303437"/>
-                </a:solidFill>
-                <a:latin typeface="Noto Sans"/>
-                <a:ea typeface="Noto Sans CJK JP"/>
-                <a:cs typeface="Noto Sans"/>
-              </a:rPr>
-              <a:t>言語と統計の補足</a:t>
-            </a:r>
-          </a:p>
-          <a:p>
-            <a:pPr marL="457200" indent="-457200">
-              <a:lnSpc>
-                <a:spcPts val="3660"/>
-              </a:lnSpc>
-              <a:spcAft>
-                <a:spcPts val="0"/>
-              </a:spcAft>
-              <a:buSzPct val="100000"/>
-              <a:buFont typeface="Noto Sans CJK JP"/>
-              <a:buAutoNum type="arabicPeriod" startAt="3"/>
-              <a:defRPr sz="3000" b="1">
-                <a:solidFill>
-                  <a:srgbClr val="303437"/>
-                </a:solidFill>
-                <a:latin typeface="Noto Sans"/>
-              </a:defRPr>
-            </a:pPr>
-            <a:r>
-              <a:rPr sz="3000" b="1" lang="ja-JP" altLang="en-US">
-                <a:solidFill>
-                  <a:srgbClr val="303437"/>
-                </a:solidFill>
-                <a:latin typeface="Noto Sans"/>
-                <a:ea typeface="Noto Sans CJK JP"/>
-                <a:cs typeface="Noto Sans"/>
-              </a:rPr>
-              <a:t>研究と参考文献</a:t>
-            </a:r>
-          </a:p>
-        </p:txBody>
-      </p:sp>
-      <p:sp>
-        <p:nvSpPr>
-          <p:cNvPr id="4" name="Title 3"/>
-          <p:cNvSpPr>
-            <a:spLocks noGrp="1"/>
-          </p:cNvSpPr>
-          <p:nvPr>
-            <p:ph type="title" idx="2"/>
-          </p:nvPr>
-        </p:nvSpPr>
-        <p:spPr>
-          <a:xfrm>
-            <a:off x="75895" y="0"/>
-            <a:ext cx="8115300" cy="480060"/>
-          </a:xfrm>
-        </p:spPr>
-        <p:txBody>
-          <a:bodyPr wrap="square" lIns="0" rIns="0" tIns="0" bIns="0" anchor="ctr">
-            <a:noAutofit/>
-          </a:bodyPr>
-          <a:lstStyle/>
-          <a:p>
-            <a:pPr algn="l">
-              <a:lnSpc>
-                <a:spcPct val="110000"/>
-              </a:lnSpc>
-              <a:buNone/>
-              <a:defRPr sz="1400" b="0">
-                <a:solidFill>
-                  <a:srgbClr val="303437"/>
-                </a:solidFill>
-                <a:latin typeface="Noto Sans"/>
-              </a:defRPr>
-            </a:pPr>
-            <a:r>
-              <a:rPr sz="1400" b="1" lang="ja-JP" altLang="en-US">
-                <a:solidFill>
-                  <a:srgbClr val="FFFEF8"/>
-                </a:solidFill>
-                <a:latin typeface="Noto Sans"/>
-                <a:ea typeface="Noto Sans CJK JP"/>
-                <a:cs typeface="Noto Sans"/>
-              </a:rPr>
-              <a:t>Appendix: 目次</a:t>
-            </a:r>
-          </a:p>
-        </p:txBody>
-      </p:sp>
-    </p:spTree>
-  </p:cSld>
-  <p:clrMapOvr>
-    <a:masterClrMapping/>
-  </p:clrMapOvr>
-</p:sld>
-</file>
-
-<file path=ppt/slides/slide37.xml><?xml version="1.0" encoding="utf-8"?>
-<p:sld xmlns:a="http://schemas.openxmlformats.org/drawingml/2006/main" xmlns:p="http://schemas.openxmlformats.org/presentationml/2006/main" xmlns:r="http://schemas.openxmlformats.org/officeDocument/2006/relationships">
-  <p:cSld>
-    <p:spTree>
-      <p:nvGrpSpPr>
-        <p:cNvPr id="1" name=""/>
-        <p:cNvGrpSpPr/>
-        <p:nvPr/>
-      </p:nvGrpSpPr>
-      <p:grpSpPr/>
-      <p:sp>
-        <p:nvSpPr>
-          <p:cNvPr id="2" name="Title 1"/>
-          <p:cNvSpPr>
-            <a:spLocks noGrp="1"/>
-          </p:cNvSpPr>
-          <p:nvPr>
-            <p:ph type="title"/>
-          </p:nvPr>
-        </p:nvSpPr>
-        <p:spPr>
-          <a:xfrm>
             <a:off x="548640" y="2506875"/>
             <a:ext cx="8046720" cy="585216"/>
           </a:xfrm>
@@ -19381,7 +18555,7 @@
 </p:sld>
 </file>
 
-<file path=ppt/slides/slide38.xml><?xml version="1.0" encoding="utf-8"?>
+<file path=ppt/slides/slide37.xml><?xml version="1.0" encoding="utf-8"?>
 <p:sld xmlns:a="http://schemas.openxmlformats.org/drawingml/2006/main" xmlns:p="http://schemas.openxmlformats.org/presentationml/2006/main" xmlns:r="http://schemas.openxmlformats.org/officeDocument/2006/relationships">
   <p:cSld>
     <p:spTree>
@@ -19924,22 +19098,8 @@
                 <a:ea typeface="Noto Sans CJK JP"/>
                 <a:cs typeface="Noto Sans"/>
               </a:rPr>
-              <a:t>[1] Aumiller et al., EUR-Lex-Sum. 固定HF revision 33ecb2d、test実レコード。 32008R0453 ／ french ／ test row 155（0始まり）</a:t>
-            </a:r>
-          </a:p>
-          <a:p>
-            <a:pPr>
-              <a:lnSpc>
-                <a:spcPts val="940"/>
-              </a:lnSpc>
-              <a:buNone/>
-              <a:defRPr sz="810" b="0">
-                <a:solidFill>
-                  <a:srgbClr val="303437"/>
-                </a:solidFill>
-                <a:latin typeface="Noto Sans"/>
-              </a:defRPr>
-            </a:pPr>
+              <a:t>[1] Aumiller et al. EUR-Lex-Sum. 32008R0453 ／ french  </a:t>
+            </a:r>
             <a:r>
               <a:rPr sz="810" b="0" lang="ja-JP" altLang="en-US">
                 <a:solidFill>
@@ -19963,7 +19123,7 @@
 </p:sld>
 </file>
 
-<file path=ppt/slides/slide39.xml><?xml version="1.0" encoding="utf-8"?>
+<file path=ppt/slides/slide38.xml><?xml version="1.0" encoding="utf-8"?>
 <p:sld xmlns:a="http://schemas.openxmlformats.org/drawingml/2006/main" xmlns:p="http://schemas.openxmlformats.org/presentationml/2006/main" xmlns:r="http://schemas.openxmlformats.org/officeDocument/2006/relationships">
   <p:cSld>
     <p:spTree>
@@ -20506,22 +19666,8 @@
                 <a:ea typeface="Noto Sans CJK JP"/>
                 <a:cs typeface="Noto Sans"/>
               </a:rPr>
-              <a:t>[1] Aumiller et al., EUR-Lex-Sum. 固定HF revision 33ecb2d、test実レコード。 32020R2094 ／ italian ／ test row 70（0始まり）</a:t>
-            </a:r>
-          </a:p>
-          <a:p>
-            <a:pPr>
-              <a:lnSpc>
-                <a:spcPts val="940"/>
-              </a:lnSpc>
-              <a:buNone/>
-              <a:defRPr sz="810" b="0">
-                <a:solidFill>
-                  <a:srgbClr val="303437"/>
-                </a:solidFill>
-                <a:latin typeface="Noto Sans"/>
-              </a:defRPr>
-            </a:pPr>
+              <a:t>[1] Aumiller et al. EUR-Lex-Sum. 32020R2094 ／ italian  </a:t>
+            </a:r>
             <a:r>
               <a:rPr sz="810" b="0" lang="ja-JP" altLang="en-US">
                 <a:solidFill>
@@ -20545,121 +19691,7 @@
 </p:sld>
 </file>
 
-<file path=ppt/slides/slide4.xml><?xml version="1.0" encoding="utf-8"?>
-<p:sld xmlns:a="http://schemas.openxmlformats.org/drawingml/2006/main" xmlns:p="http://schemas.openxmlformats.org/presentationml/2006/main" xmlns:r="http://schemas.openxmlformats.org/officeDocument/2006/relationships">
-  <p:cSld>
-    <p:spTree>
-      <p:nvGrpSpPr>
-        <p:cNvPr id="1" name=""/>
-        <p:cNvGrpSpPr/>
-        <p:nvPr/>
-      </p:nvGrpSpPr>
-      <p:grpSpPr/>
-      <p:sp>
-        <p:nvSpPr>
-          <p:cNvPr id="2" name="Title 1"/>
-          <p:cNvSpPr>
-            <a:spLocks noGrp="1"/>
-          </p:cNvSpPr>
-          <p:nvPr>
-            <p:ph type="title"/>
-          </p:nvPr>
-        </p:nvSpPr>
-        <p:spPr>
-          <a:xfrm>
-            <a:off x="548640" y="2506875"/>
-            <a:ext cx="8046720" cy="585216"/>
-          </a:xfrm>
-        </p:spPr>
-        <p:txBody>
-          <a:bodyPr wrap="square" lIns="0" rIns="0" tIns="0" bIns="0" anchor="ctr">
-            <a:noAutofit/>
-          </a:bodyPr>
-          <a:lstStyle/>
-          <a:p>
-            <a:pPr algn="ctr">
-              <a:lnSpc>
-                <a:spcPct val="110000"/>
-              </a:lnSpc>
-              <a:buNone/>
-              <a:defRPr sz="3600" b="0">
-                <a:solidFill>
-                  <a:srgbClr val="303437"/>
-                </a:solidFill>
-                <a:latin typeface="Noto Sans"/>
-              </a:defRPr>
-            </a:pPr>
-            <a:r>
-              <a:rPr sz="3600" b="1" lang="ja-JP" altLang="en-US">
-                <a:solidFill>
-                  <a:srgbClr val="303437"/>
-                </a:solidFill>
-                <a:latin typeface="Noto Sans"/>
-                <a:ea typeface="Noto Sans CJK JP"/>
-                <a:cs typeface="Noto Sans"/>
-              </a:rPr>
-              <a:t>法令と要約を対応させる</a:t>
-            </a:r>
-          </a:p>
-        </p:txBody>
-      </p:sp>
-      <p:sp>
-        <p:nvSpPr>
-          <p:cNvPr id="3" name="Title 2"/>
-          <p:cNvSpPr>
-            <a:spLocks noGrp="1"/>
-          </p:cNvSpPr>
-          <p:nvPr>
-            <p:ph type="title" idx="2"/>
-          </p:nvPr>
-        </p:nvSpPr>
-        <p:spPr>
-          <a:xfrm>
-            <a:off x="75895" y="0"/>
-            <a:ext cx="8115300" cy="480060"/>
-          </a:xfrm>
-        </p:spPr>
-        <p:txBody>
-          <a:bodyPr wrap="square" lIns="0" rIns="0" tIns="0" bIns="0" anchor="ctr">
-            <a:noAutofit/>
-          </a:bodyPr>
-          <a:lstStyle/>
-          <a:p>
-            <a:pPr algn="l">
-              <a:lnSpc>
-                <a:spcPct val="110000"/>
-              </a:lnSpc>
-              <a:buNone/>
-              <a:defRPr sz="1400" b="0">
-                <a:solidFill>
-                  <a:srgbClr val="303437"/>
-                </a:solidFill>
-                <a:latin typeface="Noto Sans"/>
-              </a:defRPr>
-            </a:pPr>
-            <a:r>
-              <a:rPr sz="1400" b="1" lang="ja-JP" altLang="en-US">
-                <a:solidFill>
-                  <a:srgbClr val="FFFEF8"/>
-                </a:solidFill>
-                <a:latin typeface="Noto Sans"/>
-                <a:ea typeface="Noto Sans CJK JP"/>
-                <a:cs typeface="Noto Sans"/>
-              </a:rPr>
-              <a:t>1. 法令と要約を対応させる</a:t>
-            </a:r>
-          </a:p>
-        </p:txBody>
-      </p:sp>
-    </p:spTree>
-  </p:cSld>
-  <p:clrMapOvr>
-    <a:masterClrMapping/>
-  </p:clrMapOvr>
-</p:sld>
-</file>
-
-<file path=ppt/slides/slide40.xml><?xml version="1.0" encoding="utf-8"?>
+<file path=ppt/slides/slide39.xml><?xml version="1.0" encoding="utf-8"?>
 <p:sld xmlns:a="http://schemas.openxmlformats.org/drawingml/2006/main" xmlns:p="http://schemas.openxmlformats.org/presentationml/2006/main" xmlns:r="http://schemas.openxmlformats.org/officeDocument/2006/relationships">
   <p:cSld>
     <p:spTree>
@@ -20942,22 +19974,8 @@
                 <a:ea typeface="Noto Sans CJK JP"/>
                 <a:cs typeface="Noto Sans"/>
               </a:rPr>
-              <a:t>[1] Aumiller et al., EUR-Lex-Sum. 固定HF revision 33ecb2d、test実レコード。 32017R1563 ／ irish ／ test row 134（0始まり）</a:t>
-            </a:r>
-          </a:p>
-          <a:p>
-            <a:pPr>
-              <a:lnSpc>
-                <a:spcPts val="940"/>
-              </a:lnSpc>
-              <a:buNone/>
-              <a:defRPr sz="810" b="0">
-                <a:solidFill>
-                  <a:srgbClr val="303437"/>
-                </a:solidFill>
-                <a:latin typeface="Noto Sans"/>
-              </a:defRPr>
-            </a:pPr>
+              <a:t>[1] Aumiller et al. EUR-Lex-Sum. 32017R1563 ／ irish  </a:t>
+            </a:r>
             <a:r>
               <a:rPr sz="810" b="0" lang="ja-JP" altLang="en-US">
                 <a:solidFill>
@@ -20981,7 +19999,121 @@
 </p:sld>
 </file>
 
-<file path=ppt/slides/slide41.xml><?xml version="1.0" encoding="utf-8"?>
+<file path=ppt/slides/slide4.xml><?xml version="1.0" encoding="utf-8"?>
+<p:sld xmlns:a="http://schemas.openxmlformats.org/drawingml/2006/main" xmlns:p="http://schemas.openxmlformats.org/presentationml/2006/main" xmlns:r="http://schemas.openxmlformats.org/officeDocument/2006/relationships">
+  <p:cSld>
+    <p:spTree>
+      <p:nvGrpSpPr>
+        <p:cNvPr id="1" name=""/>
+        <p:cNvGrpSpPr/>
+        <p:nvPr/>
+      </p:nvGrpSpPr>
+      <p:grpSpPr/>
+      <p:sp>
+        <p:nvSpPr>
+          <p:cNvPr id="2" name="Title 1"/>
+          <p:cNvSpPr>
+            <a:spLocks noGrp="1"/>
+          </p:cNvSpPr>
+          <p:nvPr>
+            <p:ph type="title"/>
+          </p:nvPr>
+        </p:nvSpPr>
+        <p:spPr>
+          <a:xfrm>
+            <a:off x="548640" y="2506875"/>
+            <a:ext cx="8046720" cy="585216"/>
+          </a:xfrm>
+        </p:spPr>
+        <p:txBody>
+          <a:bodyPr wrap="square" lIns="0" rIns="0" tIns="0" bIns="0" anchor="ctr">
+            <a:noAutofit/>
+          </a:bodyPr>
+          <a:lstStyle/>
+          <a:p>
+            <a:pPr algn="ctr">
+              <a:lnSpc>
+                <a:spcPct val="110000"/>
+              </a:lnSpc>
+              <a:buNone/>
+              <a:defRPr sz="3600" b="0">
+                <a:solidFill>
+                  <a:srgbClr val="303437"/>
+                </a:solidFill>
+                <a:latin typeface="Noto Sans"/>
+              </a:defRPr>
+            </a:pPr>
+            <a:r>
+              <a:rPr sz="3600" b="1" lang="ja-JP" altLang="en-US">
+                <a:solidFill>
+                  <a:srgbClr val="303437"/>
+                </a:solidFill>
+                <a:latin typeface="Noto Sans"/>
+                <a:ea typeface="Noto Sans CJK JP"/>
+                <a:cs typeface="Noto Sans"/>
+              </a:rPr>
+              <a:t>法令と要約を対応させる</a:t>
+            </a:r>
+          </a:p>
+        </p:txBody>
+      </p:sp>
+      <p:sp>
+        <p:nvSpPr>
+          <p:cNvPr id="3" name="Title 2"/>
+          <p:cNvSpPr>
+            <a:spLocks noGrp="1"/>
+          </p:cNvSpPr>
+          <p:nvPr>
+            <p:ph type="title" idx="2"/>
+          </p:nvPr>
+        </p:nvSpPr>
+        <p:spPr>
+          <a:xfrm>
+            <a:off x="75895" y="0"/>
+            <a:ext cx="8115300" cy="480060"/>
+          </a:xfrm>
+        </p:spPr>
+        <p:txBody>
+          <a:bodyPr wrap="square" lIns="0" rIns="0" tIns="0" bIns="0" anchor="ctr">
+            <a:noAutofit/>
+          </a:bodyPr>
+          <a:lstStyle/>
+          <a:p>
+            <a:pPr algn="l">
+              <a:lnSpc>
+                <a:spcPct val="110000"/>
+              </a:lnSpc>
+              <a:buNone/>
+              <a:defRPr sz="1400" b="0">
+                <a:solidFill>
+                  <a:srgbClr val="303437"/>
+                </a:solidFill>
+                <a:latin typeface="Noto Sans"/>
+              </a:defRPr>
+            </a:pPr>
+            <a:r>
+              <a:rPr sz="1400" b="1" lang="ja-JP" altLang="en-US">
+                <a:solidFill>
+                  <a:srgbClr val="FFFEF8"/>
+                </a:solidFill>
+                <a:latin typeface="Noto Sans"/>
+                <a:ea typeface="Noto Sans CJK JP"/>
+                <a:cs typeface="Noto Sans"/>
+              </a:rPr>
+              <a:t>1. 法令と要約を対応させる</a:t>
+            </a:r>
+          </a:p>
+        </p:txBody>
+      </p:sp>
+    </p:spTree>
+  </p:cSld>
+  <p:clrMapOvr>
+    <a:masterClrMapping/>
+  </p:clrMapOvr>
+</p:sld>
+</file>
+
+<file path=ppt/slides/slide40.xml><?xml version="1.0" encoding="utf-8"?>
 <p:sld xmlns:a="http://schemas.openxmlformats.org/drawingml/2006/main" xmlns:p="http://schemas.openxmlformats.org/presentationml/2006/main" xmlns:r="http://schemas.openxmlformats.org/officeDocument/2006/relationships">
   <p:cSld>
     <p:spTree>
@@ -21264,22 +20396,8 @@
                 <a:ea typeface="Noto Sans CJK JP"/>
                 <a:cs typeface="Noto Sans"/>
               </a:rPr>
-              <a:t>[1] Aumiller et al., EUR-Lex-Sum. 固定HF revision 33ecb2d、test実レコード。 32017R1563 ／ irish ／ test row 134（0始まり）</a:t>
-            </a:r>
-          </a:p>
-          <a:p>
-            <a:pPr>
-              <a:lnSpc>
-                <a:spcPts val="940"/>
-              </a:lnSpc>
-              <a:buNone/>
-              <a:defRPr sz="810" b="0">
-                <a:solidFill>
-                  <a:srgbClr val="303437"/>
-                </a:solidFill>
-                <a:latin typeface="Noto Sans"/>
-              </a:defRPr>
-            </a:pPr>
+              <a:t>[1] Aumiller et al. EUR-Lex-Sum. 32017R1563 ／ irish  </a:t>
+            </a:r>
             <a:r>
               <a:rPr sz="810" b="0" lang="ja-JP" altLang="en-US">
                 <a:solidFill>
@@ -21303,7 +20421,7 @@
 </p:sld>
 </file>
 
-<file path=ppt/slides/slide42.xml><?xml version="1.0" encoding="utf-8"?>
+<file path=ppt/slides/slide41.xml><?xml version="1.0" encoding="utf-8"?>
 <p:sld xmlns:a="http://schemas.openxmlformats.org/drawingml/2006/main" xmlns:p="http://schemas.openxmlformats.org/presentationml/2006/main" xmlns:r="http://schemas.openxmlformats.org/officeDocument/2006/relationships">
   <p:cSld>
     <p:spTree>
@@ -21660,22 +20778,8 @@
                 <a:ea typeface="Noto Sans CJK JP"/>
                 <a:cs typeface="Noto Sans"/>
               </a:rPr>
-              <a:t>[1] Aumiller et al., EUR-Lex-Sum. 固定HF revision 33ecb2d、test実レコード。 32017R1563 ／ irish ／ test row 134（0始まり）</a:t>
-            </a:r>
-          </a:p>
-          <a:p>
-            <a:pPr>
-              <a:lnSpc>
-                <a:spcPts val="940"/>
-              </a:lnSpc>
-              <a:buNone/>
-              <a:defRPr sz="810" b="0">
-                <a:solidFill>
-                  <a:srgbClr val="303437"/>
-                </a:solidFill>
-                <a:latin typeface="Noto Sans"/>
-              </a:defRPr>
-            </a:pPr>
+              <a:t>[1] Aumiller et al. EUR-Lex-Sum. 32017R1563 ／ irish  </a:t>
+            </a:r>
             <a:r>
               <a:rPr sz="810" b="0" lang="ja-JP" altLang="en-US">
                 <a:solidFill>
@@ -21699,7 +20803,7 @@
 </p:sld>
 </file>
 
-<file path=ppt/slides/slide43.xml><?xml version="1.0" encoding="utf-8"?>
+<file path=ppt/slides/slide42.xml><?xml version="1.0" encoding="utf-8"?>
 <p:sld xmlns:a="http://schemas.openxmlformats.org/drawingml/2006/main" xmlns:p="http://schemas.openxmlformats.org/presentationml/2006/main" xmlns:r="http://schemas.openxmlformats.org/officeDocument/2006/relationships">
   <p:cSld>
     <p:spTree>
@@ -22075,22 +21179,8 @@
                 <a:ea typeface="Noto Sans CJK JP"/>
                 <a:cs typeface="Noto Sans"/>
               </a:rPr>
-              <a:t>[1] Aumiller et al., EUR-Lex-Sum. 固定HF revision 33ecb2d、test実レコード。 32008R0762 ／ greek ／ test row 183（0始まり）</a:t>
-            </a:r>
-          </a:p>
-          <a:p>
-            <a:pPr>
-              <a:lnSpc>
-                <a:spcPts val="940"/>
-              </a:lnSpc>
-              <a:buNone/>
-              <a:defRPr sz="810" b="0">
-                <a:solidFill>
-                  <a:srgbClr val="303437"/>
-                </a:solidFill>
-                <a:latin typeface="Noto Sans"/>
-              </a:defRPr>
-            </a:pPr>
+              <a:t>[1] Aumiller et al. EUR-Lex-Sum. 32008R0762 ／ greek  </a:t>
+            </a:r>
             <a:r>
               <a:rPr sz="810" b="0" lang="ja-JP" altLang="en-US">
                 <a:solidFill>
@@ -22114,7 +21204,7 @@
 </p:sld>
 </file>
 
-<file path=ppt/slides/slide44.xml><?xml version="1.0" encoding="utf-8"?>
+<file path=ppt/slides/slide43.xml><?xml version="1.0" encoding="utf-8"?>
 <p:sld xmlns:a="http://schemas.openxmlformats.org/drawingml/2006/main" xmlns:p="http://schemas.openxmlformats.org/presentationml/2006/main" xmlns:r="http://schemas.openxmlformats.org/officeDocument/2006/relationships">
   <p:cSld>
     <p:spTree>
@@ -22490,22 +21580,8 @@
                 <a:ea typeface="Noto Sans CJK JP"/>
                 <a:cs typeface="Noto Sans"/>
               </a:rPr>
-              <a:t>[1] Aumiller et al., EUR-Lex-Sum. 固定HF revision 33ecb2d、test実レコード。 32008R0762 ／ greek ／ test row 183（0始まり）</a:t>
-            </a:r>
-          </a:p>
-          <a:p>
-            <a:pPr>
-              <a:lnSpc>
-                <a:spcPts val="940"/>
-              </a:lnSpc>
-              <a:buNone/>
-              <a:defRPr sz="810" b="0">
-                <a:solidFill>
-                  <a:srgbClr val="303437"/>
-                </a:solidFill>
-                <a:latin typeface="Noto Sans"/>
-              </a:defRPr>
-            </a:pPr>
+              <a:t>[1] Aumiller et al. EUR-Lex-Sum. 32008R0762 ／ greek  </a:t>
+            </a:r>
             <a:r>
               <a:rPr sz="810" b="0" lang="ja-JP" altLang="en-US">
                 <a:solidFill>
@@ -22529,7 +21605,7 @@
 </p:sld>
 </file>
 
-<file path=ppt/slides/slide45.xml><?xml version="1.0" encoding="utf-8"?>
+<file path=ppt/slides/slide44.xml><?xml version="1.0" encoding="utf-8"?>
 <p:sld xmlns:a="http://schemas.openxmlformats.org/drawingml/2006/main" xmlns:p="http://schemas.openxmlformats.org/presentationml/2006/main" xmlns:r="http://schemas.openxmlformats.org/officeDocument/2006/relationships">
   <p:cSld>
     <p:spTree>
@@ -23072,22 +22148,8 @@
                 <a:ea typeface="Noto Sans CJK JP"/>
                 <a:cs typeface="Noto Sans"/>
               </a:rPr>
-              <a:t>[1] Aumiller et al., EUR-Lex-Sum. 固定HF revision 33ecb2d、test実レコード。 32008R0763 ／ maltese ／ test row 73（0始まり）</a:t>
-            </a:r>
-          </a:p>
-          <a:p>
-            <a:pPr>
-              <a:lnSpc>
-                <a:spcPts val="940"/>
-              </a:lnSpc>
-              <a:buNone/>
-              <a:defRPr sz="810" b="0">
-                <a:solidFill>
-                  <a:srgbClr val="303437"/>
-                </a:solidFill>
-                <a:latin typeface="Noto Sans"/>
-              </a:defRPr>
-            </a:pPr>
+              <a:t>[1] Aumiller et al. EUR-Lex-Sum. 32008R0763 ／ maltese  </a:t>
+            </a:r>
             <a:r>
               <a:rPr sz="810" b="0" lang="ja-JP" altLang="en-US">
                 <a:solidFill>
@@ -23111,7 +22173,7 @@
 </p:sld>
 </file>
 
-<file path=ppt/slides/slide46.xml><?xml version="1.0" encoding="utf-8"?>
+<file path=ppt/slides/slide45.xml><?xml version="1.0" encoding="utf-8"?>
 <p:sld xmlns:a="http://schemas.openxmlformats.org/drawingml/2006/main" xmlns:p="http://schemas.openxmlformats.org/presentationml/2006/main" xmlns:r="http://schemas.openxmlformats.org/officeDocument/2006/relationships">
   <p:cSld>
     <p:spTree>
@@ -23468,22 +22530,8 @@
                 <a:ea typeface="Noto Sans CJK JP"/>
                 <a:cs typeface="Noto Sans"/>
               </a:rPr>
-              <a:t>[1] Aumiller et al., EUR-Lex-Sum. 固定HF revision 33ecb2d、test実レコード。 32021R0523 ／ english ／ test row 27（0始まり）</a:t>
-            </a:r>
-          </a:p>
-          <a:p>
-            <a:pPr>
-              <a:lnSpc>
-                <a:spcPts val="940"/>
-              </a:lnSpc>
-              <a:buNone/>
-              <a:defRPr sz="810" b="0">
-                <a:solidFill>
-                  <a:srgbClr val="303437"/>
-                </a:solidFill>
-                <a:latin typeface="Noto Sans"/>
-              </a:defRPr>
-            </a:pPr>
+              <a:t>[1] Aumiller et al. EUR-Lex-Sum. 32021R0523 ／ english  </a:t>
+            </a:r>
             <a:r>
               <a:rPr sz="810" b="0" lang="ja-JP" altLang="en-US">
                 <a:solidFill>
@@ -23507,7 +22555,7 @@
 </p:sld>
 </file>
 
-<file path=ppt/slides/slide47.xml><?xml version="1.0" encoding="utf-8"?>
+<file path=ppt/slides/slide46.xml><?xml version="1.0" encoding="utf-8"?>
 <p:sld xmlns:a="http://schemas.openxmlformats.org/drawingml/2006/main" xmlns:p="http://schemas.openxmlformats.org/presentationml/2006/main" xmlns:r="http://schemas.openxmlformats.org/officeDocument/2006/relationships">
   <p:cSld>
     <p:spTree>
@@ -24050,22 +23098,8 @@
                 <a:ea typeface="Noto Sans CJK JP"/>
                 <a:cs typeface="Noto Sans"/>
               </a:rPr>
-              <a:t>[1] Aumiller et al., EUR-Lex-Sum. 固定HF revision 33ecb2d、test実レコード。 32021R0523 ／ english ／ test row 27（0始まり）</a:t>
-            </a:r>
-          </a:p>
-          <a:p>
-            <a:pPr>
-              <a:lnSpc>
-                <a:spcPts val="940"/>
-              </a:lnSpc>
-              <a:buNone/>
-              <a:defRPr sz="810" b="0">
-                <a:solidFill>
-                  <a:srgbClr val="303437"/>
-                </a:solidFill>
-                <a:latin typeface="Noto Sans"/>
-              </a:defRPr>
-            </a:pPr>
+              <a:t>[1] Aumiller et al. EUR-Lex-Sum. 32021R0523 ／ english  </a:t>
+            </a:r>
             <a:r>
               <a:rPr sz="810" b="0" lang="ja-JP" altLang="en-US">
                 <a:solidFill>
@@ -24089,7 +23123,7 @@
 </p:sld>
 </file>
 
-<file path=ppt/slides/slide48.xml><?xml version="1.0" encoding="utf-8"?>
+<file path=ppt/slides/slide47.xml><?xml version="1.0" encoding="utf-8"?>
 <p:sld xmlns:a="http://schemas.openxmlformats.org/drawingml/2006/main" xmlns:p="http://schemas.openxmlformats.org/presentationml/2006/main" xmlns:r="http://schemas.openxmlformats.org/officeDocument/2006/relationships">
   <p:cSld>
     <p:spTree>
@@ -24465,22 +23499,8 @@
                 <a:ea typeface="Noto Sans CJK JP"/>
                 <a:cs typeface="Noto Sans"/>
               </a:rPr>
-              <a:t>[1] Aumiller et al., EUR-Lex-Sum. 固定HF revision 33ecb2d、test実レコード。 32021R0023 ／ english ／ test row 40（0始まり）</a:t>
-            </a:r>
-          </a:p>
-          <a:p>
-            <a:pPr>
-              <a:lnSpc>
-                <a:spcPts val="940"/>
-              </a:lnSpc>
-              <a:buNone/>
-              <a:defRPr sz="810" b="0">
-                <a:solidFill>
-                  <a:srgbClr val="303437"/>
-                </a:solidFill>
-                <a:latin typeface="Noto Sans"/>
-              </a:defRPr>
-            </a:pPr>
+              <a:t>[1] Aumiller et al. EUR-Lex-Sum. 32021R0023 ／ english  </a:t>
+            </a:r>
             <a:r>
               <a:rPr sz="810" b="0" lang="ja-JP" altLang="en-US">
                 <a:solidFill>
@@ -24504,7 +23524,7 @@
 </p:sld>
 </file>
 
-<file path=ppt/slides/slide49.xml><?xml version="1.0" encoding="utf-8"?>
+<file path=ppt/slides/slide48.xml><?xml version="1.0" encoding="utf-8"?>
 <p:sld xmlns:a="http://schemas.openxmlformats.org/drawingml/2006/main" xmlns:p="http://schemas.openxmlformats.org/presentationml/2006/main" xmlns:r="http://schemas.openxmlformats.org/officeDocument/2006/relationships">
   <p:cSld>
     <p:spTree>
@@ -24880,22 +23900,8 @@
                 <a:ea typeface="Noto Sans CJK JP"/>
                 <a:cs typeface="Noto Sans"/>
               </a:rPr>
-              <a:t>[1] Aumiller et al., EUR-Lex-Sum. 固定HF revision 33ecb2d、test実レコード。 32021R0023 ／ english ／ test row 40（0始まり）</a:t>
-            </a:r>
-          </a:p>
-          <a:p>
-            <a:pPr>
-              <a:lnSpc>
-                <a:spcPts val="940"/>
-              </a:lnSpc>
-              <a:buNone/>
-              <a:defRPr sz="810" b="0">
-                <a:solidFill>
-                  <a:srgbClr val="303437"/>
-                </a:solidFill>
-                <a:latin typeface="Noto Sans"/>
-              </a:defRPr>
-            </a:pPr>
+              <a:t>[1] Aumiller et al. EUR-Lex-Sum. 32021R0023 ／ english  </a:t>
+            </a:r>
             <a:r>
               <a:rPr sz="810" b="0" lang="ja-JP" altLang="en-US">
                 <a:solidFill>
@@ -24919,314 +23925,7 @@
 </p:sld>
 </file>
 
-<file path=ppt/slides/slide5.xml><?xml version="1.0" encoding="utf-8"?>
-<p:sld xmlns:a="http://schemas.openxmlformats.org/drawingml/2006/main" xmlns:p="http://schemas.openxmlformats.org/presentationml/2006/main" xmlns:r="http://schemas.openxmlformats.org/officeDocument/2006/relationships">
-  <p:cSld>
-    <p:spTree>
-      <p:nvGrpSpPr>
-        <p:cNvPr id="1" name=""/>
-        <p:cNvGrpSpPr/>
-        <p:nvPr/>
-      </p:nvGrpSpPr>
-      <p:grpSpPr/>
-      <p:sp>
-        <p:nvSpPr>
-          <p:cNvPr id="2" name="Title 1"/>
-          <p:cNvSpPr>
-            <a:spLocks noGrp="1"/>
-          </p:cNvSpPr>
-          <p:nvPr>
-            <p:ph type="title"/>
-          </p:nvPr>
-        </p:nvSpPr>
-        <p:spPr>
-          <a:xfrm>
-            <a:off x="468172" y="650138"/>
-            <a:ext cx="8206740" cy="616305"/>
-          </a:xfrm>
-        </p:spPr>
-        <p:txBody>
-          <a:bodyPr wrap="square" lIns="0" rIns="0" tIns="0" bIns="0">
-            <a:noAutofit/>
-          </a:bodyPr>
-          <a:lstStyle/>
-          <a:p>
-            <a:pPr algn="l">
-              <a:lnSpc>
-                <a:spcPct val="110000"/>
-              </a:lnSpc>
-              <a:buNone/>
-              <a:defRPr sz="2800" b="0">
-                <a:solidFill>
-                  <a:srgbClr val="303437"/>
-                </a:solidFill>
-                <a:latin typeface="Noto Sans"/>
-              </a:defRPr>
-            </a:pPr>
-            <a:r>
-              <a:rPr sz="2800" b="1" lang="ja-JP" altLang="en-US">
-                <a:solidFill>
-                  <a:srgbClr val="303437"/>
-                </a:solidFill>
-                <a:latin typeface="Noto Sans"/>
-                <a:ea typeface="Noto Sans CJK JP"/>
-                <a:cs typeface="Noto Sans"/>
-              </a:rPr>
-              <a:t>長い法令から、制度の要点をまとめる</a:t>
-            </a:r>
-          </a:p>
-        </p:txBody>
-      </p:sp>
-      <p:sp>
-        <p:nvSpPr>
-          <p:cNvPr id="3" name="Text Placeholder 2"/>
-          <p:cNvSpPr>
-            <a:spLocks noGrp="1"/>
-          </p:cNvSpPr>
-          <p:nvPr>
-            <p:ph type="body" idx="1"/>
-          </p:nvPr>
-        </p:nvSpPr>
-        <p:spPr>
-          <a:xfrm>
-            <a:off x="594360" y="1463040"/>
-            <a:ext cx="7955279" cy="3044952"/>
-          </a:xfrm>
-        </p:spPr>
-        <p:txBody>
-          <a:bodyPr wrap="square" tIns="91440" bIns="91440">
-            <a:noAutofit/>
-          </a:bodyPr>
-          <a:lstStyle/>
-          <a:p>
-            <a:pPr marL="457200" indent="-355600">
-              <a:lnSpc>
-                <a:spcPts val="2618"/>
-              </a:lnSpc>
-              <a:spcAft>
-                <a:spcPts val="700"/>
-              </a:spcAft>
-              <a:buSzPct val="60455"/>
-              <a:buFont typeface="Noto Sans CJK JP"/>
-              <a:buChar char="●"/>
-              <a:defRPr sz="2200" b="0">
-                <a:solidFill>
-                  <a:srgbClr val="303437"/>
-                </a:solidFill>
-                <a:latin typeface="Noto Sans"/>
-              </a:defRPr>
-            </a:pPr>
-            <a:r>
-              <a:rPr sz="2200" b="0" lang="ja-JP" altLang="en-US">
-                <a:solidFill>
-                  <a:srgbClr val="303437"/>
-                </a:solidFill>
-                <a:latin typeface="Noto Sans"/>
-                <a:ea typeface="Noto Sans CJK JP"/>
-                <a:cs typeface="Noto Sans"/>
-              </a:rPr>
-              <a:t>EUが公開する法令本文と、人が書いた説明用の要約を組にした、2022年のデータセット。</a:t>
-            </a:r>
-          </a:p>
-          <a:p>
-            <a:pPr marL="457200" indent="-355600">
-              <a:lnSpc>
-                <a:spcPts val="2618"/>
-              </a:lnSpc>
-              <a:spcAft>
-                <a:spcPts val="700"/>
-              </a:spcAft>
-              <a:buSzPct val="60455"/>
-              <a:buFont typeface="Noto Sans CJK JP"/>
-              <a:buChar char="●"/>
-              <a:defRPr sz="2200" b="0">
-                <a:solidFill>
-                  <a:srgbClr val="303437"/>
-                </a:solidFill>
-                <a:latin typeface="Noto Sans"/>
-              </a:defRPr>
-            </a:pPr>
-            <a:r>
-              <a:rPr sz="2200" b="0" lang="ja-JP" altLang="en-US">
-                <a:solidFill>
-                  <a:srgbClr val="303437"/>
-                </a:solidFill>
-                <a:latin typeface="Noto Sans"/>
-                <a:ea typeface="Noto Sans CJK JP"/>
-                <a:cs typeface="Noto Sans"/>
-              </a:rPr>
-              <a:t>入力は法令本文、出力は要約。本文の一部を選ぶ抽出型と、新しい文で書く生成型の両方を評価できる。</a:t>
-            </a:r>
-          </a:p>
-          <a:p>
-            <a:pPr marL="457200" indent="-355600">
-              <a:lnSpc>
-                <a:spcPts val="2618"/>
-              </a:lnSpc>
-              <a:spcAft>
-                <a:spcPts val="0"/>
-              </a:spcAft>
-              <a:buSzPct val="60455"/>
-              <a:buFont typeface="Noto Sans CJK JP"/>
-              <a:buChar char="●"/>
-              <a:defRPr sz="2200" b="0">
-                <a:solidFill>
-                  <a:srgbClr val="303437"/>
-                </a:solidFill>
-                <a:latin typeface="Noto Sans"/>
-              </a:defRPr>
-            </a:pPr>
-            <a:r>
-              <a:rPr sz="2200" b="0" lang="ja-JP" altLang="en-US">
-                <a:solidFill>
-                  <a:srgbClr val="303437"/>
-                </a:solidFill>
-                <a:latin typeface="Noto Sans"/>
-                <a:ea typeface="Noto Sans CJK JP"/>
-                <a:cs typeface="Noto Sans"/>
-              </a:rPr>
-              <a:t>最大24言語で同じ法令と要約が対応し、英語入力から別言語の要約を作る課題にも使う。</a:t>
-            </a:r>
-          </a:p>
-        </p:txBody>
-      </p:sp>
-      <p:sp>
-        <p:nvSpPr>
-          <p:cNvPr id="4" name="Title 3"/>
-          <p:cNvSpPr>
-            <a:spLocks noGrp="1"/>
-          </p:cNvSpPr>
-          <p:nvPr>
-            <p:ph type="title" idx="2"/>
-          </p:nvPr>
-        </p:nvSpPr>
-        <p:spPr>
-          <a:xfrm>
-            <a:off x="75895" y="0"/>
-            <a:ext cx="8115300" cy="480060"/>
-          </a:xfrm>
-        </p:spPr>
-        <p:txBody>
-          <a:bodyPr wrap="square" lIns="0" rIns="0" tIns="0" bIns="0" anchor="ctr">
-            <a:noAutofit/>
-          </a:bodyPr>
-          <a:lstStyle/>
-          <a:p>
-            <a:pPr algn="l">
-              <a:lnSpc>
-                <a:spcPct val="110000"/>
-              </a:lnSpc>
-              <a:buNone/>
-              <a:defRPr sz="1400" b="0">
-                <a:solidFill>
-                  <a:srgbClr val="303437"/>
-                </a:solidFill>
-                <a:latin typeface="Noto Sans"/>
-              </a:defRPr>
-            </a:pPr>
-            <a:r>
-              <a:rPr sz="1400" b="1" lang="ja-JP" altLang="en-US">
-                <a:solidFill>
-                  <a:srgbClr val="FFFEF8"/>
-                </a:solidFill>
-                <a:latin typeface="Noto Sans"/>
-                <a:ea typeface="Noto Sans CJK JP"/>
-                <a:cs typeface="Noto Sans"/>
-              </a:rPr>
-              <a:t>1. 法令と要約を対応させる</a:t>
-            </a:r>
-          </a:p>
-        </p:txBody>
-      </p:sp>
-      <p:sp>
-        <p:nvSpPr>
-          <p:cNvPr id="5" name="sources"/>
-          <p:cNvSpPr txBox="1"/>
-          <p:nvPr/>
-        </p:nvSpPr>
-        <p:spPr>
-          <a:xfrm>
-            <a:off x="502920" y="4700016"/>
-            <a:ext cx="8183879" cy="530352"/>
-          </a:xfrm>
-          <a:prstGeom prst="rect">
-            <a:avLst/>
-          </a:prstGeom>
-          <a:noFill/>
-        </p:spPr>
-        <p:txBody>
-          <a:bodyPr wrap="square" lIns="0" rIns="0" tIns="0" bIns="0">
-            <a:noAutofit/>
-          </a:bodyPr>
-          <a:lstStyle/>
-          <a:p>
-            <a:pPr algn="l">
-              <a:lnSpc>
-                <a:spcPts val="940"/>
-              </a:lnSpc>
-              <a:spcBef>
-                <a:spcPts val="0"/>
-              </a:spcBef>
-              <a:spcAft>
-                <a:spcPts val="140"/>
-              </a:spcAft>
-              <a:buNone/>
-              <a:defRPr sz="810" b="0">
-                <a:solidFill>
-                  <a:srgbClr val="303437"/>
-                </a:solidFill>
-                <a:latin typeface="Noto Sans"/>
-              </a:defRPr>
-            </a:pPr>
-            <a:r>
-              <a:rPr sz="810" b="0" lang="ja-JP" altLang="en-US">
-                <a:solidFill>
-                  <a:srgbClr val="626669"/>
-                </a:solidFill>
-                <a:latin typeface="Noto Sans"/>
-                <a:ea typeface="Noto Sans CJK JP"/>
-                <a:cs typeface="Noto Sans"/>
-              </a:rPr>
-              <a:t>[1] Aumiller, Chouhan &amp; Gertz (2022), EUR-Lex-Sum: A Multi- and Cross-lingual Dataset for Long-form Summarization in the Legal Domain. EMNLP.</a:t>
-            </a:r>
-          </a:p>
-          <a:p>
-            <a:pPr>
-              <a:lnSpc>
-                <a:spcPts val="940"/>
-              </a:lnSpc>
-              <a:buNone/>
-              <a:defRPr sz="810" b="0">
-                <a:solidFill>
-                  <a:srgbClr val="303437"/>
-                </a:solidFill>
-                <a:latin typeface="Noto Sans"/>
-              </a:defRPr>
-            </a:pPr>
-            <a:r>
-              <a:rPr sz="810" b="0" lang="ja-JP" altLang="en-US">
-                <a:solidFill>
-                  <a:srgbClr val="626669"/>
-                </a:solidFill>
-                <a:latin typeface="Noto Sans"/>
-                <a:ea typeface="Noto Sans CJK JP"/>
-                <a:cs typeface="Noto Sans"/>
-                <a:hlinkClick r:id="rId2"/>
-              </a:rPr>
-              <a:t>https://aclanthology.org/2022.emnlp-main.519/</a:t>
-            </a:r>
-          </a:p>
-        </p:txBody>
-      </p:sp>
-    </p:spTree>
-  </p:cSld>
-  <p:clrMapOvr>
-    <a:masterClrMapping/>
-  </p:clrMapOvr>
-</p:sld>
-</file>
-
-<file path=ppt/slides/slide50.xml><?xml version="1.0" encoding="utf-8"?>
+<file path=ppt/slides/slide49.xml><?xml version="1.0" encoding="utf-8"?>
 <p:sld xmlns:a="http://schemas.openxmlformats.org/drawingml/2006/main" xmlns:p="http://schemas.openxmlformats.org/presentationml/2006/main" xmlns:r="http://schemas.openxmlformats.org/officeDocument/2006/relationships">
   <p:cSld>
     <p:spTree>
@@ -25602,22 +24301,8 @@
                 <a:ea typeface="Noto Sans CJK JP"/>
                 <a:cs typeface="Noto Sans"/>
               </a:rPr>
-              <a:t>[1] Aumiller et al., EUR-Lex-Sum. 固定HF revision 33ecb2d、test実レコード。 32021R0691 ／ english ／ test row 67（0始まり）</a:t>
-            </a:r>
-          </a:p>
-          <a:p>
-            <a:pPr>
-              <a:lnSpc>
-                <a:spcPts val="940"/>
-              </a:lnSpc>
-              <a:buNone/>
-              <a:defRPr sz="810" b="0">
-                <a:solidFill>
-                  <a:srgbClr val="303437"/>
-                </a:solidFill>
-                <a:latin typeface="Noto Sans"/>
-              </a:defRPr>
-            </a:pPr>
+              <a:t>[1] Aumiller et al. EUR-Lex-Sum. 32021R0691 ／ english  </a:t>
+            </a:r>
             <a:r>
               <a:rPr sz="810" b="0" lang="ja-JP" altLang="en-US">
                 <a:solidFill>
@@ -25641,7 +24326,314 @@
 </p:sld>
 </file>
 
-<file path=ppt/slides/slide51.xml><?xml version="1.0" encoding="utf-8"?>
+<file path=ppt/slides/slide5.xml><?xml version="1.0" encoding="utf-8"?>
+<p:sld xmlns:a="http://schemas.openxmlformats.org/drawingml/2006/main" xmlns:p="http://schemas.openxmlformats.org/presentationml/2006/main" xmlns:r="http://schemas.openxmlformats.org/officeDocument/2006/relationships">
+  <p:cSld>
+    <p:spTree>
+      <p:nvGrpSpPr>
+        <p:cNvPr id="1" name=""/>
+        <p:cNvGrpSpPr/>
+        <p:nvPr/>
+      </p:nvGrpSpPr>
+      <p:grpSpPr/>
+      <p:sp>
+        <p:nvSpPr>
+          <p:cNvPr id="2" name="Title 1"/>
+          <p:cNvSpPr>
+            <a:spLocks noGrp="1"/>
+          </p:cNvSpPr>
+          <p:nvPr>
+            <p:ph type="title"/>
+          </p:nvPr>
+        </p:nvSpPr>
+        <p:spPr>
+          <a:xfrm>
+            <a:off x="468172" y="650138"/>
+            <a:ext cx="8206740" cy="616305"/>
+          </a:xfrm>
+        </p:spPr>
+        <p:txBody>
+          <a:bodyPr wrap="square" lIns="0" rIns="0" tIns="0" bIns="0">
+            <a:noAutofit/>
+          </a:bodyPr>
+          <a:lstStyle/>
+          <a:p>
+            <a:pPr algn="l">
+              <a:lnSpc>
+                <a:spcPct val="110000"/>
+              </a:lnSpc>
+              <a:buNone/>
+              <a:defRPr sz="2800" b="0">
+                <a:solidFill>
+                  <a:srgbClr val="303437"/>
+                </a:solidFill>
+                <a:latin typeface="Noto Sans"/>
+              </a:defRPr>
+            </a:pPr>
+            <a:r>
+              <a:rPr sz="2800" b="1" lang="ja-JP" altLang="en-US">
+                <a:solidFill>
+                  <a:srgbClr val="303437"/>
+                </a:solidFill>
+                <a:latin typeface="Noto Sans"/>
+                <a:ea typeface="Noto Sans CJK JP"/>
+                <a:cs typeface="Noto Sans"/>
+              </a:rPr>
+              <a:t>長い法令から、制度の要点をまとめる</a:t>
+            </a:r>
+          </a:p>
+        </p:txBody>
+      </p:sp>
+      <p:sp>
+        <p:nvSpPr>
+          <p:cNvPr id="3" name="Text Placeholder 2"/>
+          <p:cNvSpPr>
+            <a:spLocks noGrp="1"/>
+          </p:cNvSpPr>
+          <p:nvPr>
+            <p:ph type="body" idx="1"/>
+          </p:nvPr>
+        </p:nvSpPr>
+        <p:spPr>
+          <a:xfrm>
+            <a:off x="594360" y="1463040"/>
+            <a:ext cx="7955279" cy="3044952"/>
+          </a:xfrm>
+        </p:spPr>
+        <p:txBody>
+          <a:bodyPr wrap="square" tIns="91440" bIns="91440">
+            <a:noAutofit/>
+          </a:bodyPr>
+          <a:lstStyle/>
+          <a:p>
+            <a:pPr marL="457200" indent="-355600">
+              <a:lnSpc>
+                <a:spcPts val="2618"/>
+              </a:lnSpc>
+              <a:spcAft>
+                <a:spcPts val="700"/>
+              </a:spcAft>
+              <a:buSzPct val="60455"/>
+              <a:buFont typeface="Noto Sans CJK JP"/>
+              <a:buChar char="●"/>
+              <a:defRPr sz="2200" b="0">
+                <a:solidFill>
+                  <a:srgbClr val="303437"/>
+                </a:solidFill>
+                <a:latin typeface="Noto Sans"/>
+              </a:defRPr>
+            </a:pPr>
+            <a:r>
+              <a:rPr sz="2200" b="0" lang="ja-JP" altLang="en-US">
+                <a:solidFill>
+                  <a:srgbClr val="303437"/>
+                </a:solidFill>
+                <a:latin typeface="Noto Sans"/>
+                <a:ea typeface="Noto Sans CJK JP"/>
+                <a:cs typeface="Noto Sans"/>
+              </a:rPr>
+              <a:t>EUが公開する法令本文と、人が書いた説明用の要約を組にした、2022年のデータセット。</a:t>
+            </a:r>
+          </a:p>
+          <a:p>
+            <a:pPr marL="457200" indent="-355600">
+              <a:lnSpc>
+                <a:spcPts val="2618"/>
+              </a:lnSpc>
+              <a:spcAft>
+                <a:spcPts val="700"/>
+              </a:spcAft>
+              <a:buSzPct val="60455"/>
+              <a:buFont typeface="Noto Sans CJK JP"/>
+              <a:buChar char="●"/>
+              <a:defRPr sz="2200" b="0">
+                <a:solidFill>
+                  <a:srgbClr val="303437"/>
+                </a:solidFill>
+                <a:latin typeface="Noto Sans"/>
+              </a:defRPr>
+            </a:pPr>
+            <a:r>
+              <a:rPr sz="2200" b="0" lang="ja-JP" altLang="en-US">
+                <a:solidFill>
+                  <a:srgbClr val="303437"/>
+                </a:solidFill>
+                <a:latin typeface="Noto Sans"/>
+                <a:ea typeface="Noto Sans CJK JP"/>
+                <a:cs typeface="Noto Sans"/>
+              </a:rPr>
+              <a:t>入力は法令本文、出力は要約。本文の一部を選ぶ抽出型と、新しい文で書く生成型の両方を評価できる。</a:t>
+            </a:r>
+          </a:p>
+          <a:p>
+            <a:pPr marL="457200" indent="-355600">
+              <a:lnSpc>
+                <a:spcPts val="2618"/>
+              </a:lnSpc>
+              <a:spcAft>
+                <a:spcPts val="0"/>
+              </a:spcAft>
+              <a:buSzPct val="60455"/>
+              <a:buFont typeface="Noto Sans CJK JP"/>
+              <a:buChar char="●"/>
+              <a:defRPr sz="2200" b="0">
+                <a:solidFill>
+                  <a:srgbClr val="303437"/>
+                </a:solidFill>
+                <a:latin typeface="Noto Sans"/>
+              </a:defRPr>
+            </a:pPr>
+            <a:r>
+              <a:rPr sz="2200" b="0" lang="ja-JP" altLang="en-US">
+                <a:solidFill>
+                  <a:srgbClr val="303437"/>
+                </a:solidFill>
+                <a:latin typeface="Noto Sans"/>
+                <a:ea typeface="Noto Sans CJK JP"/>
+                <a:cs typeface="Noto Sans"/>
+              </a:rPr>
+              <a:t>最大24言語で同じ法令と要約が対応し、英語入力から別言語の要約を作る課題にも使う。</a:t>
+            </a:r>
+          </a:p>
+        </p:txBody>
+      </p:sp>
+      <p:sp>
+        <p:nvSpPr>
+          <p:cNvPr id="4" name="Title 3"/>
+          <p:cNvSpPr>
+            <a:spLocks noGrp="1"/>
+          </p:cNvSpPr>
+          <p:nvPr>
+            <p:ph type="title" idx="2"/>
+          </p:nvPr>
+        </p:nvSpPr>
+        <p:spPr>
+          <a:xfrm>
+            <a:off x="75895" y="0"/>
+            <a:ext cx="8115300" cy="480060"/>
+          </a:xfrm>
+        </p:spPr>
+        <p:txBody>
+          <a:bodyPr wrap="square" lIns="0" rIns="0" tIns="0" bIns="0" anchor="ctr">
+            <a:noAutofit/>
+          </a:bodyPr>
+          <a:lstStyle/>
+          <a:p>
+            <a:pPr algn="l">
+              <a:lnSpc>
+                <a:spcPct val="110000"/>
+              </a:lnSpc>
+              <a:buNone/>
+              <a:defRPr sz="1400" b="0">
+                <a:solidFill>
+                  <a:srgbClr val="303437"/>
+                </a:solidFill>
+                <a:latin typeface="Noto Sans"/>
+              </a:defRPr>
+            </a:pPr>
+            <a:r>
+              <a:rPr sz="1400" b="1" lang="ja-JP" altLang="en-US">
+                <a:solidFill>
+                  <a:srgbClr val="FFFEF8"/>
+                </a:solidFill>
+                <a:latin typeface="Noto Sans"/>
+                <a:ea typeface="Noto Sans CJK JP"/>
+                <a:cs typeface="Noto Sans"/>
+              </a:rPr>
+              <a:t>1. 法令と要約を対応させる</a:t>
+            </a:r>
+          </a:p>
+        </p:txBody>
+      </p:sp>
+      <p:sp>
+        <p:nvSpPr>
+          <p:cNvPr id="5" name="sources"/>
+          <p:cNvSpPr txBox="1"/>
+          <p:nvPr/>
+        </p:nvSpPr>
+        <p:spPr>
+          <a:xfrm>
+            <a:off x="502920" y="4700016"/>
+            <a:ext cx="8183879" cy="530352"/>
+          </a:xfrm>
+          <a:prstGeom prst="rect">
+            <a:avLst/>
+          </a:prstGeom>
+          <a:noFill/>
+        </p:spPr>
+        <p:txBody>
+          <a:bodyPr wrap="square" lIns="0" rIns="0" tIns="0" bIns="0">
+            <a:noAutofit/>
+          </a:bodyPr>
+          <a:lstStyle/>
+          <a:p>
+            <a:pPr algn="l">
+              <a:lnSpc>
+                <a:spcPts val="940"/>
+              </a:lnSpc>
+              <a:spcBef>
+                <a:spcPts val="0"/>
+              </a:spcBef>
+              <a:spcAft>
+                <a:spcPts val="140"/>
+              </a:spcAft>
+              <a:buNone/>
+              <a:defRPr sz="810" b="0">
+                <a:solidFill>
+                  <a:srgbClr val="303437"/>
+                </a:solidFill>
+                <a:latin typeface="Noto Sans"/>
+              </a:defRPr>
+            </a:pPr>
+            <a:r>
+              <a:rPr sz="810" b="0" lang="ja-JP" altLang="en-US">
+                <a:solidFill>
+                  <a:srgbClr val="626669"/>
+                </a:solidFill>
+                <a:latin typeface="Noto Sans"/>
+                <a:ea typeface="Noto Sans CJK JP"/>
+                <a:cs typeface="Noto Sans"/>
+              </a:rPr>
+              <a:t>[1] Aumiller, Chouhan &amp; Gertz (2022), EUR-Lex-Sum: A Multi- and Cross-lingual Dataset for Long-form Summarization in the Legal Domain. EMNLP.</a:t>
+            </a:r>
+          </a:p>
+          <a:p>
+            <a:pPr>
+              <a:lnSpc>
+                <a:spcPts val="940"/>
+              </a:lnSpc>
+              <a:buNone/>
+              <a:defRPr sz="810" b="0">
+                <a:solidFill>
+                  <a:srgbClr val="303437"/>
+                </a:solidFill>
+                <a:latin typeface="Noto Sans"/>
+              </a:defRPr>
+            </a:pPr>
+            <a:r>
+              <a:rPr sz="810" b="0" lang="ja-JP" altLang="en-US">
+                <a:solidFill>
+                  <a:srgbClr val="626669"/>
+                </a:solidFill>
+                <a:latin typeface="Noto Sans"/>
+                <a:ea typeface="Noto Sans CJK JP"/>
+                <a:cs typeface="Noto Sans"/>
+                <a:hlinkClick r:id="rId2"/>
+              </a:rPr>
+              <a:t>https://aclanthology.org/2022.emnlp-main.519/</a:t>
+            </a:r>
+          </a:p>
+        </p:txBody>
+      </p:sp>
+    </p:spTree>
+  </p:cSld>
+  <p:clrMapOvr>
+    <a:masterClrMapping/>
+  </p:clrMapOvr>
+</p:sld>
+</file>
+
+<file path=ppt/slides/slide50.xml><?xml version="1.0" encoding="utf-8"?>
 <p:sld xmlns:a="http://schemas.openxmlformats.org/drawingml/2006/main" xmlns:p="http://schemas.openxmlformats.org/presentationml/2006/main" xmlns:r="http://schemas.openxmlformats.org/officeDocument/2006/relationships">
   <p:cSld>
     <p:spTree>
@@ -26017,22 +25009,8 @@
                 <a:ea typeface="Noto Sans CJK JP"/>
                 <a:cs typeface="Noto Sans"/>
               </a:rPr>
-              <a:t>[1] Aumiller et al., EUR-Lex-Sum. 固定HF revision 33ecb2d、test実レコード。 32021R0691 ／ english ／ test row 67（0始まり）</a:t>
-            </a:r>
-          </a:p>
-          <a:p>
-            <a:pPr>
-              <a:lnSpc>
-                <a:spcPts val="940"/>
-              </a:lnSpc>
-              <a:buNone/>
-              <a:defRPr sz="810" b="0">
-                <a:solidFill>
-                  <a:srgbClr val="303437"/>
-                </a:solidFill>
-                <a:latin typeface="Noto Sans"/>
-              </a:defRPr>
-            </a:pPr>
+              <a:t>[1] Aumiller et al. EUR-Lex-Sum. 32021R0691 ／ english  </a:t>
+            </a:r>
             <a:r>
               <a:rPr sz="810" b="0" lang="ja-JP" altLang="en-US">
                 <a:solidFill>
@@ -26056,7 +25034,7 @@
 </p:sld>
 </file>
 
-<file path=ppt/slides/slide52.xml><?xml version="1.0" encoding="utf-8"?>
+<file path=ppt/slides/slide51.xml><?xml version="1.0" encoding="utf-8"?>
 <p:sld xmlns:a="http://schemas.openxmlformats.org/drawingml/2006/main" xmlns:p="http://schemas.openxmlformats.org/presentationml/2006/main" xmlns:r="http://schemas.openxmlformats.org/officeDocument/2006/relationships">
   <p:cSld>
     <p:spTree>
@@ -26391,8 +25369,8 @@
         </p:nvSpPr>
         <p:spPr>
           <a:xfrm>
-            <a:off x="5303520" y="1554480"/>
-            <a:ext cx="3291839" cy="2847118"/>
+            <a:off x="5303520" y="1513840"/>
+            <a:ext cx="3291839" cy="3126518"/>
           </a:xfrm>
           <a:prstGeom prst="rect">
             <a:avLst/>
@@ -26483,7 +25461,7 @@
                 <a:ea typeface="Noto Sans CJK JP"/>
                 <a:cs typeface="Noto Sans"/>
               </a:rPr>
-              <a:t>1. この規則は、香味付けワイン製品の定義、説明、提示、表示に関する規則と、その地理的表示の保護に関する規則を定める。</a:t>
+              <a:t>1. この規則は、香味付けワイン製品の定義、特性の記述、商品の見せ方、ラベル表示に関する規則と、その地理的表示の保護に関する規則を定める。</a:t>
             </a:r>
           </a:p>
           <a:p>
@@ -26599,22 +25577,8 @@
                 <a:ea typeface="Noto Sans CJK JP"/>
                 <a:cs typeface="Noto Sans"/>
               </a:rPr>
-              <a:t>[1] Aumiller et al., EUR-Lex-Sum. 固定HF revision 33ecb2d、test実レコード。 32014R0251 ／ english ／ test row 85（0始まり）</a:t>
-            </a:r>
-          </a:p>
-          <a:p>
-            <a:pPr>
-              <a:lnSpc>
-                <a:spcPts val="940"/>
-              </a:lnSpc>
-              <a:buNone/>
-              <a:defRPr sz="810" b="0">
-                <a:solidFill>
-                  <a:srgbClr val="303437"/>
-                </a:solidFill>
-                <a:latin typeface="Noto Sans"/>
-              </a:defRPr>
-            </a:pPr>
+              <a:t>[1] Aumiller et al. EUR-Lex-Sum. 32014R0251 ／ english  </a:t>
+            </a:r>
             <a:r>
               <a:rPr sz="810" b="0" lang="ja-JP" altLang="en-US">
                 <a:solidFill>
@@ -26638,7 +25602,7 @@
 </p:sld>
 </file>
 
-<file path=ppt/slides/slide53.xml><?xml version="1.0" encoding="utf-8"?>
+<file path=ppt/slides/slide52.xml><?xml version="1.0" encoding="utf-8"?>
 <p:sld xmlns:a="http://schemas.openxmlformats.org/drawingml/2006/main" xmlns:p="http://schemas.openxmlformats.org/presentationml/2006/main" xmlns:r="http://schemas.openxmlformats.org/officeDocument/2006/relationships">
   <p:cSld>
     <p:spTree>
@@ -27181,22 +26145,8 @@
                 <a:ea typeface="Noto Sans CJK JP"/>
                 <a:cs typeface="Noto Sans"/>
               </a:rPr>
-              <a:t>[1] Aumiller et al., EUR-Lex-Sum. 固定HF revision 33ecb2d、test実レコード。 32008R0452 ／ english ／ test row 180（0始まり）</a:t>
-            </a:r>
-          </a:p>
-          <a:p>
-            <a:pPr>
-              <a:lnSpc>
-                <a:spcPts val="940"/>
-              </a:lnSpc>
-              <a:buNone/>
-              <a:defRPr sz="810" b="0">
-                <a:solidFill>
-                  <a:srgbClr val="303437"/>
-                </a:solidFill>
-                <a:latin typeface="Noto Sans"/>
-              </a:defRPr>
-            </a:pPr>
+              <a:t>[1] Aumiller et al. EUR-Lex-Sum. 32008R0452 ／ english  </a:t>
+            </a:r>
             <a:r>
               <a:rPr sz="810" b="0" lang="ja-JP" altLang="en-US">
                 <a:solidFill>
@@ -27220,7 +26170,7 @@
 </p:sld>
 </file>
 
-<file path=ppt/slides/slide54.xml><?xml version="1.0" encoding="utf-8"?>
+<file path=ppt/slides/slide53.xml><?xml version="1.0" encoding="utf-8"?>
 <p:sld xmlns:a="http://schemas.openxmlformats.org/drawingml/2006/main" xmlns:p="http://schemas.openxmlformats.org/presentationml/2006/main" xmlns:r="http://schemas.openxmlformats.org/officeDocument/2006/relationships">
   <p:cSld>
     <p:spTree>
@@ -27334,7 +26284,7 @@
 </p:sld>
 </file>
 
-<file path=ppt/slides/slide55.xml><?xml version="1.0" encoding="utf-8"?>
+<file path=ppt/slides/slide54.xml><?xml version="1.0" encoding="utf-8"?>
 <p:sld xmlns:a="http://schemas.openxmlformats.org/drawingml/2006/main" xmlns:p="http://schemas.openxmlformats.org/presentationml/2006/main" xmlns:r="http://schemas.openxmlformats.org/officeDocument/2006/relationships">
   <p:cSld>
     <p:spTree>
@@ -28707,7 +27657,7 @@
 </p:sld>
 </file>
 
-<file path=ppt/slides/slide56.xml><?xml version="1.0" encoding="utf-8"?>
+<file path=ppt/slides/slide55.xml><?xml version="1.0" encoding="utf-8"?>
 <p:sld xmlns:a="http://schemas.openxmlformats.org/drawingml/2006/main" xmlns:p="http://schemas.openxmlformats.org/presentationml/2006/main" xmlns:r="http://schemas.openxmlformats.org/officeDocument/2006/relationships">
   <p:cSld>
     <p:spTree>
@@ -30080,7 +29030,7 @@
 </p:sld>
 </file>
 
-<file path=ppt/slides/slide57.xml><?xml version="1.0" encoding="utf-8"?>
+<file path=ppt/slides/slide56.xml><?xml version="1.0" encoding="utf-8"?>
 <p:sld xmlns:a="http://schemas.openxmlformats.org/drawingml/2006/main" xmlns:p="http://schemas.openxmlformats.org/presentationml/2006/main" xmlns:r="http://schemas.openxmlformats.org/officeDocument/2006/relationships">
   <p:cSld>
     <p:spTree>
@@ -31453,7 +30403,7 @@
 </p:sld>
 </file>
 
-<file path=ppt/slides/slide58.xml><?xml version="1.0" encoding="utf-8"?>
+<file path=ppt/slides/slide57.xml><?xml version="1.0" encoding="utf-8"?>
 <p:sld xmlns:a="http://schemas.openxmlformats.org/drawingml/2006/main" xmlns:p="http://schemas.openxmlformats.org/presentationml/2006/main" xmlns:r="http://schemas.openxmlformats.org/officeDocument/2006/relationships">
   <p:cSld>
     <p:spTree>
@@ -32826,6 +31776,283 @@
 </p:sld>
 </file>
 
+<file path=ppt/slides/slide58.xml><?xml version="1.0" encoding="utf-8"?>
+<p:sld xmlns:a="http://schemas.openxmlformats.org/drawingml/2006/main" xmlns:p="http://schemas.openxmlformats.org/presentationml/2006/main" xmlns:r="http://schemas.openxmlformats.org/officeDocument/2006/relationships">
+  <p:cSld>
+    <p:spTree>
+      <p:nvGrpSpPr>
+        <p:cNvPr id="1" name=""/>
+        <p:cNvGrpSpPr/>
+        <p:nvPr/>
+      </p:nvGrpSpPr>
+      <p:grpSpPr/>
+      <p:sp>
+        <p:nvSpPr>
+          <p:cNvPr id="2" name="Title 1"/>
+          <p:cNvSpPr>
+            <a:spLocks noGrp="1"/>
+          </p:cNvSpPr>
+          <p:nvPr>
+            <p:ph type="title"/>
+          </p:nvPr>
+        </p:nvSpPr>
+        <p:spPr>
+          <a:xfrm>
+            <a:off x="468172" y="650138"/>
+            <a:ext cx="8206740" cy="616305"/>
+          </a:xfrm>
+        </p:spPr>
+        <p:txBody>
+          <a:bodyPr wrap="square" lIns="0" rIns="0" tIns="0" bIns="0">
+            <a:noAutofit/>
+          </a:bodyPr>
+          <a:lstStyle/>
+          <a:p>
+            <a:pPr algn="l">
+              <a:lnSpc>
+                <a:spcPct val="110000"/>
+              </a:lnSpc>
+              <a:buNone/>
+              <a:defRPr sz="2800" b="0">
+                <a:solidFill>
+                  <a:srgbClr val="303437"/>
+                </a:solidFill>
+                <a:latin typeface="Noto Sans"/>
+              </a:defRPr>
+            </a:pPr>
+            <a:r>
+              <a:rPr sz="2800" b="1" lang="ja-JP" altLang="en-US">
+                <a:solidFill>
+                  <a:srgbClr val="303437"/>
+                </a:solidFill>
+                <a:latin typeface="Noto Sans"/>
+                <a:ea typeface="Noto Sans CJK JP"/>
+                <a:cs typeface="Noto Sans"/>
+              </a:rPr>
+              <a:t>評価用には、新しい法令が多く含まれる</a:t>
+            </a:r>
+          </a:p>
+        </p:txBody>
+      </p:sp>
+      <p:sp>
+        <p:nvSpPr>
+          <p:cNvPr id="3" name="Text Placeholder 2"/>
+          <p:cNvSpPr>
+            <a:spLocks noGrp="1"/>
+          </p:cNvSpPr>
+          <p:nvPr>
+            <p:ph type="body" idx="1"/>
+          </p:nvPr>
+        </p:nvSpPr>
+        <p:spPr>
+          <a:xfrm>
+            <a:off x="594360" y="1463040"/>
+            <a:ext cx="7955279" cy="3044952"/>
+          </a:xfrm>
+        </p:spPr>
+        <p:txBody>
+          <a:bodyPr wrap="square" tIns="91440" bIns="91440">
+            <a:noAutofit/>
+          </a:bodyPr>
+          <a:lstStyle/>
+          <a:p>
+            <a:pPr marL="457200" indent="-355600">
+              <a:lnSpc>
+                <a:spcPts val="2618"/>
+              </a:lnSpc>
+              <a:spcAft>
+                <a:spcPts val="700"/>
+              </a:spcAft>
+              <a:buSzPct val="60455"/>
+              <a:buFont typeface="Noto Sans CJK JP"/>
+              <a:buChar char="●"/>
+              <a:defRPr sz="2200" b="0">
+                <a:solidFill>
+                  <a:srgbClr val="303437"/>
+                </a:solidFill>
+                <a:latin typeface="Noto Sans"/>
+              </a:defRPr>
+            </a:pPr>
+            <a:r>
+              <a:rPr sz="2200" b="0" lang="ja-JP" altLang="en-US">
+                <a:solidFill>
+                  <a:srgbClr val="303437"/>
+                </a:solidFill>
+                <a:latin typeface="Noto Sans"/>
+                <a:ea typeface="Noto Sans CJK JP"/>
+                <a:cs typeface="Noto Sans"/>
+              </a:rPr>
+              <a:t>公表分析では、収録法令は1990年以降に増える。HTMLでの公開と要約の利用可能性に依存する。</a:t>
+            </a:r>
+          </a:p>
+          <a:p>
+            <a:pPr marL="457200" indent="-355600">
+              <a:lnSpc>
+                <a:spcPts val="2618"/>
+              </a:lnSpc>
+              <a:spcAft>
+                <a:spcPts val="700"/>
+              </a:spcAft>
+              <a:buSzPct val="60455"/>
+              <a:buFont typeface="Noto Sans CJK JP"/>
+              <a:buChar char="●"/>
+              <a:defRPr sz="2200" b="0">
+                <a:solidFill>
+                  <a:srgbClr val="303437"/>
+                </a:solidFill>
+                <a:latin typeface="Noto Sans"/>
+              </a:defRPr>
+            </a:pPr>
+            <a:r>
+              <a:rPr sz="2200" b="0" lang="ja-JP" altLang="en-US">
+                <a:solidFill>
+                  <a:srgbClr val="303437"/>
+                </a:solidFill>
+                <a:latin typeface="Noto Sans"/>
+                <a:ea typeface="Noto Sans CJK JP"/>
+                <a:cs typeface="Noto Sans"/>
+              </a:rPr>
+              <a:t>24言語をそろえるvalidation/testは、trainより新しい法令に偏る。翻訳や要約は、法令の初回公開より後に追加される場合もある。</a:t>
+            </a:r>
+          </a:p>
+        </p:txBody>
+      </p:sp>
+      <p:sp>
+        <p:nvSpPr>
+          <p:cNvPr id="4" name="Title 3"/>
+          <p:cNvSpPr>
+            <a:spLocks noGrp="1"/>
+          </p:cNvSpPr>
+          <p:nvPr>
+            <p:ph type="title" idx="2"/>
+          </p:nvPr>
+        </p:nvSpPr>
+        <p:spPr>
+          <a:xfrm>
+            <a:off x="75895" y="0"/>
+            <a:ext cx="8115300" cy="480060"/>
+          </a:xfrm>
+        </p:spPr>
+        <p:txBody>
+          <a:bodyPr wrap="square" lIns="0" rIns="0" tIns="0" bIns="0" anchor="ctr">
+            <a:noAutofit/>
+          </a:bodyPr>
+          <a:lstStyle/>
+          <a:p>
+            <a:pPr algn="l">
+              <a:lnSpc>
+                <a:spcPct val="110000"/>
+              </a:lnSpc>
+              <a:buNone/>
+              <a:defRPr sz="1400" b="0">
+                <a:solidFill>
+                  <a:srgbClr val="303437"/>
+                </a:solidFill>
+                <a:latin typeface="Noto Sans"/>
+              </a:defRPr>
+            </a:pPr>
+            <a:r>
+              <a:rPr sz="1400" b="1" lang="ja-JP" altLang="en-US">
+                <a:solidFill>
+                  <a:srgbClr val="FFFEF8"/>
+                </a:solidFill>
+                <a:latin typeface="Noto Sans"/>
+                <a:ea typeface="Noto Sans CJK JP"/>
+                <a:cs typeface="Noto Sans"/>
+              </a:rPr>
+              <a:t>Appendix: 2. 言語と統計の補足</a:t>
+            </a:r>
+          </a:p>
+        </p:txBody>
+      </p:sp>
+      <p:sp>
+        <p:nvSpPr>
+          <p:cNvPr id="5" name="sources"/>
+          <p:cNvSpPr txBox="1"/>
+          <p:nvPr/>
+        </p:nvSpPr>
+        <p:spPr>
+          <a:xfrm>
+            <a:off x="502920" y="4700016"/>
+            <a:ext cx="8183879" cy="530352"/>
+          </a:xfrm>
+          <a:prstGeom prst="rect">
+            <a:avLst/>
+          </a:prstGeom>
+          <a:noFill/>
+        </p:spPr>
+        <p:txBody>
+          <a:bodyPr wrap="square" lIns="0" rIns="0" tIns="0" bIns="0">
+            <a:noAutofit/>
+          </a:bodyPr>
+          <a:lstStyle/>
+          <a:p>
+            <a:pPr algn="l">
+              <a:lnSpc>
+                <a:spcPts val="940"/>
+              </a:lnSpc>
+              <a:spcBef>
+                <a:spcPts val="0"/>
+              </a:spcBef>
+              <a:spcAft>
+                <a:spcPts val="140"/>
+              </a:spcAft>
+              <a:buNone/>
+              <a:defRPr sz="810" b="0">
+                <a:solidFill>
+                  <a:srgbClr val="303437"/>
+                </a:solidFill>
+                <a:latin typeface="Noto Sans"/>
+              </a:defRPr>
+            </a:pPr>
+            <a:r>
+              <a:rPr sz="810" b="0" lang="ja-JP" altLang="en-US">
+                <a:solidFill>
+                  <a:srgbClr val="626669"/>
+                </a:solidFill>
+                <a:latin typeface="Noto Sans"/>
+                <a:ea typeface="Noto Sans CJK JP"/>
+                <a:cs typeface="Noto Sans"/>
+              </a:rPr>
+              <a:t>[1] Aumiller, Chouhan &amp; Gertz (2022), EUR-Lex-Sum: A Multi- and Cross-lingual Dataset for Long-form Summarization in the Legal Domain. EMNLP.</a:t>
+            </a:r>
+          </a:p>
+          <a:p>
+            <a:pPr>
+              <a:lnSpc>
+                <a:spcPts val="940"/>
+              </a:lnSpc>
+              <a:buNone/>
+              <a:defRPr sz="810" b="0">
+                <a:solidFill>
+                  <a:srgbClr val="303437"/>
+                </a:solidFill>
+                <a:latin typeface="Noto Sans"/>
+              </a:defRPr>
+            </a:pPr>
+            <a:r>
+              <a:rPr sz="810" b="0" lang="ja-JP" altLang="en-US">
+                <a:solidFill>
+                  <a:srgbClr val="626669"/>
+                </a:solidFill>
+                <a:latin typeface="Noto Sans"/>
+                <a:ea typeface="Noto Sans CJK JP"/>
+                <a:cs typeface="Noto Sans"/>
+                <a:hlinkClick r:id="rId2"/>
+              </a:rPr>
+              <a:t>https://aclanthology.org/2022.emnlp-main.519/</a:t>
+            </a:r>
+          </a:p>
+        </p:txBody>
+      </p:sp>
+    </p:spTree>
+  </p:cSld>
+  <p:clrMapOvr>
+    <a:masterClrMapping/>
+  </p:clrMapOvr>
+</p:sld>
+</file>
+
 <file path=ppt/slides/slide59.xml><?xml version="1.0" encoding="utf-8"?>
 <p:sld xmlns:a="http://schemas.openxmlformats.org/drawingml/2006/main" xmlns:p="http://schemas.openxmlformats.org/presentationml/2006/main" xmlns:r="http://schemas.openxmlformats.org/officeDocument/2006/relationships">
   <p:cSld>
@@ -32879,14 +32106,127 @@
                 <a:ea typeface="Noto Sans CJK JP"/>
                 <a:cs typeface="Noto Sans"/>
               </a:rPr>
-              <a:t>英語の長さ：公表値と固定配布の実測</a:t>
+              <a:t>一つの要約に、複数の法令が対応する</a:t>
             </a:r>
           </a:p>
         </p:txBody>
       </p:sp>
       <p:sp>
         <p:nvSpPr>
-          <p:cNvPr id="3" name="Title 2"/>
+          <p:cNvPr id="3" name="Text Placeholder 2"/>
+          <p:cNvSpPr>
+            <a:spLocks noGrp="1"/>
+          </p:cNvSpPr>
+          <p:nvPr>
+            <p:ph type="body" idx="1"/>
+          </p:nvPr>
+        </p:nvSpPr>
+        <p:spPr>
+          <a:xfrm>
+            <a:off x="594360" y="1463040"/>
+            <a:ext cx="7955279" cy="3044952"/>
+          </a:xfrm>
+        </p:spPr>
+        <p:txBody>
+          <a:bodyPr wrap="square" tIns="91440" bIns="91440">
+            <a:noAutofit/>
+          </a:bodyPr>
+          <a:lstStyle/>
+          <a:p>
+            <a:pPr marL="457200" indent="-355600">
+              <a:lnSpc>
+                <a:spcPts val="2558"/>
+              </a:lnSpc>
+              <a:spcAft>
+                <a:spcPts val="700"/>
+              </a:spcAft>
+              <a:buSzPct val="61860"/>
+              <a:buFont typeface="Noto Sans CJK JP"/>
+              <a:buChar char="●"/>
+              <a:defRPr sz="2150" b="0">
+                <a:solidFill>
+                  <a:srgbClr val="303437"/>
+                </a:solidFill>
+                <a:latin typeface="Noto Sans"/>
+              </a:defRPr>
+            </a:pPr>
+            <a:r>
+              <a:rPr sz="2150" b="0" lang="ja-JP" altLang="en-US">
+                <a:solidFill>
+                  <a:srgbClr val="303437"/>
+                </a:solidFill>
+                <a:latin typeface="Noto Sans"/>
+                <a:ea typeface="Noto Sans CJK JP"/>
+                <a:cs typeface="Noto Sans"/>
+              </a:rPr>
+              <a:t>言語によって約20〜30%の要約が複数法令を扱うと報告されている。配布では最長の法令だけを残す。</a:t>
+            </a:r>
+          </a:p>
+          <a:p>
+            <a:pPr marL="457200" indent="-355600">
+              <a:lnSpc>
+                <a:spcPts val="2558"/>
+              </a:lnSpc>
+              <a:spcAft>
+                <a:spcPts val="700"/>
+              </a:spcAft>
+              <a:buSzPct val="61860"/>
+              <a:buFont typeface="Noto Sans CJK JP"/>
+              <a:buChar char="●"/>
+              <a:defRPr sz="2150" b="0">
+                <a:solidFill>
+                  <a:srgbClr val="303437"/>
+                </a:solidFill>
+                <a:latin typeface="Noto Sans"/>
+              </a:defRPr>
+            </a:pPr>
+            <a:r>
+              <a:rPr sz="2150" b="0" lang="ja-JP" altLang="en-US">
+                <a:solidFill>
+                  <a:srgbClr val="303437"/>
+                </a:solidFill>
+                <a:latin typeface="Noto Sans"/>
+                <a:ea typeface="Noto Sans CJK JP"/>
+                <a:cs typeface="Noto Sans"/>
+              </a:rPr>
+              <a:t>入力中にない語句を含む割合には、言い換えだけでなく、入力から除かれた法令の内容も影響し得る。</a:t>
+            </a:r>
+          </a:p>
+          <a:p>
+            <a:pPr marL="457200" indent="-355600">
+              <a:lnSpc>
+                <a:spcPts val="2558"/>
+              </a:lnSpc>
+              <a:spcAft>
+                <a:spcPts val="0"/>
+              </a:spcAft>
+              <a:buSzPct val="61860"/>
+              <a:buFont typeface="Noto Sans CJK JP"/>
+              <a:buChar char="●"/>
+              <a:defRPr sz="2150" b="0">
+                <a:solidFill>
+                  <a:srgbClr val="303437"/>
+                </a:solidFill>
+                <a:latin typeface="Noto Sans"/>
+              </a:defRPr>
+            </a:pPr>
+            <a:r>
+              <a:rPr sz="2150" b="0" lang="ja-JP" altLang="en-US">
+                <a:solidFill>
+                  <a:srgbClr val="303437"/>
+                </a:solidFill>
+                <a:latin typeface="Noto Sans"/>
+                <a:ea typeface="Noto Sans CJK JP"/>
+                <a:cs typeface="Noto Sans"/>
+              </a:rPr>
+              <a:t>法令本文より参照要約が長い組もある。</a:t>
+            </a:r>
+          </a:p>
+        </p:txBody>
+      </p:sp>
+      <p:sp>
+        <p:nvSpPr>
+          <p:cNvPr id="4" name="Title 3"/>
           <p:cNvSpPr>
             <a:spLocks noGrp="1"/>
           </p:cNvSpPr>
@@ -32932,884 +32272,9 @@
           </a:p>
         </p:txBody>
       </p:sp>
-      <p:graphicFrame>
-        <p:nvGraphicFramePr>
-          <p:cNvPr id="4" name="Table 3"/>
-          <p:cNvGraphicFramePr>
-            <a:graphicFrameLocks noGrp="1"/>
-          </p:cNvGraphicFramePr>
-          <p:nvPr/>
-        </p:nvGraphicFramePr>
-        <p:xfrm>
-          <a:off x="548640" y="1508760"/>
-          <a:ext cx="8046720" cy="2103120"/>
-        </p:xfrm>
-        <a:graphic>
-          <a:graphicData uri="http://schemas.openxmlformats.org/drawingml/2006/table">
-            <a:tbl>
-              <a:tblPr firstRow="0" bandRow="0"/>
-              <a:tblGrid>
-                <a:gridCol w="4023360"/>
-                <a:gridCol w="2011680"/>
-                <a:gridCol w="2011680"/>
-              </a:tblGrid>
-              <a:tr h="420624">
-                <a:tc>
-                  <a:txBody>
-                    <a:bodyPr wrap="square">
-                      <a:noAutofit/>
-                    </a:bodyPr>
-                    <a:lstStyle/>
-                    <a:p>
-                      <a:pPr algn="l">
-                        <a:lnSpc>
-                          <a:spcPts val="2127"/>
-                        </a:lnSpc>
-                        <a:buNone/>
-                        <a:defRPr sz="1850" b="0">
-                          <a:solidFill>
-                            <a:srgbClr val="303437"/>
-                          </a:solidFill>
-                          <a:latin typeface="Noto Sans"/>
-                        </a:defRPr>
-                      </a:pPr>
-                      <a:r>
-                        <a:rPr sz="1850" b="0" lang="ja-JP" altLang="en-US">
-                          <a:solidFill>
-                            <a:srgbClr val="303437"/>
-                          </a:solidFill>
-                          <a:latin typeface="Noto Sans"/>
-                          <a:ea typeface="Noto Sans CJK JP"/>
-                          <a:cs typeface="Noto Sans"/>
-                        </a:rPr>
-                        <a:t>対象</a:t>
-                      </a:r>
-                    </a:p>
-                  </a:txBody>
-                  <a:tcPr marL="63500" marR="63500" marT="38100" marB="38100" anchor="ctr">
-                    <a:lnL w="7620">
-                      <a:noFill/>
-                    </a:lnL>
-                    <a:lnR w="7620">
-                      <a:noFill/>
-                    </a:lnR>
-                    <a:lnT w="15240">
-                      <a:solidFill>
-                        <a:srgbClr val="626669"/>
-                      </a:solidFill>
-                      <a:prstDash val="solid"/>
-                    </a:lnT>
-                    <a:lnB w="7620">
-                      <a:solidFill>
-                        <a:srgbClr val="626669"/>
-                      </a:solidFill>
-                      <a:prstDash val="solid"/>
-                    </a:lnB>
-                    <a:solidFill>
-                      <a:srgbClr val="FFFEF8"/>
-                    </a:solidFill>
-                  </a:tcPr>
-                </a:tc>
-                <a:tc>
-                  <a:txBody>
-                    <a:bodyPr wrap="square">
-                      <a:noAutofit/>
-                    </a:bodyPr>
-                    <a:lstStyle/>
-                    <a:p>
-                      <a:pPr algn="r">
-                        <a:lnSpc>
-                          <a:spcPts val="2127"/>
-                        </a:lnSpc>
-                        <a:buNone/>
-                        <a:defRPr sz="1850" b="0">
-                          <a:solidFill>
-                            <a:srgbClr val="303437"/>
-                          </a:solidFill>
-                          <a:latin typeface="Noto Sans"/>
-                        </a:defRPr>
-                      </a:pPr>
-                      <a:r>
-                        <a:rPr sz="1850" b="0" lang="ja-JP" altLang="en-US">
-                          <a:solidFill>
-                            <a:srgbClr val="303437"/>
-                          </a:solidFill>
-                          <a:latin typeface="Noto Sans"/>
-                          <a:ea typeface="Noto Sans CJK JP"/>
-                          <a:cs typeface="Noto Sans"/>
-                        </a:rPr>
-                        <a:t>2022年公表</a:t>
-                      </a:r>
-                    </a:p>
-                  </a:txBody>
-                  <a:tcPr marL="63500" marR="63500" marT="38100" marB="38100" anchor="ctr">
-                    <a:lnL w="7620">
-                      <a:noFill/>
-                    </a:lnL>
-                    <a:lnR w="7620">
-                      <a:noFill/>
-                    </a:lnR>
-                    <a:lnT w="15240">
-                      <a:solidFill>
-                        <a:srgbClr val="626669"/>
-                      </a:solidFill>
-                      <a:prstDash val="solid"/>
-                    </a:lnT>
-                    <a:lnB w="7620">
-                      <a:solidFill>
-                        <a:srgbClr val="626669"/>
-                      </a:solidFill>
-                      <a:prstDash val="solid"/>
-                    </a:lnB>
-                    <a:solidFill>
-                      <a:srgbClr val="FFFEF8"/>
-                    </a:solidFill>
-                  </a:tcPr>
-                </a:tc>
-                <a:tc>
-                  <a:txBody>
-                    <a:bodyPr wrap="square">
-                      <a:noAutofit/>
-                    </a:bodyPr>
-                    <a:lstStyle/>
-                    <a:p>
-                      <a:pPr algn="r">
-                        <a:lnSpc>
-                          <a:spcPts val="2127"/>
-                        </a:lnSpc>
-                        <a:buNone/>
-                        <a:defRPr sz="1850" b="0">
-                          <a:solidFill>
-                            <a:srgbClr val="303437"/>
-                          </a:solidFill>
-                          <a:latin typeface="Noto Sans"/>
-                        </a:defRPr>
-                      </a:pPr>
-                      <a:r>
-                        <a:rPr sz="1850" b="0" lang="ja-JP" altLang="en-US">
-                          <a:solidFill>
-                            <a:srgbClr val="303437"/>
-                          </a:solidFill>
-                          <a:latin typeface="Noto Sans"/>
-                          <a:ea typeface="Noto Sans CJK JP"/>
-                          <a:cs typeface="Noto Sans"/>
-                        </a:rPr>
-                        <a:t>今回の固定配布</a:t>
-                      </a:r>
-                    </a:p>
-                  </a:txBody>
-                  <a:tcPr marL="63500" marR="63500" marT="38100" marB="38100" anchor="ctr">
-                    <a:lnL w="7620">
-                      <a:noFill/>
-                    </a:lnL>
-                    <a:lnR w="7620">
-                      <a:noFill/>
-                    </a:lnR>
-                    <a:lnT w="15240">
-                      <a:solidFill>
-                        <a:srgbClr val="626669"/>
-                      </a:solidFill>
-                      <a:prstDash val="solid"/>
-                    </a:lnT>
-                    <a:lnB w="7620">
-                      <a:solidFill>
-                        <a:srgbClr val="626669"/>
-                      </a:solidFill>
-                      <a:prstDash val="solid"/>
-                    </a:lnB>
-                    <a:solidFill>
-                      <a:srgbClr val="FFFEF8"/>
-                    </a:solidFill>
-                  </a:tcPr>
-                </a:tc>
-              </a:tr>
-              <a:tr h="420624">
-                <a:tc>
-                  <a:txBody>
-                    <a:bodyPr wrap="square">
-                      <a:noAutofit/>
-                    </a:bodyPr>
-                    <a:lstStyle/>
-                    <a:p>
-                      <a:pPr algn="l">
-                        <a:lnSpc>
-                          <a:spcPts val="2127"/>
-                        </a:lnSpc>
-                        <a:buNone/>
-                        <a:defRPr sz="1850" b="0">
-                          <a:solidFill>
-                            <a:srgbClr val="303437"/>
-                          </a:solidFill>
-                          <a:latin typeface="Noto Sans"/>
-                        </a:defRPr>
-                      </a:pPr>
-                      <a:r>
-                        <a:rPr sz="1850" b="0" lang="ja-JP" altLang="en-US">
-                          <a:solidFill>
-                            <a:srgbClr val="303437"/>
-                          </a:solidFill>
-                          <a:latin typeface="Noto Sans"/>
-                          <a:ea typeface="Noto Sans CJK JP"/>
-                          <a:cs typeface="Noto Sans"/>
-                        </a:rPr>
-                        <a:t>train本文・平均</a:t>
-                      </a:r>
-                    </a:p>
-                  </a:txBody>
-                  <a:tcPr marL="63500" marR="63500" marT="38100" marB="38100" anchor="ctr">
-                    <a:lnL w="7620">
-                      <a:noFill/>
-                    </a:lnL>
-                    <a:lnR w="7620">
-                      <a:noFill/>
-                    </a:lnR>
-                    <a:lnT w="7620">
-                      <a:solidFill>
-                        <a:srgbClr val="626669"/>
-                      </a:solidFill>
-                      <a:prstDash val="solid"/>
-                    </a:lnT>
-                    <a:lnB w="7620">
-                      <a:noFill/>
-                    </a:lnB>
-                    <a:solidFill>
-                      <a:srgbClr val="FFFEF8"/>
-                    </a:solidFill>
-                  </a:tcPr>
-                </a:tc>
-                <a:tc>
-                  <a:txBody>
-                    <a:bodyPr wrap="square">
-                      <a:noAutofit/>
-                    </a:bodyPr>
-                    <a:lstStyle/>
-                    <a:p>
-                      <a:pPr algn="r">
-                        <a:lnSpc>
-                          <a:spcPts val="2127"/>
-                        </a:lnSpc>
-                        <a:buNone/>
-                        <a:defRPr sz="1850" b="0">
-                          <a:solidFill>
-                            <a:srgbClr val="303437"/>
-                          </a:solidFill>
-                          <a:latin typeface="Noto Sans"/>
-                        </a:defRPr>
-                      </a:pPr>
-                      <a:r>
-                        <a:rPr sz="1850" b="0" lang="ja-JP" altLang="en-US">
-                          <a:solidFill>
-                            <a:srgbClr val="303437"/>
-                          </a:solidFill>
-                          <a:latin typeface="Noto Sans"/>
-                          <a:ea typeface="Noto Sans CJK JP"/>
-                          <a:cs typeface="Noto Sans"/>
-                        </a:rPr>
-                        <a:t>12,206</a:t>
-                      </a:r>
-                    </a:p>
-                  </a:txBody>
-                  <a:tcPr marL="63500" marR="63500" marT="38100" marB="38100" anchor="ctr">
-                    <a:lnL w="7620">
-                      <a:noFill/>
-                    </a:lnL>
-                    <a:lnR w="7620">
-                      <a:noFill/>
-                    </a:lnR>
-                    <a:lnT w="7620">
-                      <a:solidFill>
-                        <a:srgbClr val="626669"/>
-                      </a:solidFill>
-                      <a:prstDash val="solid"/>
-                    </a:lnT>
-                    <a:lnB w="7620">
-                      <a:noFill/>
-                    </a:lnB>
-                    <a:solidFill>
-                      <a:srgbClr val="FFFEF8"/>
-                    </a:solidFill>
-                  </a:tcPr>
-                </a:tc>
-                <a:tc>
-                  <a:txBody>
-                    <a:bodyPr wrap="square">
-                      <a:noAutofit/>
-                    </a:bodyPr>
-                    <a:lstStyle/>
-                    <a:p>
-                      <a:pPr algn="r">
-                        <a:lnSpc>
-                          <a:spcPts val="2127"/>
-                        </a:lnSpc>
-                        <a:buNone/>
-                        <a:defRPr sz="1850" b="0">
-                          <a:solidFill>
-                            <a:srgbClr val="303437"/>
-                          </a:solidFill>
-                          <a:latin typeface="Noto Sans"/>
-                        </a:defRPr>
-                      </a:pPr>
-                      <a:r>
-                        <a:rPr sz="1850" b="0" lang="ja-JP" altLang="en-US">
-                          <a:solidFill>
-                            <a:srgbClr val="303437"/>
-                          </a:solidFill>
-                          <a:latin typeface="Noto Sans"/>
-                          <a:ea typeface="Noto Sans CJK JP"/>
-                          <a:cs typeface="Noto Sans"/>
-                        </a:rPr>
-                        <a:t>12,883</a:t>
-                      </a:r>
-                    </a:p>
-                  </a:txBody>
-                  <a:tcPr marL="63500" marR="63500" marT="38100" marB="38100" anchor="ctr">
-                    <a:lnL w="7620">
-                      <a:noFill/>
-                    </a:lnL>
-                    <a:lnR w="7620">
-                      <a:noFill/>
-                    </a:lnR>
-                    <a:lnT w="7620">
-                      <a:solidFill>
-                        <a:srgbClr val="626669"/>
-                      </a:solidFill>
-                      <a:prstDash val="solid"/>
-                    </a:lnT>
-                    <a:lnB w="7620">
-                      <a:noFill/>
-                    </a:lnB>
-                    <a:solidFill>
-                      <a:srgbClr val="FFFEF8"/>
-                    </a:solidFill>
-                  </a:tcPr>
-                </a:tc>
-              </a:tr>
-              <a:tr h="420624">
-                <a:tc>
-                  <a:txBody>
-                    <a:bodyPr wrap="square">
-                      <a:noAutofit/>
-                    </a:bodyPr>
-                    <a:lstStyle/>
-                    <a:p>
-                      <a:pPr algn="l">
-                        <a:lnSpc>
-                          <a:spcPts val="2127"/>
-                        </a:lnSpc>
-                        <a:buNone/>
-                        <a:defRPr sz="1850" b="0">
-                          <a:solidFill>
-                            <a:srgbClr val="303437"/>
-                          </a:solidFill>
-                          <a:latin typeface="Noto Sans"/>
-                        </a:defRPr>
-                      </a:pPr>
-                      <a:r>
-                        <a:rPr sz="1850" b="0" lang="ja-JP" altLang="en-US">
-                          <a:solidFill>
-                            <a:srgbClr val="303437"/>
-                          </a:solidFill>
-                          <a:latin typeface="Noto Sans"/>
-                          <a:ea typeface="Noto Sans CJK JP"/>
-                          <a:cs typeface="Noto Sans"/>
-                        </a:rPr>
-                        <a:t>train要約・平均</a:t>
-                      </a:r>
-                    </a:p>
-                  </a:txBody>
-                  <a:tcPr marL="63500" marR="63500" marT="38100" marB="38100" anchor="ctr">
-                    <a:lnL w="7620">
-                      <a:noFill/>
-                    </a:lnL>
-                    <a:lnR w="7620">
-                      <a:noFill/>
-                    </a:lnR>
-                    <a:lnT w="7620">
-                      <a:noFill/>
-                    </a:lnT>
-                    <a:lnB w="7620">
-                      <a:noFill/>
-                    </a:lnB>
-                    <a:solidFill>
-                      <a:srgbClr val="FFFEF8"/>
-                    </a:solidFill>
-                  </a:tcPr>
-                </a:tc>
-                <a:tc>
-                  <a:txBody>
-                    <a:bodyPr wrap="square">
-                      <a:noAutofit/>
-                    </a:bodyPr>
-                    <a:lstStyle/>
-                    <a:p>
-                      <a:pPr algn="r">
-                        <a:lnSpc>
-                          <a:spcPts val="2127"/>
-                        </a:lnSpc>
-                        <a:buNone/>
-                        <a:defRPr sz="1850" b="0">
-                          <a:solidFill>
-                            <a:srgbClr val="303437"/>
-                          </a:solidFill>
-                          <a:latin typeface="Noto Sans"/>
-                        </a:defRPr>
-                      </a:pPr>
-                      <a:r>
-                        <a:rPr sz="1850" b="0" lang="ja-JP" altLang="en-US">
-                          <a:solidFill>
-                            <a:srgbClr val="303437"/>
-                          </a:solidFill>
-                          <a:latin typeface="Noto Sans"/>
-                          <a:ea typeface="Noto Sans CJK JP"/>
-                          <a:cs typeface="Noto Sans"/>
-                        </a:rPr>
-                        <a:t>799</a:t>
-                      </a:r>
-                    </a:p>
-                  </a:txBody>
-                  <a:tcPr marL="63500" marR="63500" marT="38100" marB="38100" anchor="ctr">
-                    <a:lnL w="7620">
-                      <a:noFill/>
-                    </a:lnL>
-                    <a:lnR w="7620">
-                      <a:noFill/>
-                    </a:lnR>
-                    <a:lnT w="7620">
-                      <a:noFill/>
-                    </a:lnT>
-                    <a:lnB w="7620">
-                      <a:noFill/>
-                    </a:lnB>
-                    <a:solidFill>
-                      <a:srgbClr val="FFFEF8"/>
-                    </a:solidFill>
-                  </a:tcPr>
-                </a:tc>
-                <a:tc>
-                  <a:txBody>
-                    <a:bodyPr wrap="square">
-                      <a:noAutofit/>
-                    </a:bodyPr>
-                    <a:lstStyle/>
-                    <a:p>
-                      <a:pPr algn="r">
-                        <a:lnSpc>
-                          <a:spcPts val="2127"/>
-                        </a:lnSpc>
-                        <a:buNone/>
-                        <a:defRPr sz="1850" b="0">
-                          <a:solidFill>
-                            <a:srgbClr val="303437"/>
-                          </a:solidFill>
-                          <a:latin typeface="Noto Sans"/>
-                        </a:defRPr>
-                      </a:pPr>
-                      <a:r>
-                        <a:rPr sz="1850" b="0" lang="ja-JP" altLang="en-US">
-                          <a:solidFill>
-                            <a:srgbClr val="303437"/>
-                          </a:solidFill>
-                          <a:latin typeface="Noto Sans"/>
-                          <a:ea typeface="Noto Sans CJK JP"/>
-                          <a:cs typeface="Noto Sans"/>
-                        </a:rPr>
-                        <a:t>783</a:t>
-                      </a:r>
-                    </a:p>
-                  </a:txBody>
-                  <a:tcPr marL="63500" marR="63500" marT="38100" marB="38100" anchor="ctr">
-                    <a:lnL w="7620">
-                      <a:noFill/>
-                    </a:lnL>
-                    <a:lnR w="7620">
-                      <a:noFill/>
-                    </a:lnR>
-                    <a:lnT w="7620">
-                      <a:noFill/>
-                    </a:lnT>
-                    <a:lnB w="7620">
-                      <a:noFill/>
-                    </a:lnB>
-                    <a:solidFill>
-                      <a:srgbClr val="FFFEF8"/>
-                    </a:solidFill>
-                  </a:tcPr>
-                </a:tc>
-              </a:tr>
-              <a:tr h="420624">
-                <a:tc>
-                  <a:txBody>
-                    <a:bodyPr wrap="square">
-                      <a:noAutofit/>
-                    </a:bodyPr>
-                    <a:lstStyle/>
-                    <a:p>
-                      <a:pPr algn="l">
-                        <a:lnSpc>
-                          <a:spcPts val="2127"/>
-                        </a:lnSpc>
-                        <a:buNone/>
-                        <a:defRPr sz="1850" b="0">
-                          <a:solidFill>
-                            <a:srgbClr val="303437"/>
-                          </a:solidFill>
-                          <a:latin typeface="Noto Sans"/>
-                        </a:defRPr>
-                      </a:pPr>
-                      <a:r>
-                        <a:rPr sz="1850" b="0" lang="ja-JP" altLang="en-US">
-                          <a:solidFill>
-                            <a:srgbClr val="303437"/>
-                          </a:solidFill>
-                          <a:latin typeface="Noto Sans"/>
-                          <a:ea typeface="Noto Sans CJK JP"/>
-                          <a:cs typeface="Noto Sans"/>
-                        </a:rPr>
-                        <a:t>test本文・最大</a:t>
-                      </a:r>
-                    </a:p>
-                  </a:txBody>
-                  <a:tcPr marL="63500" marR="63500" marT="38100" marB="38100" anchor="ctr">
-                    <a:lnL w="7620">
-                      <a:noFill/>
-                    </a:lnL>
-                    <a:lnR w="7620">
-                      <a:noFill/>
-                    </a:lnR>
-                    <a:lnT w="7620">
-                      <a:noFill/>
-                    </a:lnT>
-                    <a:lnB w="7620">
-                      <a:noFill/>
-                    </a:lnB>
-                    <a:solidFill>
-                      <a:srgbClr val="FFFEF8"/>
-                    </a:solidFill>
-                  </a:tcPr>
-                </a:tc>
-                <a:tc>
-                  <a:txBody>
-                    <a:bodyPr wrap="square">
-                      <a:noAutofit/>
-                    </a:bodyPr>
-                    <a:lstStyle/>
-                    <a:p>
-                      <a:pPr algn="r">
-                        <a:lnSpc>
-                          <a:spcPts val="2127"/>
-                        </a:lnSpc>
-                        <a:buNone/>
-                        <a:defRPr sz="1850" b="0">
-                          <a:solidFill>
-                            <a:srgbClr val="303437"/>
-                          </a:solidFill>
-                          <a:latin typeface="Noto Sans"/>
-                        </a:defRPr>
-                      </a:pPr>
-                      <a:r>
-                        <a:rPr sz="1850" b="0" lang="ja-JP" altLang="en-US">
-                          <a:solidFill>
-                            <a:srgbClr val="303437"/>
-                          </a:solidFill>
-                          <a:latin typeface="Noto Sans"/>
-                          <a:ea typeface="Noto Sans CJK JP"/>
-                          <a:cs typeface="Noto Sans"/>
-                        </a:rPr>
-                        <a:t>403,319</a:t>
-                      </a:r>
-                    </a:p>
-                  </a:txBody>
-                  <a:tcPr marL="63500" marR="63500" marT="38100" marB="38100" anchor="ctr">
-                    <a:lnL w="7620">
-                      <a:noFill/>
-                    </a:lnL>
-                    <a:lnR w="7620">
-                      <a:noFill/>
-                    </a:lnR>
-                    <a:lnT w="7620">
-                      <a:noFill/>
-                    </a:lnT>
-                    <a:lnB w="7620">
-                      <a:noFill/>
-                    </a:lnB>
-                    <a:solidFill>
-                      <a:srgbClr val="FFFEF8"/>
-                    </a:solidFill>
-                  </a:tcPr>
-                </a:tc>
-                <a:tc>
-                  <a:txBody>
-                    <a:bodyPr wrap="square">
-                      <a:noAutofit/>
-                    </a:bodyPr>
-                    <a:lstStyle/>
-                    <a:p>
-                      <a:pPr algn="r">
-                        <a:lnSpc>
-                          <a:spcPts val="2127"/>
-                        </a:lnSpc>
-                        <a:buNone/>
-                        <a:defRPr sz="1850" b="0">
-                          <a:solidFill>
-                            <a:srgbClr val="303437"/>
-                          </a:solidFill>
-                          <a:latin typeface="Noto Sans"/>
-                        </a:defRPr>
-                      </a:pPr>
-                      <a:r>
-                        <a:rPr sz="1850" b="0" lang="ja-JP" altLang="en-US">
-                          <a:solidFill>
-                            <a:srgbClr val="303437"/>
-                          </a:solidFill>
-                          <a:latin typeface="Noto Sans"/>
-                          <a:ea typeface="Noto Sans CJK JP"/>
-                          <a:cs typeface="Noto Sans"/>
-                        </a:rPr>
-                        <a:t>429,593</a:t>
-                      </a:r>
-                    </a:p>
-                  </a:txBody>
-                  <a:tcPr marL="63500" marR="63500" marT="38100" marB="38100" anchor="ctr">
-                    <a:lnL w="7620">
-                      <a:noFill/>
-                    </a:lnL>
-                    <a:lnR w="7620">
-                      <a:noFill/>
-                    </a:lnR>
-                    <a:lnT w="7620">
-                      <a:noFill/>
-                    </a:lnT>
-                    <a:lnB w="7620">
-                      <a:noFill/>
-                    </a:lnB>
-                    <a:solidFill>
-                      <a:srgbClr val="FFFEF8"/>
-                    </a:solidFill>
-                  </a:tcPr>
-                </a:tc>
-              </a:tr>
-              <a:tr h="420624">
-                <a:tc>
-                  <a:txBody>
-                    <a:bodyPr wrap="square">
-                      <a:noAutofit/>
-                    </a:bodyPr>
-                    <a:lstStyle/>
-                    <a:p>
-                      <a:pPr algn="l">
-                        <a:lnSpc>
-                          <a:spcPts val="2127"/>
-                        </a:lnSpc>
-                        <a:buNone/>
-                        <a:defRPr sz="1850" b="0">
-                          <a:solidFill>
-                            <a:srgbClr val="303437"/>
-                          </a:solidFill>
-                          <a:latin typeface="Noto Sans"/>
-                        </a:defRPr>
-                      </a:pPr>
-                      <a:r>
-                        <a:rPr sz="1850" b="0" lang="ja-JP" altLang="en-US">
-                          <a:solidFill>
-                            <a:srgbClr val="303437"/>
-                          </a:solidFill>
-                          <a:latin typeface="Noto Sans"/>
-                          <a:ea typeface="Noto Sans CJK JP"/>
-                          <a:cs typeface="Noto Sans"/>
-                        </a:rPr>
-                        <a:t>test要約・最大</a:t>
-                      </a:r>
-                    </a:p>
-                  </a:txBody>
-                  <a:tcPr marL="63500" marR="63500" marT="38100" marB="38100" anchor="ctr">
-                    <a:lnL w="7620">
-                      <a:noFill/>
-                    </a:lnL>
-                    <a:lnR w="7620">
-                      <a:noFill/>
-                    </a:lnR>
-                    <a:lnT w="7620">
-                      <a:noFill/>
-                    </a:lnT>
-                    <a:lnB w="15240">
-                      <a:solidFill>
-                        <a:srgbClr val="626669"/>
-                      </a:solidFill>
-                      <a:prstDash val="solid"/>
-                    </a:lnB>
-                    <a:solidFill>
-                      <a:srgbClr val="FFFEF8"/>
-                    </a:solidFill>
-                  </a:tcPr>
-                </a:tc>
-                <a:tc>
-                  <a:txBody>
-                    <a:bodyPr wrap="square">
-                      <a:noAutofit/>
-                    </a:bodyPr>
-                    <a:lstStyle/>
-                    <a:p>
-                      <a:pPr algn="r">
-                        <a:lnSpc>
-                          <a:spcPts val="2127"/>
-                        </a:lnSpc>
-                        <a:buNone/>
-                        <a:defRPr sz="1850" b="0">
-                          <a:solidFill>
-                            <a:srgbClr val="303437"/>
-                          </a:solidFill>
-                          <a:latin typeface="Noto Sans"/>
-                        </a:defRPr>
-                      </a:pPr>
-                      <a:r>
-                        <a:rPr sz="1850" b="0" lang="ja-JP" altLang="en-US">
-                          <a:solidFill>
-                            <a:srgbClr val="303437"/>
-                          </a:solidFill>
-                          <a:latin typeface="Noto Sans"/>
-                          <a:ea typeface="Noto Sans CJK JP"/>
-                          <a:cs typeface="Noto Sans"/>
-                        </a:rPr>
-                        <a:t>2,987</a:t>
-                      </a:r>
-                    </a:p>
-                  </a:txBody>
-                  <a:tcPr marL="63500" marR="63500" marT="38100" marB="38100" anchor="ctr">
-                    <a:lnL w="7620">
-                      <a:noFill/>
-                    </a:lnL>
-                    <a:lnR w="7620">
-                      <a:noFill/>
-                    </a:lnR>
-                    <a:lnT w="7620">
-                      <a:noFill/>
-                    </a:lnT>
-                    <a:lnB w="15240">
-                      <a:solidFill>
-                        <a:srgbClr val="626669"/>
-                      </a:solidFill>
-                      <a:prstDash val="solid"/>
-                    </a:lnB>
-                    <a:solidFill>
-                      <a:srgbClr val="FFFEF8"/>
-                    </a:solidFill>
-                  </a:tcPr>
-                </a:tc>
-                <a:tc>
-                  <a:txBody>
-                    <a:bodyPr wrap="square">
-                      <a:noAutofit/>
-                    </a:bodyPr>
-                    <a:lstStyle/>
-                    <a:p>
-                      <a:pPr algn="r">
-                        <a:lnSpc>
-                          <a:spcPts val="2127"/>
-                        </a:lnSpc>
-                        <a:buNone/>
-                        <a:defRPr sz="1850" b="0">
-                          <a:solidFill>
-                            <a:srgbClr val="303437"/>
-                          </a:solidFill>
-                          <a:latin typeface="Noto Sans"/>
-                        </a:defRPr>
-                      </a:pPr>
-                      <a:r>
-                        <a:rPr sz="1850" b="0" lang="ja-JP" altLang="en-US">
-                          <a:solidFill>
-                            <a:srgbClr val="303437"/>
-                          </a:solidFill>
-                          <a:latin typeface="Noto Sans"/>
-                          <a:ea typeface="Noto Sans CJK JP"/>
-                          <a:cs typeface="Noto Sans"/>
-                        </a:rPr>
-                        <a:t>3,031</a:t>
-                      </a:r>
-                    </a:p>
-                  </a:txBody>
-                  <a:tcPr marL="63500" marR="63500" marT="38100" marB="38100" anchor="ctr">
-                    <a:lnL w="7620">
-                      <a:noFill/>
-                    </a:lnL>
-                    <a:lnR w="7620">
-                      <a:noFill/>
-                    </a:lnR>
-                    <a:lnT w="7620">
-                      <a:noFill/>
-                    </a:lnT>
-                    <a:lnB w="15240">
-                      <a:solidFill>
-                        <a:srgbClr val="626669"/>
-                      </a:solidFill>
-                      <a:prstDash val="solid"/>
-                    </a:lnB>
-                    <a:solidFill>
-                      <a:srgbClr val="FFFEF8"/>
-                    </a:solidFill>
-                  </a:tcPr>
-                </a:tc>
-              </a:tr>
-            </a:tbl>
-          </a:graphicData>
-        </a:graphic>
-      </p:graphicFrame>
       <p:sp>
         <p:nvSpPr>
-          <p:cNvPr id="5" name="TextBox 4"/>
-          <p:cNvSpPr txBox="1"/>
-          <p:nvPr/>
-        </p:nvSpPr>
-        <p:spPr>
-          <a:xfrm>
-            <a:off x="594360" y="3813048"/>
-            <a:ext cx="7955279" cy="658368"/>
-          </a:xfrm>
-          <a:prstGeom prst="rect">
-            <a:avLst/>
-          </a:prstGeom>
-          <a:noFill/>
-        </p:spPr>
-        <p:txBody>
-          <a:bodyPr wrap="square" lIns="0" rIns="0" tIns="0" bIns="0">
-            <a:noAutofit/>
-          </a:bodyPr>
-          <a:lstStyle/>
-          <a:p>
-            <a:pPr algn="l">
-              <a:lnSpc>
-                <a:spcPts val="2047"/>
-              </a:lnSpc>
-              <a:spcBef>
-                <a:spcPts val="0"/>
-              </a:spcBef>
-              <a:spcAft>
-                <a:spcPts val="0"/>
-              </a:spcAft>
-              <a:buNone/>
-              <a:defRPr sz="1750" b="0">
-                <a:solidFill>
-                  <a:srgbClr val="303437"/>
-                </a:solidFill>
-                <a:latin typeface="Noto Sans"/>
-              </a:defRPr>
-            </a:pPr>
-            <a:r>
-              <a:rPr sz="1750" b="0" lang="ja-JP" altLang="en-US">
-                <a:solidFill>
-                  <a:srgbClr val="303437"/>
-                </a:solidFill>
-                <a:latin typeface="Noto Sans"/>
-                <a:ea typeface="Noto Sans CJK JP"/>
-                <a:cs typeface="Noto Sans"/>
-              </a:rPr>
-              <a:t>単位：空白区切り語。配布版・集計前処理の同一性は確認できず、差の原因は断定しない。</a:t>
-            </a:r>
-          </a:p>
-        </p:txBody>
-      </p:sp>
-      <p:sp>
-        <p:nvSpPr>
-          <p:cNvPr id="6" name="sources"/>
+          <p:cNvPr id="5" name="sources"/>
           <p:cNvSpPr txBox="1"/>
           <p:nvPr/>
         </p:nvSpPr>
@@ -33856,7 +32321,7 @@
                 <a:ea typeface="Noto Sans CJK JP"/>
                 <a:cs typeface="Noto Sans"/>
               </a:rPr>
-              <a:t>[1] Aumiller et al., EUR-Lex-Sum. 固定HF revision 33ecb2d、test実レコード。</a:t>
+              <a:t>[1] Aumiller, Chouhan &amp; Gertz (2022). EUR-Lex-Sum. </a:t>
             </a:r>
             <a:r>
               <a:rPr sz="810" b="0" lang="ja-JP" altLang="en-US">
@@ -33866,8 +32331,40 @@
                 <a:latin typeface="Noto Sans"/>
                 <a:ea typeface="Noto Sans CJK JP"/>
                 <a:cs typeface="Noto Sans"/>
-              </a:rPr>
-              <a:t>  </a:t>
+                <a:hlinkClick r:id="rId3"/>
+              </a:rPr>
+              <a:t>https://aclanthology.org/2022.emnlp-main.519/</a:t>
+            </a:r>
+          </a:p>
+          <a:p>
+            <a:pPr algn="l">
+              <a:lnSpc>
+                <a:spcPts val="940"/>
+              </a:lnSpc>
+              <a:spcBef>
+                <a:spcPts val="0"/>
+              </a:spcBef>
+              <a:spcAft>
+                <a:spcPts val="140"/>
+              </a:spcAft>
+              <a:buNone/>
+              <a:defRPr sz="810" b="0">
+                <a:solidFill>
+                  <a:srgbClr val="303437"/>
+                </a:solidFill>
+                <a:latin typeface="Noto Sans"/>
+              </a:defRPr>
+            </a:pPr>
+            <a:r>
+              <a:rPr sz="810" b="0" lang="ja-JP" altLang="en-US">
+                <a:solidFill>
+                  <a:srgbClr val="626669"/>
+                </a:solidFill>
+                <a:latin typeface="Noto Sans"/>
+                <a:ea typeface="Noto Sans CJK JP"/>
+                <a:cs typeface="Noto Sans"/>
+              </a:rPr>
+              <a:t>[2] Aumiller et al. EUR-Lex-Sum data. </a:t>
             </a:r>
             <a:r>
               <a:rPr sz="810" b="0" lang="ja-JP" altLang="en-US">
@@ -33998,7 +32495,7 @@
                 <a:ea typeface="Noto Sans CJK JP"/>
                 <a:cs typeface="Noto Sans"/>
               </a:rPr>
-              <a:t>法令本文は数百語から100万語超に及ぶ。ここでは条文の一段落と、対応する要約の一節を切り出す。</a:t>
+              <a:t>法令本文は数百語から100万語超に及び、法令全文と要約全文が対応する。ここでは条文の一段落と、対応する要約の一節を連続して抜粋する。</a:t>
             </a:r>
           </a:p>
           <a:p>
@@ -34028,37 +32525,7 @@
                 <a:ea typeface="Noto Sans CJK JP"/>
                 <a:cs typeface="Noto Sans"/>
               </a:rPr>
-              <a:t>各例には元の全文語数、言語、法令を識別するCelex IDを添える。日本語は表示した範囲の訳である。</a:t>
-            </a:r>
-          </a:p>
-          <a:p>
-            <a:pPr marL="457200" indent="-355600">
-              <a:lnSpc>
-                <a:spcPts val="2618"/>
-              </a:lnSpc>
-              <a:spcAft>
-                <a:spcPts val="0"/>
-              </a:spcAft>
-              <a:buSzPct val="60455"/>
-              <a:buFont typeface="Noto Sans CJK JP"/>
-              <a:buChar char="●"/>
-              <a:defRPr sz="2200" b="0">
-                <a:solidFill>
-                  <a:srgbClr val="303437"/>
-                </a:solidFill>
-                <a:latin typeface="Noto Sans"/>
-              </a:defRPr>
-            </a:pPr>
-            <a:r>
-              <a:rPr sz="2200" b="0" lang="ja-JP" altLang="en-US">
-                <a:solidFill>
-                  <a:srgbClr val="303437"/>
-                </a:solidFill>
-                <a:latin typeface="Noto Sans"/>
-                <a:ea typeface="Noto Sans CJK JP"/>
-                <a:cs typeface="Noto Sans"/>
-              </a:rPr>
-              <a:t>配布要約は出力の参照例。表示した一段落だけから要約全文を再現する課題ではない。</a:t>
+              <a:t>各例には元の全文語数と言語、法令を識別するCelex IDを添える。日本語は表示した範囲の訳である。</a:t>
             </a:r>
           </a:p>
         </p:txBody>
@@ -34160,18 +32627,7 @@
                 <a:ea typeface="Noto Sans CJK JP"/>
                 <a:cs typeface="Noto Sans"/>
               </a:rPr>
-              <a:t>[1] Aumiller et al., EUR-Lex-Sum. 固定HF revision 33ecb2d、test実レコード。</a:t>
-            </a:r>
-            <a:r>
-              <a:rPr sz="810" b="0" lang="ja-JP" altLang="en-US">
-                <a:solidFill>
-                  <a:srgbClr val="626669"/>
-                </a:solidFill>
-                <a:latin typeface="Noto Sans"/>
-                <a:ea typeface="Noto Sans CJK JP"/>
-                <a:cs typeface="Noto Sans"/>
-              </a:rPr>
-              <a:t>  </a:t>
+              <a:t>[1] Aumiller et al. EUR-Lex-Sum. </a:t>
             </a:r>
             <a:r>
               <a:rPr sz="810" b="0" lang="ja-JP" altLang="en-US">
@@ -34249,127 +32705,14 @@
                 <a:ea typeface="Noto Sans CJK JP"/>
                 <a:cs typeface="Noto Sans"/>
               </a:rPr>
-              <a:t>法令の古さと、言語のそろい方を分ける</a:t>
+              <a:t>JSONLから、法令の識別子・本文・要約を読む</a:t>
             </a:r>
           </a:p>
         </p:txBody>
       </p:sp>
       <p:sp>
         <p:nvSpPr>
-          <p:cNvPr id="3" name="Text Placeholder 2"/>
-          <p:cNvSpPr>
-            <a:spLocks noGrp="1"/>
-          </p:cNvSpPr>
-          <p:nvPr>
-            <p:ph type="body" idx="1"/>
-          </p:nvPr>
-        </p:nvSpPr>
-        <p:spPr>
-          <a:xfrm>
-            <a:off x="594360" y="1463040"/>
-            <a:ext cx="7955279" cy="3044952"/>
-          </a:xfrm>
-        </p:spPr>
-        <p:txBody>
-          <a:bodyPr wrap="square" tIns="91440" bIns="91440">
-            <a:noAutofit/>
-          </a:bodyPr>
-          <a:lstStyle/>
-          <a:p>
-            <a:pPr marL="457200" indent="-355600">
-              <a:lnSpc>
-                <a:spcPts val="2618"/>
-              </a:lnSpc>
-              <a:spcAft>
-                <a:spcPts val="700"/>
-              </a:spcAft>
-              <a:buSzPct val="60455"/>
-              <a:buFont typeface="Noto Sans CJK JP"/>
-              <a:buChar char="●"/>
-              <a:defRPr sz="2200" b="0">
-                <a:solidFill>
-                  <a:srgbClr val="303437"/>
-                </a:solidFill>
-                <a:latin typeface="Noto Sans"/>
-              </a:defRPr>
-            </a:pPr>
-            <a:r>
-              <a:rPr sz="2200" b="0" lang="ja-JP" altLang="en-US">
-                <a:solidFill>
-                  <a:srgbClr val="303437"/>
-                </a:solidFill>
-                <a:latin typeface="Noto Sans"/>
-                <a:ea typeface="Noto Sans CJK JP"/>
-                <a:cs typeface="Noto Sans"/>
-              </a:rPr>
-              <a:t>公表分析では、収録法令は1990年以降に増える。HTMLでの公開と要約の利用可能性に依存する。</a:t>
-            </a:r>
-          </a:p>
-          <a:p>
-            <a:pPr marL="457200" indent="-355600">
-              <a:lnSpc>
-                <a:spcPts val="2618"/>
-              </a:lnSpc>
-              <a:spcAft>
-                <a:spcPts val="700"/>
-              </a:spcAft>
-              <a:buSzPct val="60455"/>
-              <a:buFont typeface="Noto Sans CJK JP"/>
-              <a:buChar char="●"/>
-              <a:defRPr sz="2200" b="0">
-                <a:solidFill>
-                  <a:srgbClr val="303437"/>
-                </a:solidFill>
-                <a:latin typeface="Noto Sans"/>
-              </a:defRPr>
-            </a:pPr>
-            <a:r>
-              <a:rPr sz="2200" b="0" lang="ja-JP" altLang="en-US">
-                <a:solidFill>
-                  <a:srgbClr val="303437"/>
-                </a:solidFill>
-                <a:latin typeface="Noto Sans"/>
-                <a:ea typeface="Noto Sans CJK JP"/>
-                <a:cs typeface="Noto Sans"/>
-              </a:rPr>
-              <a:t>24言語をそろえるvalidation/testは、trainより新しい法令に偏る。翻訳や要約は、法令の初回公開より後に追加される場合もある。</a:t>
-            </a:r>
-          </a:p>
-          <a:p>
-            <a:pPr marL="457200" indent="-355600">
-              <a:lnSpc>
-                <a:spcPts val="2618"/>
-              </a:lnSpc>
-              <a:spcAft>
-                <a:spcPts val="0"/>
-              </a:spcAft>
-              <a:buSzPct val="60455"/>
-              <a:buFont typeface="Noto Sans CJK JP"/>
-              <a:buChar char="●"/>
-              <a:defRPr sz="2200" b="0">
-                <a:solidFill>
-                  <a:srgbClr val="303437"/>
-                </a:solidFill>
-                <a:latin typeface="Noto Sans"/>
-              </a:defRPr>
-            </a:pPr>
-            <a:r>
-              <a:rPr sz="2200" b="0" lang="ja-JP" altLang="en-US">
-                <a:solidFill>
-                  <a:srgbClr val="303437"/>
-                </a:solidFill>
-                <a:latin typeface="Noto Sans"/>
-                <a:ea typeface="Noto Sans CJK JP"/>
-                <a:cs typeface="Noto Sans"/>
-              </a:rPr>
-              <a:t>法令の年、要約の更新日、データ取得日を、同じ時点とみなさない。</a:t>
-            </a:r>
-          </a:p>
-        </p:txBody>
-      </p:sp>
-      <p:sp>
-        <p:nvSpPr>
-          <p:cNvPr id="4" name="Title 3"/>
+          <p:cNvPr id="3" name="Title 2"/>
           <p:cNvSpPr>
             <a:spLocks noGrp="1"/>
           </p:cNvSpPr>
@@ -34417,7 +32760,288 @@
       </p:sp>
       <p:sp>
         <p:nvSpPr>
-          <p:cNvPr id="5" name="sources"/>
+          <p:cNvPr id="4" name="code-frame"/>
+          <p:cNvSpPr/>
+          <p:nvPr/>
+        </p:nvSpPr>
+        <p:spPr>
+          <a:xfrm>
+            <a:off x="548640" y="1549400"/>
+            <a:ext cx="8046720" cy="1888109"/>
+          </a:xfrm>
+          <a:prstGeom prst="rect">
+            <a:avLst/>
+          </a:prstGeom>
+          <a:solidFill>
+            <a:srgbClr val="EBEDEB"/>
+          </a:solidFill>
+          <a:ln>
+            <a:noFill/>
+          </a:ln>
+          <a:effectLst/>
+        </p:spPr>
+        <p:style>
+          <a:lnRef idx="1">
+            <a:schemeClr val="accent1"/>
+          </a:lnRef>
+          <a:fillRef idx="3">
+            <a:schemeClr val="accent1"/>
+          </a:fillRef>
+          <a:effectRef idx="0">
+            <a:schemeClr val="accent1"/>
+          </a:effectRef>
+          <a:fontRef idx="minor">
+            <a:schemeClr val="lt1"/>
+          </a:fontRef>
+        </p:style>
+        <p:txBody>
+          <a:bodyPr rtlCol="0" anchor="t" wrap="none" lIns="152400" rIns="152400" tIns="52070" bIns="127000"/>
+          <a:lstStyle/>
+          <a:p>
+            <a:pPr algn="l">
+              <a:lnSpc>
+                <a:spcPts val="2250"/>
+              </a:lnSpc>
+              <a:spcBef>
+                <a:spcPts val="0"/>
+              </a:spcBef>
+              <a:spcAft>
+                <a:spcPts val="0"/>
+              </a:spcAft>
+              <a:buNone/>
+              <a:defRPr sz="1800" b="0">
+                <a:solidFill>
+                  <a:srgbClr val="303437"/>
+                </a:solidFill>
+                <a:latin typeface="Noto Sans"/>
+              </a:defRPr>
+            </a:pPr>
+            <a:r>
+              <a:rPr sz="1800" b="0" lang="ja-JP" altLang="en-US">
+                <a:solidFill>
+                  <a:srgbClr val="303437"/>
+                </a:solidFill>
+                <a:latin typeface="Liberation Mono"/>
+                <a:ea typeface="Noto Sans CJK JP"/>
+                <a:cs typeface="Liberation Mono"/>
+              </a:rPr>
+              <a:t>import json</a:t>
+            </a:r>
+          </a:p>
+          <a:p>
+            <a:pPr algn="l">
+              <a:lnSpc>
+                <a:spcPts val="2250"/>
+              </a:lnSpc>
+              <a:spcBef>
+                <a:spcPts val="0"/>
+              </a:spcBef>
+              <a:spcAft>
+                <a:spcPts val="0"/>
+              </a:spcAft>
+              <a:buNone/>
+              <a:defRPr sz="1800" b="0">
+                <a:solidFill>
+                  <a:srgbClr val="303437"/>
+                </a:solidFill>
+                <a:latin typeface="Noto Sans"/>
+              </a:defRPr>
+            </a:pPr>
+            <a:r>
+              <a:rPr sz="1800" b="0" lang="ja-JP" altLang="en-US">
+                <a:solidFill>
+                  <a:srgbClr val="303437"/>
+                </a:solidFill>
+                <a:latin typeface="Liberation Mono"/>
+                <a:ea typeface="Noto Sans CJK JP"/>
+                <a:cs typeface="Liberation Mono"/>
+              </a:rPr>
+              <a:t>with open("english_test.jsonl", encoding="utf-8") as f:</a:t>
+            </a:r>
+          </a:p>
+          <a:p>
+            <a:pPr algn="l">
+              <a:lnSpc>
+                <a:spcPts val="2250"/>
+              </a:lnSpc>
+              <a:spcBef>
+                <a:spcPts val="0"/>
+              </a:spcBef>
+              <a:spcAft>
+                <a:spcPts val="0"/>
+              </a:spcAft>
+              <a:buNone/>
+              <a:defRPr sz="1800" b="0">
+                <a:solidFill>
+                  <a:srgbClr val="303437"/>
+                </a:solidFill>
+                <a:latin typeface="Noto Sans"/>
+              </a:defRPr>
+            </a:pPr>
+            <a:r>
+              <a:rPr sz="1800" b="0" lang="ja-JP" altLang="en-US">
+                <a:solidFill>
+                  <a:srgbClr val="303437"/>
+                </a:solidFill>
+                <a:latin typeface="Liberation Mono"/>
+                <a:ea typeface="Noto Sans CJK JP"/>
+                <a:cs typeface="Liberation Mono"/>
+              </a:rPr>
+              <a:t>    row = json.loads(next(f))</a:t>
+            </a:r>
+          </a:p>
+          <a:p>
+            <a:pPr algn="l">
+              <a:lnSpc>
+                <a:spcPts val="2250"/>
+              </a:lnSpc>
+              <a:spcBef>
+                <a:spcPts val="0"/>
+              </a:spcBef>
+              <a:spcAft>
+                <a:spcPts val="0"/>
+              </a:spcAft>
+              <a:buNone/>
+              <a:defRPr sz="1800" b="0">
+                <a:solidFill>
+                  <a:srgbClr val="303437"/>
+                </a:solidFill>
+                <a:latin typeface="Noto Sans"/>
+              </a:defRPr>
+            </a:pPr>
+            <a:r>
+              <a:rPr sz="1800" b="0" lang="ja-JP" altLang="en-US">
+                <a:solidFill>
+                  <a:srgbClr val="303437"/>
+                </a:solidFill>
+                <a:latin typeface="Liberation Mono"/>
+                <a:ea typeface="Noto Sans CJK JP"/>
+                <a:cs typeface="Liberation Mono"/>
+              </a:rPr>
+              <a:t>print(row["celex_id"])</a:t>
+            </a:r>
+          </a:p>
+          <a:p>
+            <a:pPr algn="l">
+              <a:lnSpc>
+                <a:spcPts val="2250"/>
+              </a:lnSpc>
+              <a:spcBef>
+                <a:spcPts val="0"/>
+              </a:spcBef>
+              <a:spcAft>
+                <a:spcPts val="0"/>
+              </a:spcAft>
+              <a:buNone/>
+              <a:defRPr sz="1800" b="0">
+                <a:solidFill>
+                  <a:srgbClr val="303437"/>
+                </a:solidFill>
+                <a:latin typeface="Noto Sans"/>
+              </a:defRPr>
+            </a:pPr>
+            <a:r>
+              <a:rPr sz="1800" b="0" lang="ja-JP" altLang="en-US">
+                <a:solidFill>
+                  <a:srgbClr val="303437"/>
+                </a:solidFill>
+                <a:latin typeface="Liberation Mono"/>
+                <a:ea typeface="Noto Sans CJK JP"/>
+                <a:cs typeface="Liberation Mono"/>
+              </a:rPr>
+              <a:t>print(row["reference"])</a:t>
+            </a:r>
+          </a:p>
+          <a:p>
+            <a:pPr algn="l">
+              <a:lnSpc>
+                <a:spcPts val="2250"/>
+              </a:lnSpc>
+              <a:spcBef>
+                <a:spcPts val="0"/>
+              </a:spcBef>
+              <a:spcAft>
+                <a:spcPts val="0"/>
+              </a:spcAft>
+              <a:buNone/>
+              <a:defRPr sz="1800" b="0">
+                <a:solidFill>
+                  <a:srgbClr val="303437"/>
+                </a:solidFill>
+                <a:latin typeface="Noto Sans"/>
+              </a:defRPr>
+            </a:pPr>
+            <a:r>
+              <a:rPr sz="1800" b="0" lang="ja-JP" altLang="en-US">
+                <a:solidFill>
+                  <a:srgbClr val="303437"/>
+                </a:solidFill>
+                <a:latin typeface="Liberation Mono"/>
+                <a:ea typeface="Noto Sans CJK JP"/>
+                <a:cs typeface="Liberation Mono"/>
+              </a:rPr>
+              <a:t>print(row["summary"])</a:t>
+            </a:r>
+          </a:p>
+        </p:txBody>
+      </p:sp>
+      <p:sp>
+        <p:nvSpPr>
+          <p:cNvPr id="5" name="TextBox 4"/>
+          <p:cNvSpPr txBox="1"/>
+          <p:nvPr/>
+        </p:nvSpPr>
+        <p:spPr>
+          <a:xfrm>
+            <a:off x="594360" y="3611880"/>
+            <a:ext cx="7955279" cy="640080"/>
+          </a:xfrm>
+          <a:prstGeom prst="rect">
+            <a:avLst/>
+          </a:prstGeom>
+          <a:noFill/>
+        </p:spPr>
+        <p:txBody>
+          <a:bodyPr wrap="square" lIns="0" rIns="0" tIns="0" bIns="0">
+            <a:noAutofit/>
+          </a:bodyPr>
+          <a:lstStyle/>
+          <a:p>
+            <a:pPr algn="l">
+              <a:lnSpc>
+                <a:spcPts val="2222"/>
+              </a:lnSpc>
+              <a:spcBef>
+                <a:spcPts val="0"/>
+              </a:spcBef>
+              <a:spcAft>
+                <a:spcPts val="0"/>
+              </a:spcAft>
+              <a:buNone/>
+              <a:defRPr sz="1900" b="0">
+                <a:solidFill>
+                  <a:srgbClr val="303437"/>
+                </a:solidFill>
+                <a:latin typeface="Noto Sans"/>
+              </a:defRPr>
+            </a:pPr>
+            <a:r>
+              <a:rPr sz="1900" b="0" lang="ja-JP" altLang="en-US">
+                <a:solidFill>
+                  <a:srgbClr val="303437"/>
+                </a:solidFill>
+                <a:latin typeface="Noto Sans"/>
+                <a:ea typeface="Noto Sans CJK JP"/>
+                <a:cs typeface="Noto Sans"/>
+              </a:rPr>
+              <a:t>英語testの最初の1件を読み、Celex ID、法令本文、参照要約を順に表示する。ほかの言語も同じ三つの欄を持つ。</a:t>
+            </a:r>
+          </a:p>
+        </p:txBody>
+      </p:sp>
+      <p:sp>
+        <p:nvSpPr>
+          <p:cNvPr id="6" name="sources"/>
           <p:cNvSpPr txBox="1"/>
           <p:nvPr/>
         </p:nvSpPr>
@@ -34464,22 +33088,8 @@
                 <a:ea typeface="Noto Sans CJK JP"/>
                 <a:cs typeface="Noto Sans"/>
               </a:rPr>
-              <a:t>[1] Aumiller, Chouhan &amp; Gertz (2022), EUR-Lex-Sum: A Multi- and Cross-lingual Dataset for Long-form Summarization in the Legal Domain. EMNLP.</a:t>
-            </a:r>
-          </a:p>
-          <a:p>
-            <a:pPr>
-              <a:lnSpc>
-                <a:spcPts val="940"/>
-              </a:lnSpc>
-              <a:buNone/>
-              <a:defRPr sz="810" b="0">
-                <a:solidFill>
-                  <a:srgbClr val="303437"/>
-                </a:solidFill>
-                <a:latin typeface="Noto Sans"/>
-              </a:defRPr>
-            </a:pPr>
+              <a:t>[1] Aumiller et al. EUR-Lex-Sum. </a:t>
+            </a:r>
             <a:r>
               <a:rPr sz="810" b="0" lang="ja-JP" altLang="en-US">
                 <a:solidFill>
@@ -34488,9 +33098,9 @@
                 <a:latin typeface="Noto Sans"/>
                 <a:ea typeface="Noto Sans CJK JP"/>
                 <a:cs typeface="Noto Sans"/>
-                <a:hlinkClick r:id="rId2"/>
-              </a:rPr>
-              <a:t>https://aclanthology.org/2022.emnlp-main.519/</a:t>
+                <a:hlinkClick r:id="rId3"/>
+              </a:rPr>
+              <a:t>https://huggingface.co/datasets/dennlinger/eur-lex-sum</a:t>
             </a:r>
           </a:p>
         </p:txBody>
@@ -34525,158 +33135,45 @@
         </p:nvSpPr>
         <p:spPr>
           <a:xfrm>
-            <a:off x="468172" y="650138"/>
-            <a:ext cx="8206740" cy="616305"/>
+            <a:off x="548640" y="2506875"/>
+            <a:ext cx="8046720" cy="585216"/>
           </a:xfrm>
         </p:spPr>
         <p:txBody>
-          <a:bodyPr wrap="square" lIns="0" rIns="0" tIns="0" bIns="0">
+          <a:bodyPr wrap="square" lIns="0" rIns="0" tIns="0" bIns="0" anchor="ctr">
             <a:noAutofit/>
           </a:bodyPr>
           <a:lstStyle/>
           <a:p>
-            <a:pPr algn="l">
+            <a:pPr algn="ctr">
               <a:lnSpc>
                 <a:spcPct val="110000"/>
               </a:lnSpc>
               <a:buNone/>
-              <a:defRPr sz="2800" b="0">
-                <a:solidFill>
-                  <a:srgbClr val="303437"/>
-                </a:solidFill>
-                <a:latin typeface="Noto Sans"/>
-              </a:defRPr>
-            </a:pPr>
-            <a:r>
-              <a:rPr sz="2800" b="1" lang="ja-JP" altLang="en-US">
-                <a:solidFill>
-                  <a:srgbClr val="303437"/>
-                </a:solidFill>
-                <a:latin typeface="Noto Sans"/>
-                <a:ea typeface="Noto Sans CJK JP"/>
-                <a:cs typeface="Noto Sans"/>
-              </a:rPr>
-              <a:t>一つの要約に、複数の法令が対応する</a:t>
+              <a:defRPr sz="3600" b="0">
+                <a:solidFill>
+                  <a:srgbClr val="303437"/>
+                </a:solidFill>
+                <a:latin typeface="Noto Sans"/>
+              </a:defRPr>
+            </a:pPr>
+            <a:r>
+              <a:rPr sz="3600" b="1" lang="ja-JP" altLang="en-US">
+                <a:solidFill>
+                  <a:srgbClr val="303437"/>
+                </a:solidFill>
+                <a:latin typeface="Noto Sans"/>
+                <a:ea typeface="Noto Sans CJK JP"/>
+                <a:cs typeface="Noto Sans"/>
+              </a:rPr>
+              <a:t>研究と参考文献</a:t>
             </a:r>
           </a:p>
         </p:txBody>
       </p:sp>
       <p:sp>
         <p:nvSpPr>
-          <p:cNvPr id="3" name="Text Placeholder 2"/>
-          <p:cNvSpPr>
-            <a:spLocks noGrp="1"/>
-          </p:cNvSpPr>
-          <p:nvPr>
-            <p:ph type="body" idx="1"/>
-          </p:nvPr>
-        </p:nvSpPr>
-        <p:spPr>
-          <a:xfrm>
-            <a:off x="594360" y="1463040"/>
-            <a:ext cx="7955279" cy="3044952"/>
-          </a:xfrm>
-        </p:spPr>
-        <p:txBody>
-          <a:bodyPr wrap="square" tIns="91440" bIns="91440">
-            <a:noAutofit/>
-          </a:bodyPr>
-          <a:lstStyle/>
-          <a:p>
-            <a:pPr marL="457200" indent="-355600">
-              <a:lnSpc>
-                <a:spcPts val="2558"/>
-              </a:lnSpc>
-              <a:spcAft>
-                <a:spcPts val="700"/>
-              </a:spcAft>
-              <a:buSzPct val="61860"/>
-              <a:buFont typeface="Noto Sans CJK JP"/>
-              <a:buChar char="●"/>
-              <a:defRPr sz="2150" b="0">
-                <a:solidFill>
-                  <a:srgbClr val="303437"/>
-                </a:solidFill>
-                <a:latin typeface="Noto Sans"/>
-              </a:defRPr>
-            </a:pPr>
-            <a:r>
-              <a:rPr sz="2150" b="0" lang="ja-JP" altLang="en-US">
-                <a:solidFill>
-                  <a:srgbClr val="303437"/>
-                </a:solidFill>
-                <a:latin typeface="Noto Sans"/>
-                <a:ea typeface="Noto Sans CJK JP"/>
-                <a:cs typeface="Noto Sans"/>
-              </a:rPr>
-              <a:t>言語によって約20〜30%の要約が複数法令を扱うと報告されている。配布では最長の法令だけを残す。</a:t>
-            </a:r>
-          </a:p>
-          <a:p>
-            <a:pPr marL="457200" indent="-355600">
-              <a:lnSpc>
-                <a:spcPts val="2558"/>
-              </a:lnSpc>
-              <a:spcAft>
-                <a:spcPts val="700"/>
-              </a:spcAft>
-              <a:buSzPct val="61860"/>
-              <a:buFont typeface="Noto Sans CJK JP"/>
-              <a:buChar char="●"/>
-              <a:defRPr sz="2150" b="0">
-                <a:solidFill>
-                  <a:srgbClr val="303437"/>
-                </a:solidFill>
-                <a:latin typeface="Noto Sans"/>
-              </a:defRPr>
-            </a:pPr>
-            <a:r>
-              <a:rPr sz="2150" b="0" lang="ja-JP" altLang="en-US">
-                <a:solidFill>
-                  <a:srgbClr val="303437"/>
-                </a:solidFill>
-                <a:latin typeface="Noto Sans"/>
-                <a:ea typeface="Noto Sans CJK JP"/>
-                <a:cs typeface="Noto Sans"/>
-              </a:rPr>
-              <a:t>入力中にない語句を含む割合には、言い換えだけでなく、入力から除かれた法令の内容も影響し得る。</a:t>
-            </a:r>
-          </a:p>
-          <a:p>
-            <a:pPr marL="457200" indent="-355600">
-              <a:lnSpc>
-                <a:spcPts val="2558"/>
-              </a:lnSpc>
-              <a:spcAft>
-                <a:spcPts val="0"/>
-              </a:spcAft>
-              <a:buSzPct val="61860"/>
-              <a:buFont typeface="Noto Sans CJK JP"/>
-              <a:buChar char="●"/>
-              <a:defRPr sz="2150" b="0">
-                <a:solidFill>
-                  <a:srgbClr val="303437"/>
-                </a:solidFill>
-                <a:latin typeface="Noto Sans"/>
-              </a:defRPr>
-            </a:pPr>
-            <a:r>
-              <a:rPr sz="2150" b="0" lang="ja-JP" altLang="en-US">
-                <a:solidFill>
-                  <a:srgbClr val="303437"/>
-                </a:solidFill>
-                <a:latin typeface="Noto Sans"/>
-                <a:ea typeface="Noto Sans CJK JP"/>
-                <a:cs typeface="Noto Sans"/>
-              </a:rPr>
-              <a:t>現在の英語trainには、空白区切りで数えると、法令本文より要約の方が長い組が1件含まれる。</a:t>
-            </a:r>
-          </a:p>
-        </p:txBody>
-      </p:sp>
-      <p:sp>
-        <p:nvSpPr>
-          <p:cNvPr id="4" name="Title 3"/>
+          <p:cNvPr id="3" name="Title 2"/>
           <p:cNvSpPr>
             <a:spLocks noGrp="1"/>
           </p:cNvSpPr>
@@ -34717,84 +33214,7 @@
                 <a:ea typeface="Noto Sans CJK JP"/>
                 <a:cs typeface="Noto Sans"/>
               </a:rPr>
-              <a:t>Appendix: 2. 言語と統計の補足</a:t>
-            </a:r>
-          </a:p>
-        </p:txBody>
-      </p:sp>
-      <p:sp>
-        <p:nvSpPr>
-          <p:cNvPr id="5" name="sources"/>
-          <p:cNvSpPr txBox="1"/>
-          <p:nvPr/>
-        </p:nvSpPr>
-        <p:spPr>
-          <a:xfrm>
-            <a:off x="502920" y="4700016"/>
-            <a:ext cx="8183879" cy="530352"/>
-          </a:xfrm>
-          <a:prstGeom prst="rect">
-            <a:avLst/>
-          </a:prstGeom>
-          <a:noFill/>
-        </p:spPr>
-        <p:txBody>
-          <a:bodyPr wrap="square" lIns="0" rIns="0" tIns="0" bIns="0">
-            <a:noAutofit/>
-          </a:bodyPr>
-          <a:lstStyle/>
-          <a:p>
-            <a:pPr algn="l">
-              <a:lnSpc>
-                <a:spcPts val="940"/>
-              </a:lnSpc>
-              <a:spcBef>
-                <a:spcPts val="0"/>
-              </a:spcBef>
-              <a:spcAft>
-                <a:spcPts val="140"/>
-              </a:spcAft>
-              <a:buNone/>
-              <a:defRPr sz="810" b="0">
-                <a:solidFill>
-                  <a:srgbClr val="303437"/>
-                </a:solidFill>
-                <a:latin typeface="Noto Sans"/>
-              </a:defRPr>
-            </a:pPr>
-            <a:r>
-              <a:rPr sz="810" b="0" lang="ja-JP" altLang="en-US">
-                <a:solidFill>
-                  <a:srgbClr val="626669"/>
-                </a:solidFill>
-                <a:latin typeface="Noto Sans"/>
-                <a:ea typeface="Noto Sans CJK JP"/>
-                <a:cs typeface="Noto Sans"/>
-              </a:rPr>
-              <a:t>[1] Aumiller et al., EUR-Lex-Sum. 固定HF revision 33ecb2d、test実レコード。</a:t>
-            </a:r>
-            <a:r>
-              <a:rPr sz="810" b="0" lang="ja-JP" altLang="en-US">
-                <a:solidFill>
-                  <a:srgbClr val="626669"/>
-                </a:solidFill>
-                <a:latin typeface="Noto Sans"/>
-                <a:ea typeface="Noto Sans CJK JP"/>
-                <a:cs typeface="Noto Sans"/>
-              </a:rPr>
-              <a:t>  </a:t>
-            </a:r>
-            <a:r>
-              <a:rPr sz="810" b="0" lang="ja-JP" altLang="en-US">
-                <a:solidFill>
-                  <a:srgbClr val="626669"/>
-                </a:solidFill>
-                <a:latin typeface="Noto Sans"/>
-                <a:ea typeface="Noto Sans CJK JP"/>
-                <a:cs typeface="Noto Sans"/>
-                <a:hlinkClick r:id="rId2"/>
-              </a:rPr>
-              <a:t>https://huggingface.co/datasets/dennlinger/eur-lex-sum</a:t>
+              <a:t>Appendix: 3. 研究と参考文献</a:t>
             </a:r>
           </a:p>
         </p:txBody>
@@ -34860,14 +33280,97 @@
                 <a:ea typeface="Noto Sans CJK JP"/>
                 <a:cs typeface="Noto Sans"/>
               </a:rPr>
-              <a:t>三つの欄と、HELMへの変換</a:t>
+              <a:t>Aumiller・Chouhan・Gertzの研究</a:t>
             </a:r>
           </a:p>
         </p:txBody>
       </p:sp>
       <p:sp>
         <p:nvSpPr>
-          <p:cNvPr id="3" name="Title 2"/>
+          <p:cNvPr id="3" name="Text Placeholder 2"/>
+          <p:cNvSpPr>
+            <a:spLocks noGrp="1"/>
+          </p:cNvSpPr>
+          <p:nvPr>
+            <p:ph type="body" idx="1"/>
+          </p:nvPr>
+        </p:nvSpPr>
+        <p:spPr>
+          <a:xfrm>
+            <a:off x="594360" y="1463040"/>
+            <a:ext cx="7955279" cy="3044952"/>
+          </a:xfrm>
+        </p:spPr>
+        <p:txBody>
+          <a:bodyPr wrap="square" tIns="91440" bIns="91440">
+            <a:noAutofit/>
+          </a:bodyPr>
+          <a:lstStyle/>
+          <a:p>
+            <a:pPr marL="457200" indent="-355600">
+              <a:lnSpc>
+                <a:spcPts val="2558"/>
+              </a:lnSpc>
+              <a:spcAft>
+                <a:spcPts val="700"/>
+              </a:spcAft>
+              <a:buSzPct val="61860"/>
+              <a:buFont typeface="Noto Sans CJK JP"/>
+              <a:buChar char="●"/>
+              <a:defRPr sz="2150" b="0">
+                <a:solidFill>
+                  <a:srgbClr val="303437"/>
+                </a:solidFill>
+                <a:latin typeface="Noto Sans"/>
+              </a:defRPr>
+            </a:pPr>
+            <a:r>
+              <a:rPr sz="2150" b="0" lang="ja-JP" altLang="en-US">
+                <a:solidFill>
+                  <a:srgbClr val="303437"/>
+                </a:solidFill>
+                <a:latin typeface="Noto Sans"/>
+                <a:ea typeface="Noto Sans CJK JP"/>
+                <a:cs typeface="Noto Sans"/>
+              </a:rPr>
+              <a:t>Dennis AumillerとAshish Chouhanは共同第一著者。Michael Gertzとともに、ハイデルベルク大学のデータベースシステム研究グループで制作した。</a:t>
+            </a:r>
+          </a:p>
+          <a:p>
+            <a:pPr marL="457200" indent="-355600">
+              <a:lnSpc>
+                <a:spcPts val="2558"/>
+              </a:lnSpc>
+              <a:spcAft>
+                <a:spcPts val="700"/>
+              </a:spcAft>
+              <a:buSzPct val="61860"/>
+              <a:buFont typeface="Noto Sans CJK JP"/>
+              <a:buChar char="●"/>
+              <a:defRPr sz="2150" b="0">
+                <a:solidFill>
+                  <a:srgbClr val="303437"/>
+                </a:solidFill>
+                <a:latin typeface="Noto Sans"/>
+              </a:defRPr>
+            </a:pPr>
+            <a:r>
+              <a:rPr sz="2150" b="0" lang="ja-JP" altLang="en-US">
+                <a:solidFill>
+                  <a:srgbClr val="303437"/>
+                </a:solidFill>
+                <a:latin typeface="Noto Sans"/>
+                <a:ea typeface="Noto Sans CJK JP"/>
+                <a:cs typeface="Noto Sans"/>
+              </a:rPr>
+              <a:t>EMNLP 2022で発表。多言語の法令要約を、長文・低資源言語・言語間生成の研究につなげた。</a:t>
+            </a:r>
+          </a:p>
+        </p:txBody>
+      </p:sp>
+      <p:sp>
+        <p:nvSpPr>
+          <p:cNvPr id="4" name="Title 3"/>
           <p:cNvSpPr>
             <a:spLocks noGrp="1"/>
           </p:cNvSpPr>
@@ -34908,264 +33411,14 @@
                 <a:ea typeface="Noto Sans CJK JP"/>
                 <a:cs typeface="Noto Sans"/>
               </a:rPr>
-              <a:t>Appendix: 2. 言語と統計の補足</a:t>
+              <a:t>Appendix: 3. 研究と参考文献</a:t>
             </a:r>
           </a:p>
         </p:txBody>
       </p:sp>
       <p:sp>
         <p:nvSpPr>
-          <p:cNvPr id="4" name="Rectangle 3"/>
-          <p:cNvSpPr/>
-          <p:nvPr/>
-        </p:nvSpPr>
-        <p:spPr>
-          <a:xfrm>
-            <a:off x="548640" y="1508760"/>
-            <a:ext cx="8046720" cy="1682750"/>
-          </a:xfrm>
-          <a:prstGeom prst="rect">
-            <a:avLst/>
-          </a:prstGeom>
-          <a:solidFill>
-            <a:srgbClr val="EBEDEB"/>
-          </a:solidFill>
-          <a:ln>
-            <a:noFill/>
-          </a:ln>
-          <a:effectLst/>
-        </p:spPr>
-        <p:style>
-          <a:lnRef idx="1">
-            <a:schemeClr val="accent1"/>
-          </a:lnRef>
-          <a:fillRef idx="3">
-            <a:schemeClr val="accent1"/>
-          </a:fillRef>
-          <a:effectRef idx="0">
-            <a:schemeClr val="accent1"/>
-          </a:effectRef>
-          <a:fontRef idx="minor">
-            <a:schemeClr val="lt1"/>
-          </a:fontRef>
-        </p:style>
-        <p:txBody>
-          <a:bodyPr rtlCol="0" anchor="t" wrap="none" lIns="152400" rIns="152400" tIns="92710" bIns="127000"/>
-          <a:lstStyle/>
-          <a:p>
-            <a:pPr algn="l">
-              <a:lnSpc>
-                <a:spcPts val="2250"/>
-              </a:lnSpc>
-              <a:spcBef>
-                <a:spcPts val="0"/>
-              </a:spcBef>
-              <a:spcAft>
-                <a:spcPts val="0"/>
-              </a:spcAft>
-              <a:buNone/>
-              <a:defRPr sz="1800" b="0">
-                <a:solidFill>
-                  <a:srgbClr val="303437"/>
-                </a:solidFill>
-                <a:latin typeface="Noto Sans"/>
-              </a:defRPr>
-            </a:pPr>
-            <a:r>
-              <a:rPr sz="1800" b="0" lang="ja-JP" altLang="en-US">
-                <a:solidFill>
-                  <a:srgbClr val="303437"/>
-                </a:solidFill>
-                <a:latin typeface="Liberation Mono"/>
-                <a:ea typeface="Noto Sans CJK JP"/>
-                <a:cs typeface="Liberation Mono"/>
-              </a:rPr>
-              <a:t>row = json.loads(line)</a:t>
-            </a:r>
-          </a:p>
-          <a:p>
-            <a:pPr algn="l">
-              <a:lnSpc>
-                <a:spcPts val="2250"/>
-              </a:lnSpc>
-              <a:spcBef>
-                <a:spcPts val="0"/>
-              </a:spcBef>
-              <a:spcAft>
-                <a:spcPts val="0"/>
-              </a:spcAft>
-              <a:buNone/>
-              <a:defRPr sz="1800" b="0">
-                <a:solidFill>
-                  <a:srgbClr val="303437"/>
-                </a:solidFill>
-                <a:latin typeface="Noto Sans"/>
-              </a:defRPr>
-            </a:pPr>
-            <a:r>
-              <a:rPr sz="1800" b="0" lang="ja-JP" altLang="en-US">
-                <a:solidFill>
-                  <a:srgbClr val="303437"/>
-                </a:solidFill>
-                <a:latin typeface="Liberation Mono"/>
-                <a:ea typeface="Noto Sans CJK JP"/>
-                <a:cs typeface="Liberation Mono"/>
-              </a:rPr>
-              <a:t>celex_id = row["celex_id"]</a:t>
-            </a:r>
-          </a:p>
-          <a:p>
-            <a:pPr algn="l">
-              <a:lnSpc>
-                <a:spcPts val="2250"/>
-              </a:lnSpc>
-              <a:spcBef>
-                <a:spcPts val="0"/>
-              </a:spcBef>
-              <a:spcAft>
-                <a:spcPts val="0"/>
-              </a:spcAft>
-              <a:buNone/>
-              <a:defRPr sz="1800" b="0">
-                <a:solidFill>
-                  <a:srgbClr val="303437"/>
-                </a:solidFill>
-                <a:latin typeface="Noto Sans"/>
-              </a:defRPr>
-            </a:pPr>
-            <a:r>
-              <a:rPr sz="1800" b="0" lang="ja-JP" altLang="en-US">
-                <a:solidFill>
-                  <a:srgbClr val="303437"/>
-                </a:solidFill>
-                <a:latin typeface="Liberation Mono"/>
-                <a:ea typeface="Noto Sans CJK JP"/>
-                <a:cs typeface="Liberation Mono"/>
-              </a:rPr>
-              <a:t>article = " ".join(row["reference"].split())</a:t>
-            </a:r>
-          </a:p>
-          <a:p>
-            <a:pPr algn="l">
-              <a:lnSpc>
-                <a:spcPts val="2250"/>
-              </a:lnSpc>
-              <a:spcBef>
-                <a:spcPts val="0"/>
-              </a:spcBef>
-              <a:spcAft>
-                <a:spcPts val="0"/>
-              </a:spcAft>
-              <a:buNone/>
-              <a:defRPr sz="1800" b="0">
-                <a:solidFill>
-                  <a:srgbClr val="303437"/>
-                </a:solidFill>
-                <a:latin typeface="Noto Sans"/>
-              </a:defRPr>
-            </a:pPr>
-            <a:r>
-              <a:rPr sz="1800" b="0" lang="ja-JP" altLang="en-US">
-                <a:solidFill>
-                  <a:srgbClr val="303437"/>
-                </a:solidFill>
-                <a:latin typeface="Liberation Mono"/>
-                <a:ea typeface="Noto Sans CJK JP"/>
-                <a:cs typeface="Liberation Mono"/>
-              </a:rPr>
-              <a:t>summary = " ".join(row["summary"].split())</a:t>
-            </a:r>
-          </a:p>
-          <a:p>
-            <a:pPr algn="l">
-              <a:lnSpc>
-                <a:spcPts val="2250"/>
-              </a:lnSpc>
-              <a:spcBef>
-                <a:spcPts val="0"/>
-              </a:spcBef>
-              <a:spcAft>
-                <a:spcPts val="0"/>
-              </a:spcAft>
-              <a:buNone/>
-              <a:defRPr sz="1800" b="0">
-                <a:solidFill>
-                  <a:srgbClr val="303437"/>
-                </a:solidFill>
-                <a:latin typeface="Noto Sans"/>
-              </a:defRPr>
-            </a:pPr>
-            <a:r>
-              <a:rPr sz="1800" b="0" lang="ja-JP" altLang="en-US">
-                <a:solidFill>
-                  <a:srgbClr val="303437"/>
-                </a:solidFill>
-                <a:latin typeface="Liberation Mono"/>
-                <a:ea typeface="Noto Sans CJK JP"/>
-                <a:cs typeface="Liberation Mono"/>
-              </a:rPr>
-              <a:t># optional: article = " ".join(article.split()[:N])</a:t>
-            </a:r>
-          </a:p>
-        </p:txBody>
-      </p:sp>
-      <p:sp>
-        <p:nvSpPr>
-          <p:cNvPr id="5" name="TextBox 4"/>
-          <p:cNvSpPr txBox="1"/>
-          <p:nvPr/>
-        </p:nvSpPr>
-        <p:spPr>
-          <a:xfrm>
-            <a:off x="594360" y="3392678"/>
-            <a:ext cx="7955279" cy="777240"/>
-          </a:xfrm>
-          <a:prstGeom prst="rect">
-            <a:avLst/>
-          </a:prstGeom>
-          <a:noFill/>
-        </p:spPr>
-        <p:txBody>
-          <a:bodyPr wrap="square" lIns="0" rIns="0" tIns="0" bIns="0">
-            <a:noAutofit/>
-          </a:bodyPr>
-          <a:lstStyle/>
-          <a:p>
-            <a:pPr algn="l">
-              <a:lnSpc>
-                <a:spcPts val="2222"/>
-              </a:lnSpc>
-              <a:spcBef>
-                <a:spcPts val="0"/>
-              </a:spcBef>
-              <a:spcAft>
-                <a:spcPts val="0"/>
-              </a:spcAft>
-              <a:buNone/>
-              <a:defRPr sz="1900" b="0">
-                <a:solidFill>
-                  <a:srgbClr val="303437"/>
-                </a:solidFill>
-                <a:latin typeface="Noto Sans"/>
-              </a:defRPr>
-            </a:pPr>
-            <a:r>
-              <a:rPr sz="1900" b="0" lang="ja-JP" altLang="en-US">
-                <a:solidFill>
-                  <a:srgbClr val="303437"/>
-                </a:solidFill>
-                <a:latin typeface="Noto Sans"/>
-                <a:ea typeface="Noto Sans CJK JP"/>
-                <a:cs typeface="Noto Sans"/>
-              </a:rPr>
-              <a:t>実際の入力は法令本文全体。スライドの抜粋位置は記録から元の文字列へ照合できる。</a:t>
-            </a:r>
-          </a:p>
-        </p:txBody>
-      </p:sp>
-      <p:sp>
-        <p:nvSpPr>
-          <p:cNvPr id="6" name="sources"/>
+          <p:cNvPr id="5" name="sources"/>
           <p:cNvSpPr txBox="1"/>
           <p:nvPr/>
         </p:nvSpPr>
@@ -35212,7 +33465,7 @@
                 <a:ea typeface="Noto Sans CJK JP"/>
                 <a:cs typeface="Noto Sans"/>
               </a:rPr>
-              <a:t>[1] Stanford CRFM, HELM v0.4.0. LegalSummarizationScenario.</a:t>
+              <a:t>[1] Aumiller, Chouhan &amp; Gertz (2022), EUR-Lex-Sum: A Multi- and Cross-lingual Dataset for Long-form Summarization in the Legal Domain. EMNLP.</a:t>
             </a:r>
           </a:p>
           <a:p>
@@ -35238,7 +33491,7 @@
                 <a:cs typeface="Noto Sans"/>
                 <a:hlinkClick r:id="rId2"/>
               </a:rPr>
-              <a:t>https://github.com/stanford-crfm/helm/blob/v0.4.0/src/helm/benchmark/scenarios/legal_summarization_scenario.py</a:t>
+              <a:t>https://aclanthology.org/2022.emnlp-main.519/</a:t>
             </a:r>
           </a:p>
         </p:txBody>
@@ -35273,38 +33526,38 @@
         </p:nvSpPr>
         <p:spPr>
           <a:xfrm>
-            <a:off x="548640" y="2506875"/>
-            <a:ext cx="8046720" cy="585216"/>
+            <a:off x="468172" y="650138"/>
+            <a:ext cx="8206740" cy="616305"/>
           </a:xfrm>
         </p:spPr>
         <p:txBody>
-          <a:bodyPr wrap="square" lIns="0" rIns="0" tIns="0" bIns="0" anchor="ctr">
+          <a:bodyPr wrap="square" lIns="0" rIns="0" tIns="0" bIns="0">
             <a:noAutofit/>
           </a:bodyPr>
           <a:lstStyle/>
           <a:p>
-            <a:pPr algn="ctr">
+            <a:pPr algn="l">
               <a:lnSpc>
                 <a:spcPct val="110000"/>
               </a:lnSpc>
               <a:buNone/>
-              <a:defRPr sz="3600" b="0">
-                <a:solidFill>
-                  <a:srgbClr val="303437"/>
-                </a:solidFill>
-                <a:latin typeface="Noto Sans"/>
-              </a:defRPr>
-            </a:pPr>
-            <a:r>
-              <a:rPr sz="3600" b="1" lang="ja-JP" altLang="en-US">
-                <a:solidFill>
-                  <a:srgbClr val="303437"/>
-                </a:solidFill>
-                <a:latin typeface="Noto Sans"/>
-                <a:ea typeface="Noto Sans CJK JP"/>
-                <a:cs typeface="Noto Sans"/>
-              </a:rPr>
-              <a:t>研究と参考文献</a:t>
+              <a:defRPr sz="2800" b="0">
+                <a:solidFill>
+                  <a:srgbClr val="303437"/>
+                </a:solidFill>
+                <a:latin typeface="Noto Sans"/>
+              </a:defRPr>
+            </a:pPr>
+            <a:r>
+              <a:rPr sz="2800" b="1" lang="ja-JP" altLang="en-US">
+                <a:solidFill>
+                  <a:srgbClr val="303437"/>
+                </a:solidFill>
+                <a:latin typeface="Noto Sans"/>
+                <a:ea typeface="Noto Sans CJK JP"/>
+                <a:cs typeface="Noto Sans"/>
+              </a:rPr>
+              <a:t>参考文献</a:t>
             </a:r>
           </a:p>
         </p:txBody>
@@ -35353,6 +33606,302 @@
                 <a:cs typeface="Noto Sans"/>
               </a:rPr>
               <a:t>Appendix: 3. 研究と参考文献</a:t>
+            </a:r>
+          </a:p>
+        </p:txBody>
+      </p:sp>
+      <p:sp>
+        <p:nvSpPr>
+          <p:cNvPr id="4" name="文献 1: EUR-Lex-Sum: A Multi- and Cross-lingual Dataset for Long-form Summarization in the Legal Domain"/>
+          <p:cNvSpPr txBox="1"/>
+          <p:nvPr/>
+        </p:nvSpPr>
+        <p:spPr>
+          <a:xfrm>
+            <a:off x="548640" y="1280160"/>
+            <a:ext cx="8046720" cy="1943608"/>
+          </a:xfrm>
+          <a:prstGeom prst="rect">
+            <a:avLst/>
+          </a:prstGeom>
+          <a:noFill/>
+        </p:spPr>
+        <p:txBody>
+          <a:bodyPr wrap="square" lIns="0" rIns="0" tIns="0" bIns="0">
+            <a:noAutofit/>
+          </a:bodyPr>
+          <a:lstStyle/>
+          <a:p>
+            <a:pPr algn="l">
+              <a:lnSpc>
+                <a:spcPct val="114000"/>
+              </a:lnSpc>
+              <a:spcBef>
+                <a:spcPts val="0"/>
+              </a:spcBef>
+              <a:spcAft>
+                <a:spcPts val="400"/>
+              </a:spcAft>
+              <a:buNone/>
+              <a:defRPr sz="2000" b="0">
+                <a:solidFill>
+                  <a:srgbClr val="303437"/>
+                </a:solidFill>
+                <a:latin typeface="Noto Sans"/>
+              </a:defRPr>
+            </a:pPr>
+            <a:r>
+              <a:rPr sz="2000" b="1" lang="ja-JP" altLang="en-US">
+                <a:solidFill>
+                  <a:srgbClr val="303437"/>
+                </a:solidFill>
+                <a:latin typeface="Noto Sans"/>
+                <a:ea typeface="Noto Sans CJK JP"/>
+                <a:cs typeface="Noto Sans"/>
+              </a:rPr>
+              <a:t>EUR-Lex-Sum: A Multi- and Cross-lingual Dataset for Long-form Summarization in the Legal Domain</a:t>
+            </a:r>
+          </a:p>
+          <a:p>
+            <a:pPr algn="l">
+              <a:lnSpc>
+                <a:spcPct val="114000"/>
+              </a:lnSpc>
+              <a:spcBef>
+                <a:spcPts val="0"/>
+              </a:spcBef>
+              <a:spcAft>
+                <a:spcPts val="500"/>
+              </a:spcAft>
+              <a:buNone/>
+              <a:defRPr sz="1350" b="0">
+                <a:solidFill>
+                  <a:srgbClr val="303437"/>
+                </a:solidFill>
+                <a:latin typeface="Noto Sans"/>
+              </a:defRPr>
+            </a:pPr>
+            <a:r>
+              <a:rPr sz="1350" b="0" lang="ja-JP" altLang="en-US">
+                <a:solidFill>
+                  <a:srgbClr val="626669"/>
+                </a:solidFill>
+                <a:latin typeface="Noto Sans"/>
+                <a:ea typeface="Noto Sans CJK JP"/>
+                <a:cs typeface="Noto Sans"/>
+              </a:rPr>
+              <a:t>Dennis Aumiller, Ashish Chouhan, Michael Gertz (2022) ／ EMNLP</a:t>
+            </a:r>
+          </a:p>
+          <a:p>
+            <a:pPr algn="l">
+              <a:lnSpc>
+                <a:spcPct val="114000"/>
+              </a:lnSpc>
+              <a:spcBef>
+                <a:spcPts val="0"/>
+              </a:spcBef>
+              <a:spcAft>
+                <a:spcPts val="400"/>
+              </a:spcAft>
+              <a:buNone/>
+              <a:defRPr sz="1850" b="0">
+                <a:solidFill>
+                  <a:srgbClr val="303437"/>
+                </a:solidFill>
+                <a:latin typeface="Noto Sans"/>
+              </a:defRPr>
+            </a:pPr>
+            <a:r>
+              <a:rPr sz="1850" b="0" lang="ja-JP" altLang="en-US">
+                <a:solidFill>
+                  <a:srgbClr val="303437"/>
+                </a:solidFill>
+                <a:latin typeface="Noto Sans"/>
+                <a:ea typeface="Noto Sans CJK JP"/>
+                <a:cs typeface="Noto Sans"/>
+              </a:rPr>
+              <a:t>24言語の法令要約の収集・分割、長さと抽象性の分析、同言語と言語間のbaselineを報告。</a:t>
+            </a:r>
+          </a:p>
+          <a:p>
+            <a:pPr algn="l">
+              <a:lnSpc>
+                <a:spcPct val="114000"/>
+              </a:lnSpc>
+              <a:spcBef>
+                <a:spcPts val="0"/>
+              </a:spcBef>
+              <a:spcAft>
+                <a:spcPts val="0"/>
+              </a:spcAft>
+              <a:buNone/>
+              <a:defRPr sz="1150" b="0">
+                <a:solidFill>
+                  <a:srgbClr val="303437"/>
+                </a:solidFill>
+                <a:latin typeface="Noto Sans"/>
+              </a:defRPr>
+            </a:pPr>
+            <a:r>
+              <a:rPr sz="1150" b="0" lang="ja-JP" altLang="en-US">
+                <a:solidFill>
+                  <a:srgbClr val="626669"/>
+                </a:solidFill>
+                <a:latin typeface="Noto Sans"/>
+                <a:ea typeface="Noto Sans CJK JP"/>
+                <a:cs typeface="Noto Sans"/>
+                <a:hlinkClick r:id="rId2"/>
+              </a:rPr>
+              <a:t>https://aclanthology.org/2022.emnlp-main.519/</a:t>
+            </a:r>
+          </a:p>
+        </p:txBody>
+      </p:sp>
+      <p:sp>
+        <p:nvSpPr>
+          <p:cNvPr id="5" name="文献 2: EUR-Lex-Sum：公式コードとデータ"/>
+          <p:cNvSpPr txBox="1"/>
+          <p:nvPr/>
+        </p:nvSpPr>
+        <p:spPr>
+          <a:xfrm>
+            <a:off x="548640" y="3226816"/>
+            <a:ext cx="8046720" cy="1654048"/>
+          </a:xfrm>
+          <a:prstGeom prst="rect">
+            <a:avLst/>
+          </a:prstGeom>
+          <a:noFill/>
+        </p:spPr>
+        <p:txBody>
+          <a:bodyPr wrap="square" lIns="0" rIns="0" tIns="0" bIns="0">
+            <a:noAutofit/>
+          </a:bodyPr>
+          <a:lstStyle/>
+          <a:p>
+            <a:pPr algn="l">
+              <a:lnSpc>
+                <a:spcPct val="114000"/>
+              </a:lnSpc>
+              <a:spcBef>
+                <a:spcPts val="0"/>
+              </a:spcBef>
+              <a:spcAft>
+                <a:spcPts val="400"/>
+              </a:spcAft>
+              <a:buNone/>
+              <a:defRPr sz="2000" b="0">
+                <a:solidFill>
+                  <a:srgbClr val="303437"/>
+                </a:solidFill>
+                <a:latin typeface="Noto Sans"/>
+              </a:defRPr>
+            </a:pPr>
+            <a:r>
+              <a:rPr sz="2000" b="1" lang="ja-JP" altLang="en-US">
+                <a:solidFill>
+                  <a:srgbClr val="303437"/>
+                </a:solidFill>
+                <a:latin typeface="Noto Sans"/>
+                <a:ea typeface="Noto Sans CJK JP"/>
+                <a:cs typeface="Noto Sans"/>
+              </a:rPr>
+              <a:t>EUR-Lex-Sum：公式コードとデータ</a:t>
+            </a:r>
+          </a:p>
+          <a:p>
+            <a:pPr algn="l">
+              <a:lnSpc>
+                <a:spcPct val="114000"/>
+              </a:lnSpc>
+              <a:spcBef>
+                <a:spcPts val="0"/>
+              </a:spcBef>
+              <a:spcAft>
+                <a:spcPts val="500"/>
+              </a:spcAft>
+              <a:buNone/>
+              <a:defRPr sz="1350" b="0">
+                <a:solidFill>
+                  <a:srgbClr val="303437"/>
+                </a:solidFill>
+                <a:latin typeface="Noto Sans"/>
+              </a:defRPr>
+            </a:pPr>
+            <a:r>
+              <a:rPr sz="1350" b="0" lang="ja-JP" altLang="en-US">
+                <a:solidFill>
+                  <a:srgbClr val="626669"/>
+                </a:solidFill>
+                <a:latin typeface="Noto Sans"/>
+                <a:ea typeface="Noto Sans CJK JP"/>
+                <a:cs typeface="Noto Sans"/>
+              </a:rPr>
+              <a:t>Aumiller et al. · n.d. · 公式GitHub・Hugging Face（2026-10-18参照）</a:t>
+            </a:r>
+          </a:p>
+          <a:p>
+            <a:pPr algn="l">
+              <a:lnSpc>
+                <a:spcPct val="114000"/>
+              </a:lnSpc>
+              <a:spcBef>
+                <a:spcPts val="0"/>
+              </a:spcBef>
+              <a:spcAft>
+                <a:spcPts val="400"/>
+              </a:spcAft>
+              <a:buNone/>
+              <a:defRPr sz="1850" b="0">
+                <a:solidFill>
+                  <a:srgbClr val="303437"/>
+                </a:solidFill>
+                <a:latin typeface="Noto Sans"/>
+              </a:defRPr>
+            </a:pPr>
+            <a:r>
+              <a:rPr sz="1850" b="0" lang="ja-JP" altLang="en-US">
+                <a:solidFill>
+                  <a:srgbClr val="303437"/>
+                </a:solidFill>
+                <a:latin typeface="Noto Sans"/>
+                <a:ea typeface="Noto Sans CJK JP"/>
+                <a:cs typeface="Noto Sans"/>
+              </a:rPr>
+              <a:t>収集・分析・LexRankのコードと、言語別の本文・要約・Celex IDを公開する。</a:t>
+            </a:r>
+          </a:p>
+          <a:p>
+            <a:pPr algn="l">
+              <a:lnSpc>
+                <a:spcPct val="114000"/>
+              </a:lnSpc>
+              <a:spcBef>
+                <a:spcPts val="0"/>
+              </a:spcBef>
+              <a:spcAft>
+                <a:spcPts val="0"/>
+              </a:spcAft>
+              <a:buNone/>
+              <a:defRPr sz="1150" b="0">
+                <a:solidFill>
+                  <a:srgbClr val="303437"/>
+                </a:solidFill>
+                <a:latin typeface="Noto Sans"/>
+              </a:defRPr>
+            </a:pPr>
+            <a:r>
+              <a:rPr sz="1150" b="0" lang="ja-JP" altLang="en-US">
+                <a:solidFill>
+                  <a:srgbClr val="626669"/>
+                </a:solidFill>
+                <a:latin typeface="Noto Sans"/>
+                <a:ea typeface="Noto Sans CJK JP"/>
+                <a:cs typeface="Noto Sans"/>
+                <a:hlinkClick r:id="rId3"/>
+              </a:rPr>
+              <a:t>https://github.com/achouhan93/eur-lex-sum</a:t>
             </a:r>
           </a:p>
         </p:txBody>
@@ -35418,313 +33967,6 @@
                 <a:ea typeface="Noto Sans CJK JP"/>
                 <a:cs typeface="Noto Sans"/>
               </a:rPr>
-              <a:t>Aumiller・Chouhan・Gertzの研究</a:t>
-            </a:r>
-          </a:p>
-        </p:txBody>
-      </p:sp>
-      <p:sp>
-        <p:nvSpPr>
-          <p:cNvPr id="3" name="Text Placeholder 2"/>
-          <p:cNvSpPr>
-            <a:spLocks noGrp="1"/>
-          </p:cNvSpPr>
-          <p:nvPr>
-            <p:ph type="body" idx="1"/>
-          </p:nvPr>
-        </p:nvSpPr>
-        <p:spPr>
-          <a:xfrm>
-            <a:off x="594360" y="1463040"/>
-            <a:ext cx="7955279" cy="3044952"/>
-          </a:xfrm>
-        </p:spPr>
-        <p:txBody>
-          <a:bodyPr wrap="square" tIns="91440" bIns="91440">
-            <a:noAutofit/>
-          </a:bodyPr>
-          <a:lstStyle/>
-          <a:p>
-            <a:pPr marL="457200" indent="-355600">
-              <a:lnSpc>
-                <a:spcPts val="2558"/>
-              </a:lnSpc>
-              <a:spcAft>
-                <a:spcPts val="700"/>
-              </a:spcAft>
-              <a:buSzPct val="61860"/>
-              <a:buFont typeface="Noto Sans CJK JP"/>
-              <a:buChar char="●"/>
-              <a:defRPr sz="2150" b="0">
-                <a:solidFill>
-                  <a:srgbClr val="303437"/>
-                </a:solidFill>
-                <a:latin typeface="Noto Sans"/>
-              </a:defRPr>
-            </a:pPr>
-            <a:r>
-              <a:rPr sz="2150" b="0" lang="ja-JP" altLang="en-US">
-                <a:solidFill>
-                  <a:srgbClr val="303437"/>
-                </a:solidFill>
-                <a:latin typeface="Noto Sans"/>
-                <a:ea typeface="Noto Sans CJK JP"/>
-                <a:cs typeface="Noto Sans"/>
-              </a:rPr>
-              <a:t>Dennis AumillerとAshish Chouhanは共同第一著者。Michael Gertzとともに、ハイデルベルク大学のデータベースシステム研究グループで制作した。</a:t>
-            </a:r>
-          </a:p>
-          <a:p>
-            <a:pPr marL="457200" indent="-355600">
-              <a:lnSpc>
-                <a:spcPts val="2558"/>
-              </a:lnSpc>
-              <a:spcAft>
-                <a:spcPts val="700"/>
-              </a:spcAft>
-              <a:buSzPct val="61860"/>
-              <a:buFont typeface="Noto Sans CJK JP"/>
-              <a:buChar char="●"/>
-              <a:defRPr sz="2150" b="0">
-                <a:solidFill>
-                  <a:srgbClr val="303437"/>
-                </a:solidFill>
-                <a:latin typeface="Noto Sans"/>
-              </a:defRPr>
-            </a:pPr>
-            <a:r>
-              <a:rPr sz="2150" b="0" lang="ja-JP" altLang="en-US">
-                <a:solidFill>
-                  <a:srgbClr val="303437"/>
-                </a:solidFill>
-                <a:latin typeface="Noto Sans"/>
-                <a:ea typeface="Noto Sans CJK JP"/>
-                <a:cs typeface="Noto Sans"/>
-              </a:rPr>
-              <a:t>Chouhanが収集用crawlerを実装し、Aumillerがフィルタリングと修正を担当したと配布カードに記載されている。</a:t>
-            </a:r>
-          </a:p>
-          <a:p>
-            <a:pPr marL="457200" indent="-355600">
-              <a:lnSpc>
-                <a:spcPts val="2558"/>
-              </a:lnSpc>
-              <a:spcAft>
-                <a:spcPts val="0"/>
-              </a:spcAft>
-              <a:buSzPct val="61860"/>
-              <a:buFont typeface="Noto Sans CJK JP"/>
-              <a:buChar char="●"/>
-              <a:defRPr sz="2150" b="0">
-                <a:solidFill>
-                  <a:srgbClr val="303437"/>
-                </a:solidFill>
-                <a:latin typeface="Noto Sans"/>
-              </a:defRPr>
-            </a:pPr>
-            <a:r>
-              <a:rPr sz="2150" b="0" lang="ja-JP" altLang="en-US">
-                <a:solidFill>
-                  <a:srgbClr val="303437"/>
-                </a:solidFill>
-                <a:latin typeface="Noto Sans"/>
-                <a:ea typeface="Noto Sans CJK JP"/>
-                <a:cs typeface="Noto Sans"/>
-              </a:rPr>
-              <a:t>EMNLP 2022で発表。多言語の法令要約を、長文・低資源言語・言語間生成の研究につなげた。</a:t>
-            </a:r>
-          </a:p>
-        </p:txBody>
-      </p:sp>
-      <p:sp>
-        <p:nvSpPr>
-          <p:cNvPr id="4" name="Title 3"/>
-          <p:cNvSpPr>
-            <a:spLocks noGrp="1"/>
-          </p:cNvSpPr>
-          <p:nvPr>
-            <p:ph type="title" idx="2"/>
-          </p:nvPr>
-        </p:nvSpPr>
-        <p:spPr>
-          <a:xfrm>
-            <a:off x="75895" y="0"/>
-            <a:ext cx="8115300" cy="480060"/>
-          </a:xfrm>
-        </p:spPr>
-        <p:txBody>
-          <a:bodyPr wrap="square" lIns="0" rIns="0" tIns="0" bIns="0" anchor="ctr">
-            <a:noAutofit/>
-          </a:bodyPr>
-          <a:lstStyle/>
-          <a:p>
-            <a:pPr algn="l">
-              <a:lnSpc>
-                <a:spcPct val="110000"/>
-              </a:lnSpc>
-              <a:buNone/>
-              <a:defRPr sz="1400" b="0">
-                <a:solidFill>
-                  <a:srgbClr val="303437"/>
-                </a:solidFill>
-                <a:latin typeface="Noto Sans"/>
-              </a:defRPr>
-            </a:pPr>
-            <a:r>
-              <a:rPr sz="1400" b="1" lang="ja-JP" altLang="en-US">
-                <a:solidFill>
-                  <a:srgbClr val="FFFEF8"/>
-                </a:solidFill>
-                <a:latin typeface="Noto Sans"/>
-                <a:ea typeface="Noto Sans CJK JP"/>
-                <a:cs typeface="Noto Sans"/>
-              </a:rPr>
-              <a:t>Appendix: 3. 研究と参考文献</a:t>
-            </a:r>
-          </a:p>
-        </p:txBody>
-      </p:sp>
-      <p:sp>
-        <p:nvSpPr>
-          <p:cNvPr id="5" name="sources"/>
-          <p:cNvSpPr txBox="1"/>
-          <p:nvPr/>
-        </p:nvSpPr>
-        <p:spPr>
-          <a:xfrm>
-            <a:off x="502920" y="4700016"/>
-            <a:ext cx="8183879" cy="530352"/>
-          </a:xfrm>
-          <a:prstGeom prst="rect">
-            <a:avLst/>
-          </a:prstGeom>
-          <a:noFill/>
-        </p:spPr>
-        <p:txBody>
-          <a:bodyPr wrap="square" lIns="0" rIns="0" tIns="0" bIns="0">
-            <a:noAutofit/>
-          </a:bodyPr>
-          <a:lstStyle/>
-          <a:p>
-            <a:pPr algn="l">
-              <a:lnSpc>
-                <a:spcPts val="940"/>
-              </a:lnSpc>
-              <a:spcBef>
-                <a:spcPts val="0"/>
-              </a:spcBef>
-              <a:spcAft>
-                <a:spcPts val="140"/>
-              </a:spcAft>
-              <a:buNone/>
-              <a:defRPr sz="810" b="0">
-                <a:solidFill>
-                  <a:srgbClr val="303437"/>
-                </a:solidFill>
-                <a:latin typeface="Noto Sans"/>
-              </a:defRPr>
-            </a:pPr>
-            <a:r>
-              <a:rPr sz="810" b="0" lang="ja-JP" altLang="en-US">
-                <a:solidFill>
-                  <a:srgbClr val="626669"/>
-                </a:solidFill>
-                <a:latin typeface="Noto Sans"/>
-                <a:ea typeface="Noto Sans CJK JP"/>
-                <a:cs typeface="Noto Sans"/>
-              </a:rPr>
-              <a:t>[1] Aumiller, Chouhan &amp; Gertz (2022), EUR-Lex-Sum: A Multi- and Cross-lingual Dataset for Long-form Summarization in the Legal Domain. EMNLP.</a:t>
-            </a:r>
-          </a:p>
-          <a:p>
-            <a:pPr>
-              <a:lnSpc>
-                <a:spcPts val="940"/>
-              </a:lnSpc>
-              <a:buNone/>
-              <a:defRPr sz="810" b="0">
-                <a:solidFill>
-                  <a:srgbClr val="303437"/>
-                </a:solidFill>
-                <a:latin typeface="Noto Sans"/>
-              </a:defRPr>
-            </a:pPr>
-            <a:r>
-              <a:rPr sz="810" b="0" lang="ja-JP" altLang="en-US">
-                <a:solidFill>
-                  <a:srgbClr val="626669"/>
-                </a:solidFill>
-                <a:latin typeface="Noto Sans"/>
-                <a:ea typeface="Noto Sans CJK JP"/>
-                <a:cs typeface="Noto Sans"/>
-                <a:hlinkClick r:id="rId2"/>
-              </a:rPr>
-              <a:t>https://aclanthology.org/2022.emnlp-main.519/</a:t>
-            </a:r>
-          </a:p>
-        </p:txBody>
-      </p:sp>
-    </p:spTree>
-  </p:cSld>
-  <p:clrMapOvr>
-    <a:masterClrMapping/>
-  </p:clrMapOvr>
-</p:sld>
-</file>
-
-<file path=ppt/slides/slide65.xml><?xml version="1.0" encoding="utf-8"?>
-<p:sld xmlns:a="http://schemas.openxmlformats.org/drawingml/2006/main" xmlns:p="http://schemas.openxmlformats.org/presentationml/2006/main" xmlns:r="http://schemas.openxmlformats.org/officeDocument/2006/relationships">
-  <p:cSld>
-    <p:spTree>
-      <p:nvGrpSpPr>
-        <p:cNvPr id="1" name=""/>
-        <p:cNvGrpSpPr/>
-        <p:nvPr/>
-      </p:nvGrpSpPr>
-      <p:grpSpPr/>
-      <p:sp>
-        <p:nvSpPr>
-          <p:cNvPr id="2" name="Title 1"/>
-          <p:cNvSpPr>
-            <a:spLocks noGrp="1"/>
-          </p:cNvSpPr>
-          <p:nvPr>
-            <p:ph type="title"/>
-          </p:nvPr>
-        </p:nvSpPr>
-        <p:spPr>
-          <a:xfrm>
-            <a:off x="468172" y="650138"/>
-            <a:ext cx="8206740" cy="616305"/>
-          </a:xfrm>
-        </p:spPr>
-        <p:txBody>
-          <a:bodyPr wrap="square" lIns="0" rIns="0" tIns="0" bIns="0">
-            <a:noAutofit/>
-          </a:bodyPr>
-          <a:lstStyle/>
-          <a:p>
-            <a:pPr algn="l">
-              <a:lnSpc>
-                <a:spcPct val="110000"/>
-              </a:lnSpc>
-              <a:buNone/>
-              <a:defRPr sz="2800" b="0">
-                <a:solidFill>
-                  <a:srgbClr val="303437"/>
-                </a:solidFill>
-                <a:latin typeface="Noto Sans"/>
-              </a:defRPr>
-            </a:pPr>
-            <a:r>
-              <a:rPr sz="2800" b="1" lang="ja-JP" altLang="en-US">
-                <a:solidFill>
-                  <a:srgbClr val="303437"/>
-                </a:solidFill>
-                <a:latin typeface="Noto Sans"/>
-                <a:ea typeface="Noto Sans CJK JP"/>
-                <a:cs typeface="Noto Sans"/>
-              </a:rPr>
               <a:t>参考文献</a:t>
             </a:r>
           </a:p>
@@ -35780,14 +34022,14 @@
       </p:sp>
       <p:sp>
         <p:nvSpPr>
-          <p:cNvPr id="4" name="文献 1: EUR-Lex-Sum: A Multi- and Cross-lingual Dataset for Long-form Summarization in the Legal Domain"/>
+          <p:cNvPr id="4" name="文献 1: ROUGE: A Package for Automatic Evaluation of Summaries"/>
           <p:cNvSpPr txBox="1"/>
           <p:nvPr/>
         </p:nvSpPr>
         <p:spPr>
           <a:xfrm>
             <a:off x="548640" y="1280160"/>
-            <a:ext cx="8046720" cy="1715008"/>
+            <a:ext cx="8046720" cy="1654048"/>
           </a:xfrm>
           <a:prstGeom prst="rect">
             <a:avLst/>
@@ -35827,7 +34069,7 @@
                 <a:ea typeface="Noto Sans CJK JP"/>
                 <a:cs typeface="Noto Sans"/>
               </a:rPr>
-              <a:t>EUR-Lex-Sum: A Multi- and Cross-lingual Dataset for Long-form Summarization in the Legal Domain</a:t>
+              <a:t>ROUGE: A Package for Automatic Evaluation of Summaries</a:t>
             </a:r>
           </a:p>
           <a:p>
@@ -35858,7 +34100,7 @@
                 <a:ea typeface="Noto Sans CJK JP"/>
                 <a:cs typeface="Noto Sans"/>
               </a:rPr>
-              <a:t>Dennis Aumiller, Ashish Chouhan, Michael Gertz (2022) ／ EMNLP</a:t>
+              <a:t>Chin-Yew Lin (2004) ／ Text Summarization Branches Out</a:t>
             </a:r>
           </a:p>
           <a:p>
@@ -35889,7 +34131,7 @@
                 <a:ea typeface="Noto Sans CJK JP"/>
                 <a:cs typeface="Noto Sans"/>
               </a:rPr>
-              <a:t>24言語の法令要約の収集・分割、長さと抽象性の分析、同言語と言語間のbaselineを報告。</a:t>
+              <a:t>参照要約と生成要約の語や語列の重なりを使い、複数の自動評価指標を定義する。</a:t>
             </a:r>
           </a:p>
           <a:p>
@@ -35921,565 +34163,7 @@
                 <a:cs typeface="Noto Sans"/>
                 <a:hlinkClick r:id="rId2"/>
               </a:rPr>
-              <a:t>https://aclanthology.org/2022.emnlp-main.519/</a:t>
-            </a:r>
-          </a:p>
-        </p:txBody>
-      </p:sp>
-      <p:sp>
-        <p:nvSpPr>
-          <p:cNvPr id="5" name="文献 2: EUR-Lex-Sum：公式コードとデータ"/>
-          <p:cNvSpPr txBox="1"/>
-          <p:nvPr/>
-        </p:nvSpPr>
-        <p:spPr>
-          <a:xfrm>
-            <a:off x="548640" y="3226816"/>
-            <a:ext cx="8046720" cy="1425448"/>
-          </a:xfrm>
-          <a:prstGeom prst="rect">
-            <a:avLst/>
-          </a:prstGeom>
-          <a:noFill/>
-        </p:spPr>
-        <p:txBody>
-          <a:bodyPr wrap="square" lIns="0" rIns="0" tIns="0" bIns="0">
-            <a:noAutofit/>
-          </a:bodyPr>
-          <a:lstStyle/>
-          <a:p>
-            <a:pPr algn="l">
-              <a:lnSpc>
-                <a:spcPct val="114000"/>
-              </a:lnSpc>
-              <a:spcBef>
-                <a:spcPts val="0"/>
-              </a:spcBef>
-              <a:spcAft>
-                <a:spcPts val="400"/>
-              </a:spcAft>
-              <a:buNone/>
-              <a:defRPr sz="2000" b="0">
-                <a:solidFill>
-                  <a:srgbClr val="303437"/>
-                </a:solidFill>
-                <a:latin typeface="Noto Sans"/>
-              </a:defRPr>
-            </a:pPr>
-            <a:r>
-              <a:rPr sz="2000" b="1" lang="ja-JP" altLang="en-US">
-                <a:solidFill>
-                  <a:srgbClr val="303437"/>
-                </a:solidFill>
-                <a:latin typeface="Noto Sans"/>
-                <a:ea typeface="Noto Sans CJK JP"/>
-                <a:cs typeface="Noto Sans"/>
-              </a:rPr>
-              <a:t>EUR-Lex-Sum：公式コードとデータ</a:t>
-            </a:r>
-          </a:p>
-          <a:p>
-            <a:pPr algn="l">
-              <a:lnSpc>
-                <a:spcPct val="114000"/>
-              </a:lnSpc>
-              <a:spcBef>
-                <a:spcPts val="0"/>
-              </a:spcBef>
-              <a:spcAft>
-                <a:spcPts val="500"/>
-              </a:spcAft>
-              <a:buNone/>
-              <a:defRPr sz="1350" b="0">
-                <a:solidFill>
-                  <a:srgbClr val="303437"/>
-                </a:solidFill>
-                <a:latin typeface="Noto Sans"/>
-              </a:defRPr>
-            </a:pPr>
-            <a:r>
-              <a:rPr sz="1350" b="0" lang="ja-JP" altLang="en-US">
-                <a:solidFill>
-                  <a:srgbClr val="626669"/>
-                </a:solidFill>
-                <a:latin typeface="Noto Sans"/>
-                <a:ea typeface="Noto Sans CJK JP"/>
-                <a:cs typeface="Noto Sans"/>
-              </a:rPr>
-              <a:t>Aumiller et al. ／ 公式GitHub・Hugging Face</a:t>
-            </a:r>
-          </a:p>
-          <a:p>
-            <a:pPr algn="l">
-              <a:lnSpc>
-                <a:spcPct val="114000"/>
-              </a:lnSpc>
-              <a:spcBef>
-                <a:spcPts val="0"/>
-              </a:spcBef>
-              <a:spcAft>
-                <a:spcPts val="400"/>
-              </a:spcAft>
-              <a:buNone/>
-              <a:defRPr sz="1850" b="0">
-                <a:solidFill>
-                  <a:srgbClr val="303437"/>
-                </a:solidFill>
-                <a:latin typeface="Noto Sans"/>
-              </a:defRPr>
-            </a:pPr>
-            <a:r>
-              <a:rPr sz="1850" b="0" lang="ja-JP" altLang="en-US">
-                <a:solidFill>
-                  <a:srgbClr val="303437"/>
-                </a:solidFill>
-                <a:latin typeface="Noto Sans"/>
-                <a:ea typeface="Noto Sans CJK JP"/>
-                <a:cs typeface="Noto Sans"/>
-              </a:rPr>
-              <a:t>収集・分析・LexRankのコードと、言語別の本文・要約・Celex IDを公開する。</a:t>
-            </a:r>
-          </a:p>
-          <a:p>
-            <a:pPr algn="l">
-              <a:lnSpc>
-                <a:spcPct val="114000"/>
-              </a:lnSpc>
-              <a:spcBef>
-                <a:spcPts val="0"/>
-              </a:spcBef>
-              <a:spcAft>
-                <a:spcPts val="0"/>
-              </a:spcAft>
-              <a:buNone/>
-              <a:defRPr sz="1150" b="0">
-                <a:solidFill>
-                  <a:srgbClr val="303437"/>
-                </a:solidFill>
-                <a:latin typeface="Noto Sans"/>
-              </a:defRPr>
-            </a:pPr>
-            <a:r>
-              <a:rPr sz="1150" b="0" lang="ja-JP" altLang="en-US">
-                <a:solidFill>
-                  <a:srgbClr val="626669"/>
-                </a:solidFill>
-                <a:latin typeface="Noto Sans"/>
-                <a:ea typeface="Noto Sans CJK JP"/>
-                <a:cs typeface="Noto Sans"/>
-                <a:hlinkClick r:id="rId3"/>
-              </a:rPr>
-              <a:t>https://github.com/achouhan93/eur-lex-sum</a:t>
-            </a:r>
-          </a:p>
-        </p:txBody>
-      </p:sp>
-    </p:spTree>
-  </p:cSld>
-  <p:clrMapOvr>
-    <a:masterClrMapping/>
-  </p:clrMapOvr>
-</p:sld>
-</file>
-
-<file path=ppt/slides/slide66.xml><?xml version="1.0" encoding="utf-8"?>
-<p:sld xmlns:a="http://schemas.openxmlformats.org/drawingml/2006/main" xmlns:p="http://schemas.openxmlformats.org/presentationml/2006/main" xmlns:r="http://schemas.openxmlformats.org/officeDocument/2006/relationships">
-  <p:cSld>
-    <p:spTree>
-      <p:nvGrpSpPr>
-        <p:cNvPr id="1" name=""/>
-        <p:cNvGrpSpPr/>
-        <p:nvPr/>
-      </p:nvGrpSpPr>
-      <p:grpSpPr/>
-      <p:sp>
-        <p:nvSpPr>
-          <p:cNvPr id="2" name="Title 1"/>
-          <p:cNvSpPr>
-            <a:spLocks noGrp="1"/>
-          </p:cNvSpPr>
-          <p:nvPr>
-            <p:ph type="title"/>
-          </p:nvPr>
-        </p:nvSpPr>
-        <p:spPr>
-          <a:xfrm>
-            <a:off x="468172" y="650138"/>
-            <a:ext cx="8206740" cy="616305"/>
-          </a:xfrm>
-        </p:spPr>
-        <p:txBody>
-          <a:bodyPr wrap="square" lIns="0" rIns="0" tIns="0" bIns="0">
-            <a:noAutofit/>
-          </a:bodyPr>
-          <a:lstStyle/>
-          <a:p>
-            <a:pPr algn="l">
-              <a:lnSpc>
-                <a:spcPct val="110000"/>
-              </a:lnSpc>
-              <a:buNone/>
-              <a:defRPr sz="2800" b="0">
-                <a:solidFill>
-                  <a:srgbClr val="303437"/>
-                </a:solidFill>
-                <a:latin typeface="Noto Sans"/>
-              </a:defRPr>
-            </a:pPr>
-            <a:r>
-              <a:rPr sz="2800" b="1" lang="ja-JP" altLang="en-US">
-                <a:solidFill>
-                  <a:srgbClr val="303437"/>
-                </a:solidFill>
-                <a:latin typeface="Noto Sans"/>
-                <a:ea typeface="Noto Sans CJK JP"/>
-                <a:cs typeface="Noto Sans"/>
-              </a:rPr>
-              <a:t>参考文献</a:t>
-            </a:r>
-          </a:p>
-        </p:txBody>
-      </p:sp>
-      <p:sp>
-        <p:nvSpPr>
-          <p:cNvPr id="3" name="Title 2"/>
-          <p:cNvSpPr>
-            <a:spLocks noGrp="1"/>
-          </p:cNvSpPr>
-          <p:nvPr>
-            <p:ph type="title" idx="2"/>
-          </p:nvPr>
-        </p:nvSpPr>
-        <p:spPr>
-          <a:xfrm>
-            <a:off x="75895" y="0"/>
-            <a:ext cx="8115300" cy="480060"/>
-          </a:xfrm>
-        </p:spPr>
-        <p:txBody>
-          <a:bodyPr wrap="square" lIns="0" rIns="0" tIns="0" bIns="0" anchor="ctr">
-            <a:noAutofit/>
-          </a:bodyPr>
-          <a:lstStyle/>
-          <a:p>
-            <a:pPr algn="l">
-              <a:lnSpc>
-                <a:spcPct val="110000"/>
-              </a:lnSpc>
-              <a:buNone/>
-              <a:defRPr sz="1400" b="0">
-                <a:solidFill>
-                  <a:srgbClr val="303437"/>
-                </a:solidFill>
-                <a:latin typeface="Noto Sans"/>
-              </a:defRPr>
-            </a:pPr>
-            <a:r>
-              <a:rPr sz="1400" b="1" lang="ja-JP" altLang="en-US">
-                <a:solidFill>
-                  <a:srgbClr val="FFFEF8"/>
-                </a:solidFill>
-                <a:latin typeface="Noto Sans"/>
-                <a:ea typeface="Noto Sans CJK JP"/>
-                <a:cs typeface="Noto Sans"/>
-              </a:rPr>
-              <a:t>Appendix: 3. 研究と参考文献</a:t>
-            </a:r>
-          </a:p>
-        </p:txBody>
-      </p:sp>
-      <p:sp>
-        <p:nvSpPr>
-          <p:cNvPr id="4" name="文献 1: ROUGE: A Package for Automatic Evaluation of Summaries"/>
-          <p:cNvSpPr txBox="1"/>
-          <p:nvPr/>
-        </p:nvSpPr>
-        <p:spPr>
-          <a:xfrm>
-            <a:off x="548640" y="1280160"/>
-            <a:ext cx="8046720" cy="1425448"/>
-          </a:xfrm>
-          <a:prstGeom prst="rect">
-            <a:avLst/>
-          </a:prstGeom>
-          <a:noFill/>
-        </p:spPr>
-        <p:txBody>
-          <a:bodyPr wrap="square" lIns="0" rIns="0" tIns="0" bIns="0">
-            <a:noAutofit/>
-          </a:bodyPr>
-          <a:lstStyle/>
-          <a:p>
-            <a:pPr algn="l">
-              <a:lnSpc>
-                <a:spcPct val="114000"/>
-              </a:lnSpc>
-              <a:spcBef>
-                <a:spcPts val="0"/>
-              </a:spcBef>
-              <a:spcAft>
-                <a:spcPts val="400"/>
-              </a:spcAft>
-              <a:buNone/>
-              <a:defRPr sz="2000" b="0">
-                <a:solidFill>
-                  <a:srgbClr val="303437"/>
-                </a:solidFill>
-                <a:latin typeface="Noto Sans"/>
-              </a:defRPr>
-            </a:pPr>
-            <a:r>
-              <a:rPr sz="2000" b="1" lang="ja-JP" altLang="en-US">
-                <a:solidFill>
-                  <a:srgbClr val="303437"/>
-                </a:solidFill>
-                <a:latin typeface="Noto Sans"/>
-                <a:ea typeface="Noto Sans CJK JP"/>
-                <a:cs typeface="Noto Sans"/>
-              </a:rPr>
-              <a:t>ROUGE: A Package for Automatic Evaluation of Summaries</a:t>
-            </a:r>
-          </a:p>
-          <a:p>
-            <a:pPr algn="l">
-              <a:lnSpc>
-                <a:spcPct val="114000"/>
-              </a:lnSpc>
-              <a:spcBef>
-                <a:spcPts val="0"/>
-              </a:spcBef>
-              <a:spcAft>
-                <a:spcPts val="500"/>
-              </a:spcAft>
-              <a:buNone/>
-              <a:defRPr sz="1350" b="0">
-                <a:solidFill>
-                  <a:srgbClr val="303437"/>
-                </a:solidFill>
-                <a:latin typeface="Noto Sans"/>
-              </a:defRPr>
-            </a:pPr>
-            <a:r>
-              <a:rPr sz="1350" b="0" lang="ja-JP" altLang="en-US">
-                <a:solidFill>
-                  <a:srgbClr val="626669"/>
-                </a:solidFill>
-                <a:latin typeface="Noto Sans"/>
-                <a:ea typeface="Noto Sans CJK JP"/>
-                <a:cs typeface="Noto Sans"/>
-              </a:rPr>
-              <a:t>Chin-Yew Lin (2004) ／ Text Summarization Branches Out</a:t>
-            </a:r>
-          </a:p>
-          <a:p>
-            <a:pPr algn="l">
-              <a:lnSpc>
-                <a:spcPct val="114000"/>
-              </a:lnSpc>
-              <a:spcBef>
-                <a:spcPts val="0"/>
-              </a:spcBef>
-              <a:spcAft>
-                <a:spcPts val="400"/>
-              </a:spcAft>
-              <a:buNone/>
-              <a:defRPr sz="1850" b="0">
-                <a:solidFill>
-                  <a:srgbClr val="303437"/>
-                </a:solidFill>
-                <a:latin typeface="Noto Sans"/>
-              </a:defRPr>
-            </a:pPr>
-            <a:r>
-              <a:rPr sz="1850" b="0" lang="ja-JP" altLang="en-US">
-                <a:solidFill>
-                  <a:srgbClr val="303437"/>
-                </a:solidFill>
-                <a:latin typeface="Noto Sans"/>
-                <a:ea typeface="Noto Sans CJK JP"/>
-                <a:cs typeface="Noto Sans"/>
-              </a:rPr>
-              <a:t>参照要約と生成要約の語や語列の重なりを使い、複数の自動評価指標を定義する。</a:t>
-            </a:r>
-          </a:p>
-          <a:p>
-            <a:pPr algn="l">
-              <a:lnSpc>
-                <a:spcPct val="114000"/>
-              </a:lnSpc>
-              <a:spcBef>
-                <a:spcPts val="0"/>
-              </a:spcBef>
-              <a:spcAft>
-                <a:spcPts val="0"/>
-              </a:spcAft>
-              <a:buNone/>
-              <a:defRPr sz="1150" b="0">
-                <a:solidFill>
-                  <a:srgbClr val="303437"/>
-                </a:solidFill>
-                <a:latin typeface="Noto Sans"/>
-              </a:defRPr>
-            </a:pPr>
-            <a:r>
-              <a:rPr sz="1150" b="0" lang="ja-JP" altLang="en-US">
-                <a:solidFill>
-                  <a:srgbClr val="626669"/>
-                </a:solidFill>
-                <a:latin typeface="Noto Sans"/>
-                <a:ea typeface="Noto Sans CJK JP"/>
-                <a:cs typeface="Noto Sans"/>
-                <a:hlinkClick r:id="rId2"/>
-              </a:rPr>
               <a:t>https://aclanthology.org/W04-1013/</a:t>
-            </a:r>
-          </a:p>
-        </p:txBody>
-      </p:sp>
-      <p:sp>
-        <p:nvSpPr>
-          <p:cNvPr id="5" name="文献 2: LegalSummarizationScenario"/>
-          <p:cNvSpPr txBox="1"/>
-          <p:nvPr/>
-        </p:nvSpPr>
-        <p:spPr>
-          <a:xfrm>
-            <a:off x="548640" y="2937255"/>
-            <a:ext cx="8046720" cy="1591945"/>
-          </a:xfrm>
-          <a:prstGeom prst="rect">
-            <a:avLst/>
-          </a:prstGeom>
-          <a:noFill/>
-        </p:spPr>
-        <p:txBody>
-          <a:bodyPr wrap="square" lIns="0" rIns="0" tIns="0" bIns="0">
-            <a:noAutofit/>
-          </a:bodyPr>
-          <a:lstStyle/>
-          <a:p>
-            <a:pPr algn="l">
-              <a:lnSpc>
-                <a:spcPct val="114000"/>
-              </a:lnSpc>
-              <a:spcBef>
-                <a:spcPts val="0"/>
-              </a:spcBef>
-              <a:spcAft>
-                <a:spcPts val="400"/>
-              </a:spcAft>
-              <a:buNone/>
-              <a:defRPr sz="2000" b="0">
-                <a:solidFill>
-                  <a:srgbClr val="303437"/>
-                </a:solidFill>
-                <a:latin typeface="Noto Sans"/>
-              </a:defRPr>
-            </a:pPr>
-            <a:r>
-              <a:rPr sz="2000" b="1" lang="ja-JP" altLang="en-US">
-                <a:solidFill>
-                  <a:srgbClr val="303437"/>
-                </a:solidFill>
-                <a:latin typeface="Noto Sans"/>
-                <a:ea typeface="Noto Sans CJK JP"/>
-                <a:cs typeface="Noto Sans"/>
-              </a:rPr>
-              <a:t>LegalSummarizationScenario</a:t>
-            </a:r>
-          </a:p>
-          <a:p>
-            <a:pPr algn="l">
-              <a:lnSpc>
-                <a:spcPct val="114000"/>
-              </a:lnSpc>
-              <a:spcBef>
-                <a:spcPts val="0"/>
-              </a:spcBef>
-              <a:spcAft>
-                <a:spcPts val="500"/>
-              </a:spcAft>
-              <a:buNone/>
-              <a:defRPr sz="1350" b="0">
-                <a:solidFill>
-                  <a:srgbClr val="303437"/>
-                </a:solidFill>
-                <a:latin typeface="Noto Sans"/>
-              </a:defRPr>
-            </a:pPr>
-            <a:r>
-              <a:rPr sz="1350" b="0" lang="ja-JP" altLang="en-US">
-                <a:solidFill>
-                  <a:srgbClr val="626669"/>
-                </a:solidFill>
-                <a:latin typeface="Noto Sans"/>
-                <a:ea typeface="Noto Sans CJK JP"/>
-                <a:cs typeface="Noto Sans"/>
-              </a:rPr>
-              <a:t>Stanford CRFM ／ HELM v0.4.0</a:t>
-            </a:r>
-          </a:p>
-          <a:p>
-            <a:pPr algn="l">
-              <a:lnSpc>
-                <a:spcPct val="114000"/>
-              </a:lnSpc>
-              <a:spcBef>
-                <a:spcPts val="0"/>
-              </a:spcBef>
-              <a:spcAft>
-                <a:spcPts val="400"/>
-              </a:spcAft>
-              <a:buNone/>
-              <a:defRPr sz="1850" b="0">
-                <a:solidFill>
-                  <a:srgbClr val="303437"/>
-                </a:solidFill>
-                <a:latin typeface="Noto Sans"/>
-              </a:defRPr>
-            </a:pPr>
-            <a:r>
-              <a:rPr sz="1850" b="0" lang="ja-JP" altLang="en-US">
-                <a:solidFill>
-                  <a:srgbClr val="303437"/>
-                </a:solidFill>
-                <a:latin typeface="Noto Sans"/>
-                <a:ea typeface="Noto Sans CJK JP"/>
-                <a:cs typeface="Noto Sans"/>
-              </a:rPr>
-              <a:t>BillSum・MultiLexSum・EurLexSumを共通形式へ変換し、文書長と訓練例の選別を指定する実装。</a:t>
-            </a:r>
-          </a:p>
-          <a:p>
-            <a:pPr algn="l">
-              <a:lnSpc>
-                <a:spcPct val="114000"/>
-              </a:lnSpc>
-              <a:spcBef>
-                <a:spcPts val="0"/>
-              </a:spcBef>
-              <a:spcAft>
-                <a:spcPts val="0"/>
-              </a:spcAft>
-              <a:buNone/>
-              <a:defRPr sz="1150" b="0">
-                <a:solidFill>
-                  <a:srgbClr val="303437"/>
-                </a:solidFill>
-                <a:latin typeface="Noto Sans"/>
-              </a:defRPr>
-            </a:pPr>
-            <a:r>
-              <a:rPr sz="1150" b="0" lang="ja-JP" altLang="en-US">
-                <a:solidFill>
-                  <a:srgbClr val="626669"/>
-                </a:solidFill>
-                <a:latin typeface="Noto Sans"/>
-                <a:ea typeface="Noto Sans CJK JP"/>
-                <a:cs typeface="Noto Sans"/>
-                <a:hlinkClick r:id="rId3"/>
-              </a:rPr>
-              <a:t>https://github.com/stanford-crfm/helm/blob/v0.4.0/src/helm/benchmark/scenarios/legal_summarization_scenario.py</a:t>
             </a:r>
           </a:p>
         </p:txBody>
@@ -37035,22 +34719,8 @@
                 <a:ea typeface="Noto Sans CJK JP"/>
                 <a:cs typeface="Noto Sans"/>
               </a:rPr>
-              <a:t>[1] Aumiller et al., EUR-Lex-Sum. 固定HF revision 33ecb2d、test実レコード。 32012R0651 ／ english ／ test row 141（0始まり）</a:t>
-            </a:r>
-          </a:p>
-          <a:p>
-            <a:pPr>
-              <a:lnSpc>
-                <a:spcPts val="940"/>
-              </a:lnSpc>
-              <a:buNone/>
-              <a:defRPr sz="810" b="0">
-                <a:solidFill>
-                  <a:srgbClr val="303437"/>
-                </a:solidFill>
-                <a:latin typeface="Noto Sans"/>
-              </a:defRPr>
-            </a:pPr>
+              <a:t>[1] Aumiller et al. EUR-Lex-Sum. 32012R0651 ／ english  </a:t>
+            </a:r>
             <a:r>
               <a:rPr sz="810" b="0" lang="ja-JP" altLang="en-US">
                 <a:solidFill>
@@ -37342,18 +35012,7 @@
                 <a:ea typeface="Noto Sans CJK JP"/>
                 <a:cs typeface="Noto Sans"/>
               </a:rPr>
-              <a:t>[1] Aumiller et al., EUR-Lex-Sum. 固定HF revision 33ecb2d、test実レコード。</a:t>
-            </a:r>
-            <a:r>
-              <a:rPr sz="810" b="0" lang="ja-JP" altLang="en-US">
-                <a:solidFill>
-                  <a:srgbClr val="626669"/>
-                </a:solidFill>
-                <a:latin typeface="Noto Sans"/>
-                <a:ea typeface="Noto Sans CJK JP"/>
-                <a:cs typeface="Noto Sans"/>
-              </a:rPr>
-              <a:t>  </a:t>
+              <a:t>[1] Aumiller et al. EUR-Lex-Sum. </a:t>
             </a:r>
             <a:r>
               <a:rPr sz="810" b="0" lang="ja-JP" altLang="en-US">
@@ -37754,22 +35413,8 @@
                 <a:ea typeface="Noto Sans CJK JP"/>
                 <a:cs typeface="Noto Sans"/>
               </a:rPr>
-              <a:t>[1] Aumiller et al., EUR-Lex-Sum. 固定HF revision 33ecb2d、test実レコード。 32013R1260 ／ german ／ test row 143（0始まり）</a:t>
-            </a:r>
-          </a:p>
-          <a:p>
-            <a:pPr>
-              <a:lnSpc>
-                <a:spcPts val="940"/>
-              </a:lnSpc>
-              <a:buNone/>
-              <a:defRPr sz="810" b="0">
-                <a:solidFill>
-                  <a:srgbClr val="303437"/>
-                </a:solidFill>
-                <a:latin typeface="Noto Sans"/>
-              </a:defRPr>
-            </a:pPr>
+              <a:t>[1] Aumiller et al. EUR-Lex-Sum. 32013R1260 ／ german  </a:t>
+            </a:r>
             <a:r>
               <a:rPr sz="810" b="0" lang="ja-JP" altLang="en-US">
                 <a:solidFill>
